--- a/azure-test-environment/docs/architecture.pptx
+++ b/azure-test-environment/docs/architecture.pptx
@@ -3098,28 +3098,28 @@
         </p:nvSpPr>
         <p:spPr>
           <a:xfrm>
-            <a:off x="182880" y="91440"/>
-            <a:ext cx="11795760" cy="365760"/>
-          </a:xfrm>
-          <a:prstGeom prst="rect">
-            <a:avLst/>
-          </a:prstGeom>
-          <a:noFill/>
-        </p:spPr>
-        <p:txBody>
-          <a:bodyPr wrap="square">
-            <a:spAutoFit/>
-          </a:bodyPr>
-          <a:lstStyle/>
-          <a:p>
-            <a:pPr algn="ctr"/>
-            <a:r>
-              <a:rPr sz="1600" b="1">
+            <a:off x="182880" y="45720"/>
+            <a:ext cx="11795760" cy="347472"/>
+          </a:xfrm>
+          <a:prstGeom prst="rect">
+            <a:avLst/>
+          </a:prstGeom>
+          <a:noFill/>
+        </p:spPr>
+        <p:txBody>
+          <a:bodyPr wrap="square">
+            <a:spAutoFit/>
+          </a:bodyPr>
+          <a:lstStyle/>
+          <a:p>
+            <a:pPr algn="ctr"/>
+            <a:r>
+              <a:rPr sz="1500" b="1">
                 <a:solidFill>
                   <a:srgbClr val="0078D4"/>
                 </a:solidFill>
               </a:rPr>
-              <a:t>Azure 最小構成 — アーキテクチャ全体図</a:t>
+              <a:t>全体アーキテクチャ — リソースと Subnet の配置</a:t>
             </a:r>
           </a:p>
         </p:txBody>
@@ -3132,18 +3132,18 @@
         </p:nvSpPr>
         <p:spPr>
           <a:xfrm>
-            <a:off x="182880" y="548640"/>
-            <a:ext cx="1828800" cy="2011680"/>
+            <a:off x="137160" y="475488"/>
+            <a:ext cx="1691640" cy="1828800"/>
           </a:xfrm>
           <a:prstGeom prst="rect">
             <a:avLst/>
           </a:prstGeom>
           <a:solidFill>
-            <a:srgbClr val="F0F0F0"/>
+            <a:srgbClr val="F5F5F5"/>
           </a:solidFill>
-          <a:ln w="19050">
+          <a:ln w="15240">
             <a:solidFill>
-              <a:srgbClr val="808080"/>
+              <a:srgbClr val="909090"/>
             </a:solidFill>
           </a:ln>
         </p:spPr>
@@ -3177,23 +3177,23 @@
         </p:nvSpPr>
         <p:spPr>
           <a:xfrm>
-            <a:off x="182880" y="566928"/>
-            <a:ext cx="1828800" cy="228600"/>
-          </a:xfrm>
-          <a:prstGeom prst="rect">
-            <a:avLst/>
-          </a:prstGeom>
-          <a:noFill/>
-        </p:spPr>
-        <p:txBody>
-          <a:bodyPr wrap="square">
-            <a:spAutoFit/>
-          </a:bodyPr>
-          <a:lstStyle/>
-          <a:p>
-            <a:pPr algn="ctr"/>
-            <a:r>
-              <a:rPr sz="900" b="1">
+            <a:off x="137160" y="484632"/>
+            <a:ext cx="1691640" cy="201168"/>
+          </a:xfrm>
+          <a:prstGeom prst="rect">
+            <a:avLst/>
+          </a:prstGeom>
+          <a:noFill/>
+        </p:spPr>
+        <p:txBody>
+          <a:bodyPr wrap="square">
+            <a:spAutoFit/>
+          </a:bodyPr>
+          <a:lstStyle/>
+          <a:p>
+            <a:pPr algn="ctr"/>
+            <a:r>
+              <a:rPr sz="800" b="1">
                 <a:solidFill>
                   <a:srgbClr val="606060"/>
                 </a:solidFill>
@@ -3211,8 +3211,8 @@
         </p:nvSpPr>
         <p:spPr>
           <a:xfrm>
-            <a:off x="320040" y="868680"/>
-            <a:ext cx="1554480" cy="502920"/>
+            <a:off x="228600" y="749808"/>
+            <a:ext cx="1463040" cy="475488"/>
           </a:xfrm>
           <a:prstGeom prst="rect">
             <a:avLst/>
@@ -3220,9 +3220,9 @@
           <a:solidFill>
             <a:srgbClr val="FFFFFF"/>
           </a:solidFill>
-          <a:ln w="19050">
+          <a:ln w="15240">
             <a:solidFill>
-              <a:srgbClr val="808080"/>
+              <a:srgbClr val="909090"/>
             </a:solidFill>
           </a:ln>
         </p:spPr>
@@ -3256,23 +3256,23 @@
         </p:nvSpPr>
         <p:spPr>
           <a:xfrm>
-            <a:off x="320040" y="914400"/>
-            <a:ext cx="1554480" cy="228600"/>
-          </a:xfrm>
-          <a:prstGeom prst="rect">
-            <a:avLst/>
-          </a:prstGeom>
-          <a:noFill/>
-        </p:spPr>
-        <p:txBody>
-          <a:bodyPr wrap="square">
-            <a:spAutoFit/>
-          </a:bodyPr>
-          <a:lstStyle/>
-          <a:p>
-            <a:pPr algn="ctr"/>
-            <a:r>
-              <a:rPr sz="1000" b="1">
+            <a:off x="228600" y="786384"/>
+            <a:ext cx="1463040" cy="219456"/>
+          </a:xfrm>
+          <a:prstGeom prst="rect">
+            <a:avLst/>
+          </a:prstGeom>
+          <a:noFill/>
+        </p:spPr>
+        <p:txBody>
+          <a:bodyPr wrap="square">
+            <a:spAutoFit/>
+          </a:bodyPr>
+          <a:lstStyle/>
+          <a:p>
+            <a:pPr algn="ctr"/>
+            <a:r>
+              <a:rPr sz="900" b="1">
                 <a:solidFill>
                   <a:srgbClr val="1A1A1A"/>
                 </a:solidFill>
@@ -3290,23 +3290,23 @@
         </p:nvSpPr>
         <p:spPr>
           <a:xfrm>
-            <a:off x="320040" y="1124712"/>
-            <a:ext cx="1554480" cy="182880"/>
-          </a:xfrm>
-          <a:prstGeom prst="rect">
-            <a:avLst/>
-          </a:prstGeom>
-          <a:noFill/>
-        </p:spPr>
-        <p:txBody>
-          <a:bodyPr wrap="square">
-            <a:spAutoFit/>
-          </a:bodyPr>
-          <a:lstStyle/>
-          <a:p>
-            <a:pPr algn="ctr"/>
-            <a:r>
-              <a:rPr sz="800" b="0">
+            <a:off x="228600" y="996695"/>
+            <a:ext cx="1463040" cy="182880"/>
+          </a:xfrm>
+          <a:prstGeom prst="rect">
+            <a:avLst/>
+          </a:prstGeom>
+          <a:noFill/>
+        </p:spPr>
+        <p:txBody>
+          <a:bodyPr wrap="square">
+            <a:spAutoFit/>
+          </a:bodyPr>
+          <a:lstStyle/>
+          <a:p>
+            <a:pPr algn="ctr"/>
+            <a:r>
+              <a:rPr sz="750" b="0">
                 <a:solidFill>
                   <a:srgbClr val="606060"/>
                 </a:solidFill>
@@ -3324,8 +3324,8 @@
         </p:nvSpPr>
         <p:spPr>
           <a:xfrm>
-            <a:off x="320040" y="1508760"/>
-            <a:ext cx="1554480" cy="502920"/>
+            <a:off x="228600" y="1325880"/>
+            <a:ext cx="1463040" cy="475488"/>
           </a:xfrm>
           <a:prstGeom prst="rect">
             <a:avLst/>
@@ -3333,9 +3333,9 @@
           <a:solidFill>
             <a:srgbClr val="FFFFFF"/>
           </a:solidFill>
-          <a:ln w="19050">
+          <a:ln w="15240">
             <a:solidFill>
-              <a:srgbClr val="808080"/>
+              <a:srgbClr val="909090"/>
             </a:solidFill>
           </a:ln>
         </p:spPr>
@@ -3369,23 +3369,23 @@
         </p:nvSpPr>
         <p:spPr>
           <a:xfrm>
-            <a:off x="320040" y="1554480"/>
-            <a:ext cx="1554480" cy="228600"/>
-          </a:xfrm>
-          <a:prstGeom prst="rect">
-            <a:avLst/>
-          </a:prstGeom>
-          <a:noFill/>
-        </p:spPr>
-        <p:txBody>
-          <a:bodyPr wrap="square">
-            <a:spAutoFit/>
-          </a:bodyPr>
-          <a:lstStyle/>
-          <a:p>
-            <a:pPr algn="ctr"/>
-            <a:r>
-              <a:rPr sz="1000" b="1">
+            <a:off x="228600" y="1362456"/>
+            <a:ext cx="1463040" cy="219456"/>
+          </a:xfrm>
+          <a:prstGeom prst="rect">
+            <a:avLst/>
+          </a:prstGeom>
+          <a:noFill/>
+        </p:spPr>
+        <p:txBody>
+          <a:bodyPr wrap="square">
+            <a:spAutoFit/>
+          </a:bodyPr>
+          <a:lstStyle/>
+          <a:p>
+            <a:pPr algn="ctr"/>
+            <a:r>
+              <a:rPr sz="900" b="1">
                 <a:solidFill>
                   <a:srgbClr val="1A1A1A"/>
                 </a:solidFill>
@@ -3403,23 +3403,23 @@
         </p:nvSpPr>
         <p:spPr>
           <a:xfrm>
-            <a:off x="320040" y="1764792"/>
-            <a:ext cx="1554480" cy="182880"/>
-          </a:xfrm>
-          <a:prstGeom prst="rect">
-            <a:avLst/>
-          </a:prstGeom>
-          <a:noFill/>
-        </p:spPr>
-        <p:txBody>
-          <a:bodyPr wrap="square">
-            <a:spAutoFit/>
-          </a:bodyPr>
-          <a:lstStyle/>
-          <a:p>
-            <a:pPr algn="ctr"/>
-            <a:r>
-              <a:rPr sz="800" b="0">
+            <a:off x="228600" y="1572768"/>
+            <a:ext cx="1463040" cy="182880"/>
+          </a:xfrm>
+          <a:prstGeom prst="rect">
+            <a:avLst/>
+          </a:prstGeom>
+          <a:noFill/>
+        </p:spPr>
+        <p:txBody>
+          <a:bodyPr wrap="square">
+            <a:spAutoFit/>
+          </a:bodyPr>
+          <a:lstStyle/>
+          <a:p>
+            <a:pPr algn="ctr"/>
+            <a:r>
+              <a:rPr sz="750" b="0">
                 <a:solidFill>
                   <a:srgbClr val="606060"/>
                 </a:solidFill>
@@ -3437,16 +3437,16 @@
         </p:nvSpPr>
         <p:spPr>
           <a:xfrm>
-            <a:off x="2468880" y="1005840"/>
-            <a:ext cx="1463040" cy="640080"/>
+            <a:off x="2011680" y="411480"/>
+            <a:ext cx="7452360" cy="6172200"/>
           </a:xfrm>
           <a:prstGeom prst="rect">
             <a:avLst/>
           </a:prstGeom>
           <a:solidFill>
-            <a:srgbClr val="E0F0FF"/>
+            <a:srgbClr val="E3F2FD"/>
           </a:solidFill>
-          <a:ln w="19050">
+          <a:ln w="27940">
             <a:solidFill>
               <a:srgbClr val="0078D4"/>
             </a:solidFill>
@@ -3482,86 +3482,52 @@
         </p:nvSpPr>
         <p:spPr>
           <a:xfrm>
-            <a:off x="2468880" y="1051560"/>
-            <a:ext cx="1463040" cy="228600"/>
-          </a:xfrm>
-          <a:prstGeom prst="rect">
-            <a:avLst/>
-          </a:prstGeom>
-          <a:noFill/>
-        </p:spPr>
-        <p:txBody>
-          <a:bodyPr wrap="square">
-            <a:spAutoFit/>
-          </a:bodyPr>
-          <a:lstStyle/>
-          <a:p>
-            <a:pPr algn="ctr"/>
-            <a:r>
-              <a:rPr sz="1000" b="1">
-                <a:solidFill>
-                  <a:srgbClr val="1A1A1A"/>
-                </a:solidFill>
-              </a:rPr>
-              <a:t>VPN Gateway</a:t>
-            </a:r>
-          </a:p>
-        </p:txBody>
-      </p:sp>
-      <p:sp>
-        <p:nvSpPr>
-          <p:cNvPr id="13" name="TextBox 12"/>
-          <p:cNvSpPr txBox="1"/>
-          <p:nvPr/>
-        </p:nvSpPr>
-        <p:spPr>
-          <a:xfrm>
-            <a:off x="2468880" y="1261872"/>
-            <a:ext cx="1463040" cy="182880"/>
-          </a:xfrm>
-          <a:prstGeom prst="rect">
-            <a:avLst/>
-          </a:prstGeom>
-          <a:noFill/>
-        </p:spPr>
-        <p:txBody>
-          <a:bodyPr wrap="square">
-            <a:spAutoFit/>
-          </a:bodyPr>
-          <a:lstStyle/>
-          <a:p>
-            <a:pPr algn="ctr"/>
-            <a:r>
-              <a:rPr sz="800" b="0">
-                <a:solidFill>
-                  <a:srgbClr val="606060"/>
-                </a:solidFill>
-              </a:rPr>
-              <a:t>pip: output で確認</a:t>
-            </a:r>
-          </a:p>
-        </p:txBody>
-      </p:sp>
-      <p:sp>
-        <p:nvSpPr>
-          <p:cNvPr id="14" name="Rectangle 13"/>
+            <a:off x="2011680" y="429768"/>
+            <a:ext cx="7452360" cy="228600"/>
+          </a:xfrm>
+          <a:prstGeom prst="rect">
+            <a:avLst/>
+          </a:prstGeom>
+          <a:noFill/>
+        </p:spPr>
+        <p:txBody>
+          <a:bodyPr wrap="square">
+            <a:spAutoFit/>
+          </a:bodyPr>
+          <a:lstStyle/>
+          <a:p>
+            <a:pPr algn="ctr"/>
+            <a:r>
+              <a:rPr sz="900" b="1">
+                <a:solidFill>
+                  <a:srgbClr val="0078D4"/>
+                </a:solidFill>
+              </a:rPr>
+              <a:t>Virtual Network  10.0.0.0/16</a:t>
+            </a:r>
+          </a:p>
+        </p:txBody>
+      </p:sp>
+      <p:sp>
+        <p:nvSpPr>
+          <p:cNvPr id="13" name="Rectangle 12"/>
           <p:cNvSpPr/>
           <p:nvPr/>
         </p:nvSpPr>
         <p:spPr>
           <a:xfrm>
-            <a:off x="4297680" y="502920"/>
-            <a:ext cx="5029200" cy="5029200"/>
+            <a:off x="2176272" y="731520"/>
+            <a:ext cx="2103120" cy="868680"/>
           </a:xfrm>
           <a:prstGeom prst="rect">
             <a:avLst/>
           </a:prstGeom>
           <a:solidFill>
-            <a:srgbClr val="E8F4FD"/>
+            <a:srgbClr val="E8EAED"/>
           </a:solidFill>
-          <a:ln w="25400">
+          <a:ln w="15240">
             <a:solidFill>
-              <a:srgbClr val="0078D4"/>
+              <a:srgbClr val="909090"/>
             </a:solidFill>
           </a:ln>
         </p:spPr>
@@ -3589,58 +3555,58 @@
       </p:sp>
       <p:sp>
         <p:nvSpPr>
-          <p:cNvPr id="15" name="TextBox 14"/>
-          <p:cNvSpPr txBox="1"/>
-          <p:nvPr/>
-        </p:nvSpPr>
-        <p:spPr>
-          <a:xfrm>
-            <a:off x="4297680" y="521207"/>
-            <a:ext cx="5029200" cy="256032"/>
-          </a:xfrm>
-          <a:prstGeom prst="rect">
-            <a:avLst/>
-          </a:prstGeom>
-          <a:noFill/>
-        </p:spPr>
-        <p:txBody>
-          <a:bodyPr wrap="square">
-            <a:spAutoFit/>
-          </a:bodyPr>
-          <a:lstStyle/>
-          <a:p>
-            <a:pPr algn="ctr"/>
-            <a:r>
-              <a:rPr sz="900" b="1">
-                <a:solidFill>
-                  <a:srgbClr val="0078D4"/>
-                </a:solidFill>
-              </a:rPr>
-              <a:t>Virtual Network  10.0.0.0/16</a:t>
-            </a:r>
-          </a:p>
-        </p:txBody>
-      </p:sp>
-      <p:sp>
-        <p:nvSpPr>
-          <p:cNvPr id="16" name="Rectangle 15"/>
+          <p:cNvPr id="14" name="TextBox 13"/>
+          <p:cNvSpPr txBox="1"/>
+          <p:nvPr/>
+        </p:nvSpPr>
+        <p:spPr>
+          <a:xfrm>
+            <a:off x="2176272" y="749808"/>
+            <a:ext cx="2103120" cy="201168"/>
+          </a:xfrm>
+          <a:prstGeom prst="rect">
+            <a:avLst/>
+          </a:prstGeom>
+          <a:noFill/>
+        </p:spPr>
+        <p:txBody>
+          <a:bodyPr wrap="square">
+            <a:spAutoFit/>
+          </a:bodyPr>
+          <a:lstStyle/>
+          <a:p>
+            <a:pPr algn="ctr"/>
+            <a:r>
+              <a:rPr sz="750" b="1">
+                <a:solidFill>
+                  <a:srgbClr val="606060"/>
+                </a:solidFill>
+              </a:rPr>
+              <a:t>GatewaySubnet  10.0.255.0/27</a:t>
+            </a:r>
+          </a:p>
+        </p:txBody>
+      </p:sp>
+      <p:sp>
+        <p:nvSpPr>
+          <p:cNvPr id="15" name="Rectangle 14"/>
           <p:cNvSpPr/>
           <p:nvPr/>
         </p:nvSpPr>
         <p:spPr>
           <a:xfrm>
-            <a:off x="4480560" y="822960"/>
-            <a:ext cx="2194560" cy="502920"/>
+            <a:off x="2267712" y="1005840"/>
+            <a:ext cx="1920240" cy="475488"/>
           </a:xfrm>
           <a:prstGeom prst="rect">
             <a:avLst/>
           </a:prstGeom>
           <a:solidFill>
-            <a:srgbClr val="C8DCF0"/>
+            <a:srgbClr val="FFFFFF"/>
           </a:solidFill>
-          <a:ln w="12700">
+          <a:ln w="15240">
             <a:solidFill>
-              <a:srgbClr val="0078D4"/>
+              <a:srgbClr val="909090"/>
             </a:solidFill>
           </a:ln>
         </p:spPr>
@@ -3668,58 +3634,58 @@
       </p:sp>
       <p:sp>
         <p:nvSpPr>
-          <p:cNvPr id="17" name="TextBox 16"/>
-          <p:cNvSpPr txBox="1"/>
-          <p:nvPr/>
-        </p:nvSpPr>
-        <p:spPr>
-          <a:xfrm>
-            <a:off x="4480560" y="841248"/>
-            <a:ext cx="2194560" cy="182880"/>
-          </a:xfrm>
-          <a:prstGeom prst="rect">
-            <a:avLst/>
-          </a:prstGeom>
-          <a:noFill/>
-        </p:spPr>
-        <p:txBody>
-          <a:bodyPr wrap="square">
-            <a:spAutoFit/>
-          </a:bodyPr>
-          <a:lstStyle/>
-          <a:p>
-            <a:pPr algn="ctr"/>
-            <a:r>
-              <a:rPr sz="800" b="1">
-                <a:solidFill>
-                  <a:srgbClr val="0078D4"/>
-                </a:solidFill>
-              </a:rPr>
-              <a:t>GatewaySubnet  10.0.255.0/27</a:t>
-            </a:r>
-          </a:p>
-        </p:txBody>
-      </p:sp>
-      <p:sp>
-        <p:nvSpPr>
-          <p:cNvPr id="18" name="Rectangle 17"/>
+          <p:cNvPr id="16" name="TextBox 15"/>
+          <p:cNvSpPr txBox="1"/>
+          <p:nvPr/>
+        </p:nvSpPr>
+        <p:spPr>
+          <a:xfrm>
+            <a:off x="2267712" y="1042416"/>
+            <a:ext cx="1920240" cy="219456"/>
+          </a:xfrm>
+          <a:prstGeom prst="rect">
+            <a:avLst/>
+          </a:prstGeom>
+          <a:noFill/>
+        </p:spPr>
+        <p:txBody>
+          <a:bodyPr wrap="square">
+            <a:spAutoFit/>
+          </a:bodyPr>
+          <a:lstStyle/>
+          <a:p>
+            <a:pPr algn="ctr"/>
+            <a:r>
+              <a:rPr sz="900" b="1">
+                <a:solidFill>
+                  <a:srgbClr val="1A1A1A"/>
+                </a:solidFill>
+              </a:rPr>
+              <a:t>VPN Gateway</a:t>
+            </a:r>
+          </a:p>
+        </p:txBody>
+      </p:sp>
+      <p:sp>
+        <p:nvSpPr>
+          <p:cNvPr id="17" name="Rectangle 16"/>
           <p:cNvSpPr/>
           <p:nvPr/>
         </p:nvSpPr>
         <p:spPr>
           <a:xfrm>
-            <a:off x="4480560" y="1463040"/>
-            <a:ext cx="4663440" cy="3840480"/>
+            <a:off x="2176272" y="1719072"/>
+            <a:ext cx="2103120" cy="4663440"/>
           </a:xfrm>
           <a:prstGeom prst="rect">
             <a:avLst/>
           </a:prstGeom>
           <a:solidFill>
-            <a:srgbClr val="D0E8F8"/>
+            <a:srgbClr val="B2DFDB"/>
           </a:solidFill>
-          <a:ln w="12700">
+          <a:ln w="19050">
             <a:solidFill>
-              <a:srgbClr val="0078D4"/>
+              <a:srgbClr val="00695C"/>
             </a:solidFill>
           </a:ln>
         </p:spPr>
@@ -3747,34 +3713,68 @@
       </p:sp>
       <p:sp>
         <p:nvSpPr>
+          <p:cNvPr id="18" name="TextBox 17"/>
+          <p:cNvSpPr txBox="1"/>
+          <p:nvPr/>
+        </p:nvSpPr>
+        <p:spPr>
+          <a:xfrm>
+            <a:off x="2176272" y="1737360"/>
+            <a:ext cx="2103120" cy="201168"/>
+          </a:xfrm>
+          <a:prstGeom prst="rect">
+            <a:avLst/>
+          </a:prstGeom>
+          <a:noFill/>
+        </p:spPr>
+        <p:txBody>
+          <a:bodyPr wrap="square">
+            <a:spAutoFit/>
+          </a:bodyPr>
+          <a:lstStyle/>
+          <a:p>
+            <a:pPr algn="ctr"/>
+            <a:r>
+              <a:rPr sz="750" b="1">
+                <a:solidFill>
+                  <a:srgbClr val="00695C"/>
+                </a:solidFill>
+              </a:rPr>
+              <a:t>subnet-pe  10.0.2.0/24</a:t>
+            </a:r>
+          </a:p>
+        </p:txBody>
+      </p:sp>
+      <p:sp>
+        <p:nvSpPr>
           <p:cNvPr id="19" name="TextBox 18"/>
           <p:cNvSpPr txBox="1"/>
           <p:nvPr/>
         </p:nvSpPr>
         <p:spPr>
           <a:xfrm>
-            <a:off x="4480560" y="1481328"/>
-            <a:ext cx="4663440" cy="201168"/>
-          </a:xfrm>
-          <a:prstGeom prst="rect">
-            <a:avLst/>
-          </a:prstGeom>
-          <a:noFill/>
-        </p:spPr>
-        <p:txBody>
-          <a:bodyPr wrap="square">
-            <a:spAutoFit/>
-          </a:bodyPr>
-          <a:lstStyle/>
-          <a:p>
-            <a:pPr algn="ctr"/>
-            <a:r>
-              <a:rPr sz="800" b="1">
-                <a:solidFill>
-                  <a:srgbClr val="0078D4"/>
-                </a:solidFill>
-              </a:rPr>
-              <a:t>subnet-app  10.0.1.0/24</a:t>
+            <a:off x="2212848" y="1947672"/>
+            <a:ext cx="2029968" cy="182880"/>
+          </a:xfrm>
+          <a:prstGeom prst="rect">
+            <a:avLst/>
+          </a:prstGeom>
+          <a:noFill/>
+        </p:spPr>
+        <p:txBody>
+          <a:bodyPr wrap="square">
+            <a:spAutoFit/>
+          </a:bodyPr>
+          <a:lstStyle/>
+          <a:p>
+            <a:pPr algn="ctr"/>
+            <a:r>
+              <a:rPr sz="700" b="0">
+                <a:solidFill>
+                  <a:srgbClr val="00695C"/>
+                </a:solidFill>
+              </a:rPr>
+              <a:t>Private Endpoint 置き場</a:t>
             </a:r>
           </a:p>
         </p:txBody>
@@ -3787,17 +3787,19 @@
         </p:nvSpPr>
         <p:spPr>
           <a:xfrm>
-            <a:off x="8686800" y="1481328"/>
-            <a:ext cx="411480" cy="201168"/>
+            <a:off x="2240280" y="2176272"/>
+            <a:ext cx="1965960" cy="530352"/>
           </a:xfrm>
           <a:prstGeom prst="rect">
             <a:avLst/>
           </a:prstGeom>
           <a:solidFill>
-            <a:srgbClr val="FFC000"/>
+            <a:srgbClr val="E0F7FA"/>
           </a:solidFill>
-          <a:ln>
-            <a:noFill/>
+          <a:ln w="15240">
+            <a:solidFill>
+              <a:srgbClr val="00695C"/>
+            </a:solidFill>
           </a:ln>
         </p:spPr>
         <p:style>
@@ -3830,28 +3832,28 @@
         </p:nvSpPr>
         <p:spPr>
           <a:xfrm>
-            <a:off x="8686800" y="1481328"/>
-            <a:ext cx="411480" cy="201168"/>
-          </a:xfrm>
-          <a:prstGeom prst="rect">
-            <a:avLst/>
-          </a:prstGeom>
-          <a:noFill/>
-        </p:spPr>
-        <p:txBody>
-          <a:bodyPr wrap="square">
-            <a:spAutoFit/>
-          </a:bodyPr>
-          <a:lstStyle/>
-          <a:p>
-            <a:pPr algn="ctr"/>
-            <a:r>
-              <a:rPr sz="700" b="1">
+            <a:off x="2240280" y="2212848"/>
+            <a:ext cx="1965960" cy="219456"/>
+          </a:xfrm>
+          <a:prstGeom prst="rect">
+            <a:avLst/>
+          </a:prstGeom>
+          <a:noFill/>
+        </p:spPr>
+        <p:txBody>
+          <a:bodyPr wrap="square">
+            <a:spAutoFit/>
+          </a:bodyPr>
+          <a:lstStyle/>
+          <a:p>
+            <a:pPr algn="ctr"/>
+            <a:r>
+              <a:rPr sz="800" b="1">
                 <a:solidFill>
                   <a:srgbClr val="1A1A1A"/>
                 </a:solidFill>
               </a:rPr>
-              <a:t>NSG</a:t>
+              <a:t>PE: Frontend</a:t>
             </a:r>
           </a:p>
         </p:txBody>
@@ -3864,18 +3866,18 @@
         </p:nvSpPr>
         <p:spPr>
           <a:xfrm>
-            <a:off x="4617720" y="1737360"/>
-            <a:ext cx="4389120" cy="411480"/>
+            <a:off x="2240280" y="2834639"/>
+            <a:ext cx="1965960" cy="530352"/>
           </a:xfrm>
           <a:prstGeom prst="rect">
             <a:avLst/>
           </a:prstGeom>
           <a:solidFill>
-            <a:srgbClr val="D8F0E8"/>
+            <a:srgbClr val="E0F7FA"/>
           </a:solidFill>
-          <a:ln w="12700">
+          <a:ln w="15240">
             <a:solidFill>
-              <a:srgbClr val="107C10"/>
+              <a:srgbClr val="00695C"/>
             </a:solidFill>
           </a:ln>
         </p:spPr>
@@ -3909,28 +3911,28 @@
         </p:nvSpPr>
         <p:spPr>
           <a:xfrm>
-            <a:off x="4617720" y="1755648"/>
-            <a:ext cx="4389120" cy="182880"/>
-          </a:xfrm>
-          <a:prstGeom prst="rect">
-            <a:avLst/>
-          </a:prstGeom>
-          <a:noFill/>
-        </p:spPr>
-        <p:txBody>
-          <a:bodyPr wrap="square">
-            <a:spAutoFit/>
-          </a:bodyPr>
-          <a:lstStyle/>
-          <a:p>
-            <a:pPr algn="ctr"/>
-            <a:r>
-              <a:rPr sz="800" b="0">
-                <a:solidFill>
-                  <a:srgbClr val="107C10"/>
-                </a:solidFill>
-              </a:rPr>
-              <a:t>Private DNS Zone  privatelink.azurewebsites.net</a:t>
+            <a:off x="2240280" y="2871215"/>
+            <a:ext cx="1965960" cy="219456"/>
+          </a:xfrm>
+          <a:prstGeom prst="rect">
+            <a:avLst/>
+          </a:prstGeom>
+          <a:noFill/>
+        </p:spPr>
+        <p:txBody>
+          <a:bodyPr wrap="square">
+            <a:spAutoFit/>
+          </a:bodyPr>
+          <a:lstStyle/>
+          <a:p>
+            <a:pPr algn="ctr"/>
+            <a:r>
+              <a:rPr sz="800" b="1">
+                <a:solidFill>
+                  <a:srgbClr val="1A1A1A"/>
+                </a:solidFill>
+              </a:rPr>
+              <a:t>PE: Backend</a:t>
             </a:r>
           </a:p>
         </p:txBody>
@@ -3943,18 +3945,18 @@
         </p:nvSpPr>
         <p:spPr>
           <a:xfrm>
-            <a:off x="4617720" y="2286000"/>
-            <a:ext cx="2011680" cy="731520"/>
+            <a:off x="2240280" y="3493008"/>
+            <a:ext cx="1965960" cy="530352"/>
           </a:xfrm>
           <a:prstGeom prst="rect">
             <a:avLst/>
           </a:prstGeom>
           <a:solidFill>
-            <a:srgbClr val="FFFFFF"/>
+            <a:srgbClr val="E0F7FA"/>
           </a:solidFill>
-          <a:ln w="19050">
+          <a:ln w="15240">
             <a:solidFill>
-              <a:srgbClr val="0078D4"/>
+              <a:srgbClr val="00695C"/>
             </a:solidFill>
           </a:ln>
         </p:spPr>
@@ -3988,86 +3990,52 @@
         </p:nvSpPr>
         <p:spPr>
           <a:xfrm>
-            <a:off x="4617720" y="2331720"/>
-            <a:ext cx="2011680" cy="228600"/>
-          </a:xfrm>
-          <a:prstGeom prst="rect">
-            <a:avLst/>
-          </a:prstGeom>
-          <a:noFill/>
-        </p:spPr>
-        <p:txBody>
-          <a:bodyPr wrap="square">
-            <a:spAutoFit/>
-          </a:bodyPr>
-          <a:lstStyle/>
-          <a:p>
-            <a:pPr algn="ctr"/>
-            <a:r>
-              <a:rPr sz="1000" b="1">
+            <a:off x="2240280" y="3529584"/>
+            <a:ext cx="1965960" cy="219456"/>
+          </a:xfrm>
+          <a:prstGeom prst="rect">
+            <a:avLst/>
+          </a:prstGeom>
+          <a:noFill/>
+        </p:spPr>
+        <p:txBody>
+          <a:bodyPr wrap="square">
+            <a:spAutoFit/>
+          </a:bodyPr>
+          <a:lstStyle/>
+          <a:p>
+            <a:pPr algn="ctr"/>
+            <a:r>
+              <a:rPr sz="800" b="1">
                 <a:solidFill>
                   <a:srgbClr val="1A1A1A"/>
                 </a:solidFill>
               </a:rPr>
-              <a:t>App Service (Frontend)</a:t>
-            </a:r>
-          </a:p>
-        </p:txBody>
-      </p:sp>
-      <p:sp>
-        <p:nvSpPr>
-          <p:cNvPr id="26" name="TextBox 25"/>
-          <p:cNvSpPr txBox="1"/>
-          <p:nvPr/>
-        </p:nvSpPr>
-        <p:spPr>
-          <a:xfrm>
-            <a:off x="4617720" y="2542032"/>
-            <a:ext cx="2011680" cy="182880"/>
-          </a:xfrm>
-          <a:prstGeom prst="rect">
-            <a:avLst/>
-          </a:prstGeom>
-          <a:noFill/>
-        </p:spPr>
-        <p:txBody>
-          <a:bodyPr wrap="square">
-            <a:spAutoFit/>
-          </a:bodyPr>
-          <a:lstStyle/>
-          <a:p>
-            <a:pPr algn="ctr"/>
-            <a:r>
-              <a:rPr sz="800" b="0">
-                <a:solidFill>
-                  <a:srgbClr val="606060"/>
-                </a:solidFill>
-              </a:rPr>
-              <a:t>assistant-ui / Node</a:t>
-            </a:r>
-          </a:p>
-        </p:txBody>
-      </p:sp>
-      <p:sp>
-        <p:nvSpPr>
-          <p:cNvPr id="27" name="Rectangle 26"/>
+              <a:t>PE: Functions</a:t>
+            </a:r>
+          </a:p>
+        </p:txBody>
+      </p:sp>
+      <p:sp>
+        <p:nvSpPr>
+          <p:cNvPr id="26" name="Rectangle 25"/>
           <p:cNvSpPr/>
           <p:nvPr/>
         </p:nvSpPr>
         <p:spPr>
           <a:xfrm>
-            <a:off x="4617720" y="3063240"/>
-            <a:ext cx="2011680" cy="320040"/>
+            <a:off x="2240280" y="4151376"/>
+            <a:ext cx="1965960" cy="530352"/>
           </a:xfrm>
           <a:prstGeom prst="rect">
             <a:avLst/>
           </a:prstGeom>
           <a:solidFill>
-            <a:srgbClr val="E8F8FF"/>
+            <a:srgbClr val="E0F7FA"/>
           </a:solidFill>
-          <a:ln w="10160">
+          <a:ln w="15240">
             <a:solidFill>
-              <a:srgbClr val="0078D4"/>
+              <a:srgbClr val="00695C"/>
             </a:solidFill>
           </a:ln>
         </p:spPr>
@@ -4095,58 +4063,58 @@
       </p:sp>
       <p:sp>
         <p:nvSpPr>
-          <p:cNvPr id="28" name="TextBox 27"/>
-          <p:cNvSpPr txBox="1"/>
-          <p:nvPr/>
-        </p:nvSpPr>
-        <p:spPr>
-          <a:xfrm>
-            <a:off x="4617720" y="3081528"/>
-            <a:ext cx="2011680" cy="201168"/>
-          </a:xfrm>
-          <a:prstGeom prst="rect">
-            <a:avLst/>
-          </a:prstGeom>
-          <a:noFill/>
-        </p:spPr>
-        <p:txBody>
-          <a:bodyPr wrap="square">
-            <a:spAutoFit/>
-          </a:bodyPr>
-          <a:lstStyle/>
-          <a:p>
-            <a:pPr algn="ctr"/>
-            <a:r>
-              <a:rPr sz="700" b="0">
-                <a:solidFill>
-                  <a:srgbClr val="0078D4"/>
-                </a:solidFill>
-              </a:rPr>
-              <a:t>Private Endpoint</a:t>
-            </a:r>
-          </a:p>
-        </p:txBody>
-      </p:sp>
-      <p:sp>
-        <p:nvSpPr>
-          <p:cNvPr id="29" name="Rectangle 28"/>
+          <p:cNvPr id="27" name="TextBox 26"/>
+          <p:cNvSpPr txBox="1"/>
+          <p:nvPr/>
+        </p:nvSpPr>
+        <p:spPr>
+          <a:xfrm>
+            <a:off x="2240280" y="4187952"/>
+            <a:ext cx="1965960" cy="219456"/>
+          </a:xfrm>
+          <a:prstGeom prst="rect">
+            <a:avLst/>
+          </a:prstGeom>
+          <a:noFill/>
+        </p:spPr>
+        <p:txBody>
+          <a:bodyPr wrap="square">
+            <a:spAutoFit/>
+          </a:bodyPr>
+          <a:lstStyle/>
+          <a:p>
+            <a:pPr algn="ctr"/>
+            <a:r>
+              <a:rPr sz="800" b="1">
+                <a:solidFill>
+                  <a:srgbClr val="1A1A1A"/>
+                </a:solidFill>
+              </a:rPr>
+              <a:t>PE: Storage</a:t>
+            </a:r>
+          </a:p>
+        </p:txBody>
+      </p:sp>
+      <p:sp>
+        <p:nvSpPr>
+          <p:cNvPr id="28" name="Rectangle 27"/>
           <p:cNvSpPr/>
           <p:nvPr/>
         </p:nvSpPr>
         <p:spPr>
           <a:xfrm>
-            <a:off x="4617720" y="3566160"/>
-            <a:ext cx="2011680" cy="731520"/>
+            <a:off x="2240280" y="4809744"/>
+            <a:ext cx="1965960" cy="530352"/>
           </a:xfrm>
           <a:prstGeom prst="rect">
             <a:avLst/>
           </a:prstGeom>
           <a:solidFill>
-            <a:srgbClr val="FFFFFF"/>
+            <a:srgbClr val="E0F7FA"/>
           </a:solidFill>
-          <a:ln w="19050">
+          <a:ln w="15240">
             <a:solidFill>
-              <a:srgbClr val="0078D4"/>
+              <a:srgbClr val="00695C"/>
             </a:solidFill>
           </a:ln>
         </p:spPr>
@@ -4174,92 +4142,58 @@
       </p:sp>
       <p:sp>
         <p:nvSpPr>
-          <p:cNvPr id="30" name="TextBox 29"/>
-          <p:cNvSpPr txBox="1"/>
-          <p:nvPr/>
-        </p:nvSpPr>
-        <p:spPr>
-          <a:xfrm>
-            <a:off x="4617720" y="3611879"/>
-            <a:ext cx="2011680" cy="228600"/>
-          </a:xfrm>
-          <a:prstGeom prst="rect">
-            <a:avLst/>
-          </a:prstGeom>
-          <a:noFill/>
-        </p:spPr>
-        <p:txBody>
-          <a:bodyPr wrap="square">
-            <a:spAutoFit/>
-          </a:bodyPr>
-          <a:lstStyle/>
-          <a:p>
-            <a:pPr algn="ctr"/>
-            <a:r>
-              <a:rPr sz="1000" b="1">
+          <p:cNvPr id="29" name="TextBox 28"/>
+          <p:cNvSpPr txBox="1"/>
+          <p:nvPr/>
+        </p:nvSpPr>
+        <p:spPr>
+          <a:xfrm>
+            <a:off x="2240280" y="4846320"/>
+            <a:ext cx="1965960" cy="219456"/>
+          </a:xfrm>
+          <a:prstGeom prst="rect">
+            <a:avLst/>
+          </a:prstGeom>
+          <a:noFill/>
+        </p:spPr>
+        <p:txBody>
+          <a:bodyPr wrap="square">
+            <a:spAutoFit/>
+          </a:bodyPr>
+          <a:lstStyle/>
+          <a:p>
+            <a:pPr algn="ctr"/>
+            <a:r>
+              <a:rPr sz="800" b="1">
                 <a:solidFill>
                   <a:srgbClr val="1A1A1A"/>
                 </a:solidFill>
               </a:rPr>
-              <a:t>App Service (Backend)</a:t>
-            </a:r>
-          </a:p>
-        </p:txBody>
-      </p:sp>
-      <p:sp>
-        <p:nvSpPr>
-          <p:cNvPr id="31" name="TextBox 30"/>
-          <p:cNvSpPr txBox="1"/>
-          <p:nvPr/>
-        </p:nvSpPr>
-        <p:spPr>
-          <a:xfrm>
-            <a:off x="4617720" y="3822191"/>
-            <a:ext cx="2011680" cy="182880"/>
-          </a:xfrm>
-          <a:prstGeom prst="rect">
-            <a:avLst/>
-          </a:prstGeom>
-          <a:noFill/>
-        </p:spPr>
-        <p:txBody>
-          <a:bodyPr wrap="square">
-            <a:spAutoFit/>
-          </a:bodyPr>
-          <a:lstStyle/>
-          <a:p>
-            <a:pPr algn="ctr"/>
-            <a:r>
-              <a:rPr sz="800" b="0">
-                <a:solidFill>
-                  <a:srgbClr val="606060"/>
-                </a:solidFill>
-              </a:rPr>
-              <a:t>FastAPI / Python</a:t>
-            </a:r>
-          </a:p>
-        </p:txBody>
-      </p:sp>
-      <p:sp>
-        <p:nvSpPr>
-          <p:cNvPr id="32" name="Rectangle 31"/>
+              <a:t>PE: AI Search</a:t>
+            </a:r>
+          </a:p>
+        </p:txBody>
+      </p:sp>
+      <p:sp>
+        <p:nvSpPr>
+          <p:cNvPr id="30" name="Rectangle 29"/>
           <p:cNvSpPr/>
           <p:nvPr/>
         </p:nvSpPr>
         <p:spPr>
           <a:xfrm>
-            <a:off x="4617720" y="4343400"/>
-            <a:ext cx="2011680" cy="320040"/>
+            <a:off x="2240280" y="5468112"/>
+            <a:ext cx="1965960" cy="530352"/>
           </a:xfrm>
           <a:prstGeom prst="rect">
             <a:avLst/>
           </a:prstGeom>
           <a:solidFill>
-            <a:srgbClr val="E8F8FF"/>
+            <a:srgbClr val="E0F7FA"/>
           </a:solidFill>
-          <a:ln w="10160">
+          <a:ln w="15240">
             <a:solidFill>
-              <a:srgbClr val="0078D4"/>
+              <a:srgbClr val="00695C"/>
             </a:solidFill>
           </a:ln>
         </p:spPr>
@@ -4287,57 +4221,59 @@
       </p:sp>
       <p:sp>
         <p:nvSpPr>
-          <p:cNvPr id="33" name="TextBox 32"/>
-          <p:cNvSpPr txBox="1"/>
-          <p:nvPr/>
-        </p:nvSpPr>
-        <p:spPr>
-          <a:xfrm>
-            <a:off x="4617720" y="4361688"/>
-            <a:ext cx="2011680" cy="201168"/>
-          </a:xfrm>
-          <a:prstGeom prst="rect">
-            <a:avLst/>
-          </a:prstGeom>
-          <a:noFill/>
-        </p:spPr>
-        <p:txBody>
-          <a:bodyPr wrap="square">
-            <a:spAutoFit/>
-          </a:bodyPr>
-          <a:lstStyle/>
-          <a:p>
-            <a:pPr algn="ctr"/>
-            <a:r>
-              <a:rPr sz="700" b="0">
-                <a:solidFill>
-                  <a:srgbClr val="0078D4"/>
-                </a:solidFill>
-              </a:rPr>
-              <a:t>Private Endpoint</a:t>
-            </a:r>
-          </a:p>
-        </p:txBody>
-      </p:sp>
-      <p:sp>
-        <p:nvSpPr>
-          <p:cNvPr id="34" name="Rectangle 33"/>
+          <p:cNvPr id="31" name="TextBox 30"/>
+          <p:cNvSpPr txBox="1"/>
+          <p:nvPr/>
+        </p:nvSpPr>
+        <p:spPr>
+          <a:xfrm>
+            <a:off x="2240280" y="5504688"/>
+            <a:ext cx="1965960" cy="219456"/>
+          </a:xfrm>
+          <a:prstGeom prst="rect">
+            <a:avLst/>
+          </a:prstGeom>
+          <a:noFill/>
+        </p:spPr>
+        <p:txBody>
+          <a:bodyPr wrap="square">
+            <a:spAutoFit/>
+          </a:bodyPr>
+          <a:lstStyle/>
+          <a:p>
+            <a:pPr algn="ctr"/>
+            <a:r>
+              <a:rPr sz="800" b="1">
+                <a:solidFill>
+                  <a:srgbClr val="1A1A1A"/>
+                </a:solidFill>
+              </a:rPr>
+              <a:t>PE: Foundry</a:t>
+            </a:r>
+          </a:p>
+        </p:txBody>
+      </p:sp>
+      <p:sp>
+        <p:nvSpPr>
+          <p:cNvPr id="32" name="Rectangle 31"/>
           <p:cNvSpPr/>
           <p:nvPr/>
         </p:nvSpPr>
         <p:spPr>
           <a:xfrm>
-            <a:off x="6675120" y="2377440"/>
-            <a:ext cx="822960" cy="201168"/>
+            <a:off x="4434840" y="1719072"/>
+            <a:ext cx="2286000" cy="2286000"/>
           </a:xfrm>
           <a:prstGeom prst="rect">
             <a:avLst/>
           </a:prstGeom>
           <a:solidFill>
-            <a:srgbClr val="C0FFC0"/>
+            <a:srgbClr val="B3D9F7"/>
           </a:solidFill>
-          <a:ln>
-            <a:noFill/>
+          <a:ln w="19050">
+            <a:solidFill>
+              <a:srgbClr val="01579B"/>
+            </a:solidFill>
           </a:ln>
         </p:spPr>
         <p:style>
@@ -4364,57 +4300,93 @@
       </p:sp>
       <p:sp>
         <p:nvSpPr>
-          <p:cNvPr id="35" name="TextBox 34"/>
-          <p:cNvSpPr txBox="1"/>
-          <p:nvPr/>
-        </p:nvSpPr>
-        <p:spPr>
-          <a:xfrm>
-            <a:off x="6675120" y="2377440"/>
-            <a:ext cx="822960" cy="201168"/>
-          </a:xfrm>
-          <a:prstGeom prst="rect">
-            <a:avLst/>
-          </a:prstGeom>
-          <a:noFill/>
-        </p:spPr>
-        <p:txBody>
-          <a:bodyPr wrap="square">
-            <a:spAutoFit/>
-          </a:bodyPr>
-          <a:lstStyle/>
-          <a:p>
-            <a:pPr algn="ctr"/>
-            <a:r>
-              <a:rPr sz="700" b="1">
-                <a:solidFill>
-                  <a:srgbClr val="107C10"/>
-                </a:solidFill>
-              </a:rPr>
-              <a:t>Managed ID</a:t>
-            </a:r>
-          </a:p>
-        </p:txBody>
-      </p:sp>
-      <p:sp>
-        <p:nvSpPr>
-          <p:cNvPr id="36" name="Rectangle 35"/>
+          <p:cNvPr id="33" name="TextBox 32"/>
+          <p:cNvSpPr txBox="1"/>
+          <p:nvPr/>
+        </p:nvSpPr>
+        <p:spPr>
+          <a:xfrm>
+            <a:off x="4434840" y="1737360"/>
+            <a:ext cx="2286000" cy="201168"/>
+          </a:xfrm>
+          <a:prstGeom prst="rect">
+            <a:avLst/>
+          </a:prstGeom>
+          <a:noFill/>
+        </p:spPr>
+        <p:txBody>
+          <a:bodyPr wrap="square">
+            <a:spAutoFit/>
+          </a:bodyPr>
+          <a:lstStyle/>
+          <a:p>
+            <a:pPr algn="ctr"/>
+            <a:r>
+              <a:rPr sz="750" b="1">
+                <a:solidFill>
+                  <a:srgbClr val="01579B"/>
+                </a:solidFill>
+              </a:rPr>
+              <a:t>subnet-integration  10.0.1.0/24</a:t>
+            </a:r>
+          </a:p>
+        </p:txBody>
+      </p:sp>
+      <p:sp>
+        <p:nvSpPr>
+          <p:cNvPr id="34" name="TextBox 33"/>
+          <p:cNvSpPr txBox="1"/>
+          <p:nvPr/>
+        </p:nvSpPr>
+        <p:spPr>
+          <a:xfrm>
+            <a:off x="4480560" y="1947672"/>
+            <a:ext cx="2194560" cy="182880"/>
+          </a:xfrm>
+          <a:prstGeom prst="rect">
+            <a:avLst/>
+          </a:prstGeom>
+          <a:noFill/>
+        </p:spPr>
+        <p:txBody>
+          <a:bodyPr wrap="square">
+            <a:spAutoFit/>
+          </a:bodyPr>
+          <a:lstStyle/>
+          <a:p>
+            <a:pPr algn="ctr"/>
+            <a:r>
+              <a:rPr sz="700" b="0">
+                <a:solidFill>
+                  <a:srgbClr val="01579B"/>
+                </a:solidFill>
+              </a:rPr>
+              <a:t>App Service VNet Integration（出口）</a:t>
+            </a:r>
+          </a:p>
+        </p:txBody>
+      </p:sp>
+      <p:sp>
+        <p:nvSpPr>
+          <p:cNvPr id="35" name="Rectangle 34"/>
           <p:cNvSpPr/>
           <p:nvPr/>
         </p:nvSpPr>
         <p:spPr>
           <a:xfrm>
-            <a:off x="6675120" y="3657600"/>
-            <a:ext cx="822960" cy="201168"/>
+            <a:off x="4507992" y="2176272"/>
+            <a:ext cx="2103120" cy="594360"/>
           </a:xfrm>
           <a:prstGeom prst="rect">
             <a:avLst/>
           </a:prstGeom>
           <a:solidFill>
-            <a:srgbClr val="C0FFC0"/>
+            <a:srgbClr val="FFFFFF"/>
           </a:solidFill>
-          <a:ln>
-            <a:noFill/>
+          <a:ln w="15240">
+            <a:solidFill>
+              <a:srgbClr val="0078D4"/>
+            </a:solidFill>
           </a:ln>
         </p:spPr>
         <p:style>
@@ -4441,34 +4413,68 @@
       </p:sp>
       <p:sp>
         <p:nvSpPr>
+          <p:cNvPr id="36" name="TextBox 35"/>
+          <p:cNvSpPr txBox="1"/>
+          <p:nvPr/>
+        </p:nvSpPr>
+        <p:spPr>
+          <a:xfrm>
+            <a:off x="4507992" y="2212848"/>
+            <a:ext cx="2103120" cy="219456"/>
+          </a:xfrm>
+          <a:prstGeom prst="rect">
+            <a:avLst/>
+          </a:prstGeom>
+          <a:noFill/>
+        </p:spPr>
+        <p:txBody>
+          <a:bodyPr wrap="square">
+            <a:spAutoFit/>
+          </a:bodyPr>
+          <a:lstStyle/>
+          <a:p>
+            <a:pPr algn="ctr"/>
+            <a:r>
+              <a:rPr sz="900" b="1">
+                <a:solidFill>
+                  <a:srgbClr val="1A1A1A"/>
+                </a:solidFill>
+              </a:rPr>
+              <a:t>App Service</a:t>
+            </a:r>
+          </a:p>
+        </p:txBody>
+      </p:sp>
+      <p:sp>
+        <p:nvSpPr>
           <p:cNvPr id="37" name="TextBox 36"/>
           <p:cNvSpPr txBox="1"/>
           <p:nvPr/>
         </p:nvSpPr>
         <p:spPr>
           <a:xfrm>
-            <a:off x="6675120" y="3657600"/>
-            <a:ext cx="822960" cy="201168"/>
-          </a:xfrm>
-          <a:prstGeom prst="rect">
-            <a:avLst/>
-          </a:prstGeom>
-          <a:noFill/>
-        </p:spPr>
-        <p:txBody>
-          <a:bodyPr wrap="square">
-            <a:spAutoFit/>
-          </a:bodyPr>
-          <a:lstStyle/>
-          <a:p>
-            <a:pPr algn="ctr"/>
-            <a:r>
-              <a:rPr sz="700" b="1">
-                <a:solidFill>
-                  <a:srgbClr val="107C10"/>
-                </a:solidFill>
-              </a:rPr>
-              <a:t>Managed ID</a:t>
+            <a:off x="4507992" y="2423160"/>
+            <a:ext cx="2103120" cy="182880"/>
+          </a:xfrm>
+          <a:prstGeom prst="rect">
+            <a:avLst/>
+          </a:prstGeom>
+          <a:noFill/>
+        </p:spPr>
+        <p:txBody>
+          <a:bodyPr wrap="square">
+            <a:spAutoFit/>
+          </a:bodyPr>
+          <a:lstStyle/>
+          <a:p>
+            <a:pPr algn="ctr"/>
+            <a:r>
+              <a:rPr sz="750" b="0">
+                <a:solidFill>
+                  <a:srgbClr val="606060"/>
+                </a:solidFill>
+              </a:rPr>
+              <a:t>Frontend / assistant-ui</a:t>
             </a:r>
           </a:p>
         </p:txBody>
@@ -4481,18 +4487,18 @@
         </p:nvSpPr>
         <p:spPr>
           <a:xfrm>
-            <a:off x="9601200" y="2560320"/>
-            <a:ext cx="2286000" cy="2286000"/>
+            <a:off x="4507992" y="2852928"/>
+            <a:ext cx="2103120" cy="594360"/>
           </a:xfrm>
           <a:prstGeom prst="rect">
             <a:avLst/>
           </a:prstGeom>
           <a:solidFill>
-            <a:srgbClr val="FDF0FF"/>
+            <a:srgbClr val="FFFFFF"/>
           </a:solidFill>
-          <a:ln w="19050">
+          <a:ln w="15240">
             <a:solidFill>
-              <a:srgbClr val="800080"/>
+              <a:srgbClr val="0078D4"/>
             </a:solidFill>
           </a:ln>
         </p:spPr>
@@ -4526,8 +4532,8 @@
         </p:nvSpPr>
         <p:spPr>
           <a:xfrm>
-            <a:off x="9601200" y="2578608"/>
-            <a:ext cx="2286000" cy="228600"/>
+            <a:off x="4507992" y="2889504"/>
+            <a:ext cx="2103120" cy="219456"/>
           </a:xfrm>
           <a:prstGeom prst="rect">
             <a:avLst/>
@@ -4544,34 +4550,68 @@
             <a:r>
               <a:rPr sz="900" b="1">
                 <a:solidFill>
-                  <a:srgbClr val="600060"/>
-                </a:solidFill>
-              </a:rPr>
-              <a:t>Microsoft Foundry</a:t>
-            </a:r>
-          </a:p>
-        </p:txBody>
-      </p:sp>
-      <p:sp>
-        <p:nvSpPr>
-          <p:cNvPr id="40" name="Rectangle 39"/>
+                  <a:srgbClr val="1A1A1A"/>
+                </a:solidFill>
+              </a:rPr>
+              <a:t>App Service</a:t>
+            </a:r>
+          </a:p>
+        </p:txBody>
+      </p:sp>
+      <p:sp>
+        <p:nvSpPr>
+          <p:cNvPr id="40" name="TextBox 39"/>
+          <p:cNvSpPr txBox="1"/>
+          <p:nvPr/>
+        </p:nvSpPr>
+        <p:spPr>
+          <a:xfrm>
+            <a:off x="4507992" y="3099816"/>
+            <a:ext cx="2103120" cy="182880"/>
+          </a:xfrm>
+          <a:prstGeom prst="rect">
+            <a:avLst/>
+          </a:prstGeom>
+          <a:noFill/>
+        </p:spPr>
+        <p:txBody>
+          <a:bodyPr wrap="square">
+            <a:spAutoFit/>
+          </a:bodyPr>
+          <a:lstStyle/>
+          <a:p>
+            <a:pPr algn="ctr"/>
+            <a:r>
+              <a:rPr sz="750" b="0">
+                <a:solidFill>
+                  <a:srgbClr val="606060"/>
+                </a:solidFill>
+              </a:rPr>
+              <a:t>Backend / FastAPI</a:t>
+            </a:r>
+          </a:p>
+        </p:txBody>
+      </p:sp>
+      <p:sp>
+        <p:nvSpPr>
+          <p:cNvPr id="41" name="Rectangle 40"/>
           <p:cNvSpPr/>
           <p:nvPr/>
         </p:nvSpPr>
         <p:spPr>
           <a:xfrm>
-            <a:off x="9738360" y="2834640"/>
-            <a:ext cx="1965960" cy="502920"/>
+            <a:off x="4507992" y="3502152"/>
+            <a:ext cx="1005840" cy="201168"/>
           </a:xfrm>
           <a:prstGeom prst="rect">
             <a:avLst/>
           </a:prstGeom>
           <a:solidFill>
-            <a:srgbClr val="FFFFFF"/>
+            <a:srgbClr val="E8F5E9"/>
           </a:solidFill>
-          <a:ln w="19050">
+          <a:ln w="10160">
             <a:solidFill>
-              <a:srgbClr val="800080"/>
+              <a:srgbClr val="1B5E20"/>
             </a:solidFill>
           </a:ln>
         </p:spPr>
@@ -4599,68 +4639,34 @@
       </p:sp>
       <p:sp>
         <p:nvSpPr>
-          <p:cNvPr id="41" name="TextBox 40"/>
-          <p:cNvSpPr txBox="1"/>
-          <p:nvPr/>
-        </p:nvSpPr>
-        <p:spPr>
-          <a:xfrm>
-            <a:off x="9738360" y="2880360"/>
-            <a:ext cx="1965960" cy="228600"/>
-          </a:xfrm>
-          <a:prstGeom prst="rect">
-            <a:avLst/>
-          </a:prstGeom>
-          <a:noFill/>
-        </p:spPr>
-        <p:txBody>
-          <a:bodyPr wrap="square">
-            <a:spAutoFit/>
-          </a:bodyPr>
-          <a:lstStyle/>
-          <a:p>
-            <a:pPr algn="ctr"/>
-            <a:r>
-              <a:rPr sz="1000" b="1">
-                <a:solidFill>
-                  <a:srgbClr val="1A1A1A"/>
-                </a:solidFill>
-              </a:rPr>
-              <a:t>GPT-5.2</a:t>
-            </a:r>
-          </a:p>
-        </p:txBody>
-      </p:sp>
-      <p:sp>
-        <p:nvSpPr>
           <p:cNvPr id="42" name="TextBox 41"/>
           <p:cNvSpPr txBox="1"/>
           <p:nvPr/>
         </p:nvSpPr>
         <p:spPr>
           <a:xfrm>
-            <a:off x="9738360" y="3090672"/>
-            <a:ext cx="1965960" cy="182880"/>
-          </a:xfrm>
-          <a:prstGeom prst="rect">
-            <a:avLst/>
-          </a:prstGeom>
-          <a:noFill/>
-        </p:spPr>
-        <p:txBody>
-          <a:bodyPr wrap="square">
-            <a:spAutoFit/>
-          </a:bodyPr>
-          <a:lstStyle/>
-          <a:p>
-            <a:pPr algn="ctr"/>
-            <a:r>
-              <a:rPr sz="800" b="0">
-                <a:solidFill>
-                  <a:srgbClr val="606060"/>
-                </a:solidFill>
-              </a:rPr>
-              <a:t>LLM</a:t>
+            <a:off x="4507992" y="3511296"/>
+            <a:ext cx="1005840" cy="182880"/>
+          </a:xfrm>
+          <a:prstGeom prst="rect">
+            <a:avLst/>
+          </a:prstGeom>
+          <a:noFill/>
+        </p:spPr>
+        <p:txBody>
+          <a:bodyPr wrap="square">
+            <a:spAutoFit/>
+          </a:bodyPr>
+          <a:lstStyle/>
+          <a:p>
+            <a:pPr algn="ctr"/>
+            <a:r>
+              <a:rPr sz="700" b="1">
+                <a:solidFill>
+                  <a:srgbClr val="1B5E20"/>
+                </a:solidFill>
+              </a:rPr>
+              <a:t>Managed ID</a:t>
             </a:r>
           </a:p>
         </p:txBody>
@@ -4673,18 +4679,18 @@
         </p:nvSpPr>
         <p:spPr>
           <a:xfrm>
-            <a:off x="9738360" y="3474720"/>
-            <a:ext cx="1965960" cy="502920"/>
+            <a:off x="4507992" y="3502152"/>
+            <a:ext cx="1005840" cy="201168"/>
           </a:xfrm>
           <a:prstGeom prst="rect">
             <a:avLst/>
           </a:prstGeom>
           <a:solidFill>
-            <a:srgbClr val="FFFFFF"/>
+            <a:srgbClr val="E8F5E9"/>
           </a:solidFill>
-          <a:ln w="19050">
+          <a:ln w="10160">
             <a:solidFill>
-              <a:srgbClr val="800080"/>
+              <a:srgbClr val="1B5E20"/>
             </a:solidFill>
           </a:ln>
         </p:spPr>
@@ -4712,92 +4718,24 @@
       </p:sp>
       <p:sp>
         <p:nvSpPr>
-          <p:cNvPr id="44" name="TextBox 43"/>
-          <p:cNvSpPr txBox="1"/>
-          <p:nvPr/>
-        </p:nvSpPr>
-        <p:spPr>
-          <a:xfrm>
-            <a:off x="9738360" y="3520439"/>
-            <a:ext cx="1965960" cy="228600"/>
-          </a:xfrm>
-          <a:prstGeom prst="rect">
-            <a:avLst/>
-          </a:prstGeom>
-          <a:noFill/>
-        </p:spPr>
-        <p:txBody>
-          <a:bodyPr wrap="square">
-            <a:spAutoFit/>
-          </a:bodyPr>
-          <a:lstStyle/>
-          <a:p>
-            <a:pPr algn="ctr"/>
-            <a:r>
-              <a:rPr sz="1000" b="1">
-                <a:solidFill>
-                  <a:srgbClr val="1A1A1A"/>
-                </a:solidFill>
-              </a:rPr>
-              <a:t>Embedding 003</a:t>
-            </a:r>
-          </a:p>
-        </p:txBody>
-      </p:sp>
-      <p:sp>
-        <p:nvSpPr>
-          <p:cNvPr id="45" name="TextBox 44"/>
-          <p:cNvSpPr txBox="1"/>
-          <p:nvPr/>
-        </p:nvSpPr>
-        <p:spPr>
-          <a:xfrm>
-            <a:off x="9738360" y="3730752"/>
-            <a:ext cx="1965960" cy="182880"/>
-          </a:xfrm>
-          <a:prstGeom prst="rect">
-            <a:avLst/>
-          </a:prstGeom>
-          <a:noFill/>
-        </p:spPr>
-        <p:txBody>
-          <a:bodyPr wrap="square">
-            <a:spAutoFit/>
-          </a:bodyPr>
-          <a:lstStyle/>
-          <a:p>
-            <a:pPr algn="ctr"/>
-            <a:r>
-              <a:rPr sz="800" b="0">
-                <a:solidFill>
-                  <a:srgbClr val="606060"/>
-                </a:solidFill>
-              </a:rPr>
-              <a:t>埋め込みモデル</a:t>
-            </a:r>
-          </a:p>
-        </p:txBody>
-      </p:sp>
-      <p:sp>
-        <p:nvSpPr>
-          <p:cNvPr id="46" name="Rectangle 45"/>
+          <p:cNvPr id="44" name="Rectangle 43"/>
           <p:cNvSpPr/>
           <p:nvPr/>
         </p:nvSpPr>
         <p:spPr>
           <a:xfrm>
-            <a:off x="9738360" y="4114800"/>
-            <a:ext cx="1965960" cy="502920"/>
+            <a:off x="4434840" y="4160520"/>
+            <a:ext cx="2286000" cy="1508760"/>
           </a:xfrm>
           <a:prstGeom prst="rect">
             <a:avLst/>
           </a:prstGeom>
           <a:solidFill>
-            <a:srgbClr val="FFFFFF"/>
+            <a:srgbClr val="C8E6C9"/>
           </a:solidFill>
           <a:ln w="19050">
             <a:solidFill>
-              <a:srgbClr val="800080"/>
+              <a:srgbClr val="1B5E20"/>
             </a:solidFill>
           </a:ln>
         </p:spPr>
@@ -4825,82 +4763,1426 @@
       </p:sp>
       <p:sp>
         <p:nvSpPr>
-          <p:cNvPr id="47" name="TextBox 46"/>
-          <p:cNvSpPr txBox="1"/>
-          <p:nvPr/>
-        </p:nvSpPr>
-        <p:spPr>
-          <a:xfrm>
-            <a:off x="9738360" y="4160520"/>
-            <a:ext cx="1965960" cy="228600"/>
-          </a:xfrm>
-          <a:prstGeom prst="rect">
-            <a:avLst/>
-          </a:prstGeom>
-          <a:noFill/>
-        </p:spPr>
-        <p:txBody>
-          <a:bodyPr wrap="square">
-            <a:spAutoFit/>
-          </a:bodyPr>
-          <a:lstStyle/>
-          <a:p>
-            <a:pPr algn="ctr"/>
-            <a:r>
-              <a:rPr sz="1000" b="1">
+          <p:cNvPr id="45" name="TextBox 44"/>
+          <p:cNvSpPr txBox="1"/>
+          <p:nvPr/>
+        </p:nvSpPr>
+        <p:spPr>
+          <a:xfrm>
+            <a:off x="4434840" y="4178808"/>
+            <a:ext cx="2286000" cy="201168"/>
+          </a:xfrm>
+          <a:prstGeom prst="rect">
+            <a:avLst/>
+          </a:prstGeom>
+          <a:noFill/>
+        </p:spPr>
+        <p:txBody>
+          <a:bodyPr wrap="square">
+            <a:spAutoFit/>
+          </a:bodyPr>
+          <a:lstStyle/>
+          <a:p>
+            <a:pPr algn="ctr"/>
+            <a:r>
+              <a:rPr sz="750" b="1">
+                <a:solidFill>
+                  <a:srgbClr val="1B5E20"/>
+                </a:solidFill>
+              </a:rPr>
+              <a:t>subnet-func-integration  10.0.4.0/24</a:t>
+            </a:r>
+          </a:p>
+        </p:txBody>
+      </p:sp>
+      <p:sp>
+        <p:nvSpPr>
+          <p:cNvPr id="46" name="TextBox 45"/>
+          <p:cNvSpPr txBox="1"/>
+          <p:nvPr/>
+        </p:nvSpPr>
+        <p:spPr>
+          <a:xfrm>
+            <a:off x="4480560" y="4389120"/>
+            <a:ext cx="2194560" cy="182880"/>
+          </a:xfrm>
+          <a:prstGeom prst="rect">
+            <a:avLst/>
+          </a:prstGeom>
+          <a:noFill/>
+        </p:spPr>
+        <p:txBody>
+          <a:bodyPr wrap="square">
+            <a:spAutoFit/>
+          </a:bodyPr>
+          <a:lstStyle/>
+          <a:p>
+            <a:pPr algn="ctr"/>
+            <a:r>
+              <a:rPr sz="700" b="0">
+                <a:solidFill>
+                  <a:srgbClr val="1B5E20"/>
+                </a:solidFill>
+              </a:rPr>
+              <a:t>Functions VNet Integration（出口）</a:t>
+            </a:r>
+          </a:p>
+        </p:txBody>
+      </p:sp>
+      <p:sp>
+        <p:nvSpPr>
+          <p:cNvPr id="47" name="Rectangle 46"/>
+          <p:cNvSpPr/>
+          <p:nvPr/>
+        </p:nvSpPr>
+        <p:spPr>
+          <a:xfrm>
+            <a:off x="4507992" y="4617720"/>
+            <a:ext cx="2103120" cy="594360"/>
+          </a:xfrm>
+          <a:prstGeom prst="rect">
+            <a:avLst/>
+          </a:prstGeom>
+          <a:solidFill>
+            <a:srgbClr val="FFFFFF"/>
+          </a:solidFill>
+          <a:ln w="15240">
+            <a:solidFill>
+              <a:srgbClr val="1B5E20"/>
+            </a:solidFill>
+          </a:ln>
+        </p:spPr>
+        <p:style>
+          <a:lnRef idx="1">
+            <a:schemeClr val="accent1"/>
+          </a:lnRef>
+          <a:fillRef idx="3">
+            <a:schemeClr val="accent1"/>
+          </a:fillRef>
+          <a:effectRef idx="2">
+            <a:schemeClr val="accent1"/>
+          </a:effectRef>
+          <a:fontRef idx="minor">
+            <a:schemeClr val="lt1"/>
+          </a:fontRef>
+        </p:style>
+        <p:txBody>
+          <a:bodyPr rtlCol="0" anchor="ctr"/>
+          <a:lstStyle/>
+          <a:p>
+            <a:pPr algn="ctr"/>
+          </a:p>
+        </p:txBody>
+      </p:sp>
+      <p:sp>
+        <p:nvSpPr>
+          <p:cNvPr id="48" name="TextBox 47"/>
+          <p:cNvSpPr txBox="1"/>
+          <p:nvPr/>
+        </p:nvSpPr>
+        <p:spPr>
+          <a:xfrm>
+            <a:off x="4507992" y="4654296"/>
+            <a:ext cx="2103120" cy="219456"/>
+          </a:xfrm>
+          <a:prstGeom prst="rect">
+            <a:avLst/>
+          </a:prstGeom>
+          <a:noFill/>
+        </p:spPr>
+        <p:txBody>
+          <a:bodyPr wrap="square">
+            <a:spAutoFit/>
+          </a:bodyPr>
+          <a:lstStyle/>
+          <a:p>
+            <a:pPr algn="ctr"/>
+            <a:r>
+              <a:rPr sz="900" b="1">
                 <a:solidFill>
                   <a:srgbClr val="1A1A1A"/>
                 </a:solidFill>
               </a:rPr>
-              <a:t>Foundry Agent</a:t>
-            </a:r>
-          </a:p>
-        </p:txBody>
-      </p:sp>
-      <p:sp>
-        <p:nvSpPr>
-          <p:cNvPr id="48" name="TextBox 47"/>
-          <p:cNvSpPr txBox="1"/>
-          <p:nvPr/>
-        </p:nvSpPr>
-        <p:spPr>
-          <a:xfrm>
-            <a:off x="9738360" y="4370832"/>
-            <a:ext cx="1965960" cy="182880"/>
-          </a:xfrm>
-          <a:prstGeom prst="rect">
-            <a:avLst/>
-          </a:prstGeom>
-          <a:noFill/>
-        </p:spPr>
-        <p:txBody>
-          <a:bodyPr wrap="square">
-            <a:spAutoFit/>
-          </a:bodyPr>
-          <a:lstStyle/>
-          <a:p>
-            <a:pPr algn="ctr"/>
-            <a:r>
-              <a:rPr sz="800" b="0">
+              <a:t>Azure Functions</a:t>
+            </a:r>
+          </a:p>
+        </p:txBody>
+      </p:sp>
+      <p:sp>
+        <p:nvSpPr>
+          <p:cNvPr id="49" name="TextBox 48"/>
+          <p:cNvSpPr txBox="1"/>
+          <p:nvPr/>
+        </p:nvSpPr>
+        <p:spPr>
+          <a:xfrm>
+            <a:off x="4507992" y="4864608"/>
+            <a:ext cx="2103120" cy="182880"/>
+          </a:xfrm>
+          <a:prstGeom prst="rect">
+            <a:avLst/>
+          </a:prstGeom>
+          <a:noFill/>
+        </p:spPr>
+        <p:txBody>
+          <a:bodyPr wrap="square">
+            <a:spAutoFit/>
+          </a:bodyPr>
+          <a:lstStyle/>
+          <a:p>
+            <a:pPr algn="ctr"/>
+            <a:r>
+              <a:rPr sz="750" b="0">
                 <a:solidFill>
                   <a:srgbClr val="606060"/>
                 </a:solidFill>
               </a:rPr>
-              <a:t>agent-parent</a:t>
+              <a:t>Flex Consumption / RAG</a:t>
+            </a:r>
+          </a:p>
+        </p:txBody>
+      </p:sp>
+      <p:sp>
+        <p:nvSpPr>
+          <p:cNvPr id="50" name="Rectangle 49"/>
+          <p:cNvSpPr/>
+          <p:nvPr/>
+        </p:nvSpPr>
+        <p:spPr>
+          <a:xfrm>
+            <a:off x="4507992" y="5266944"/>
+            <a:ext cx="1005840" cy="201168"/>
+          </a:xfrm>
+          <a:prstGeom prst="rect">
+            <a:avLst/>
+          </a:prstGeom>
+          <a:solidFill>
+            <a:srgbClr val="E8F5E9"/>
+          </a:solidFill>
+          <a:ln w="10160">
+            <a:solidFill>
+              <a:srgbClr val="1B5E20"/>
+            </a:solidFill>
+          </a:ln>
+        </p:spPr>
+        <p:style>
+          <a:lnRef idx="1">
+            <a:schemeClr val="accent1"/>
+          </a:lnRef>
+          <a:fillRef idx="3">
+            <a:schemeClr val="accent1"/>
+          </a:fillRef>
+          <a:effectRef idx="2">
+            <a:schemeClr val="accent1"/>
+          </a:effectRef>
+          <a:fontRef idx="minor">
+            <a:schemeClr val="lt1"/>
+          </a:fontRef>
+        </p:style>
+        <p:txBody>
+          <a:bodyPr rtlCol="0" anchor="ctr"/>
+          <a:lstStyle/>
+          <a:p>
+            <a:pPr algn="ctr"/>
+          </a:p>
+        </p:txBody>
+      </p:sp>
+      <p:sp>
+        <p:nvSpPr>
+          <p:cNvPr id="51" name="TextBox 50"/>
+          <p:cNvSpPr txBox="1"/>
+          <p:nvPr/>
+        </p:nvSpPr>
+        <p:spPr>
+          <a:xfrm>
+            <a:off x="4507992" y="5276088"/>
+            <a:ext cx="1005840" cy="182880"/>
+          </a:xfrm>
+          <a:prstGeom prst="rect">
+            <a:avLst/>
+          </a:prstGeom>
+          <a:noFill/>
+        </p:spPr>
+        <p:txBody>
+          <a:bodyPr wrap="square">
+            <a:spAutoFit/>
+          </a:bodyPr>
+          <a:lstStyle/>
+          <a:p>
+            <a:pPr algn="ctr"/>
+            <a:r>
+              <a:rPr sz="700" b="1">
+                <a:solidFill>
+                  <a:srgbClr val="1B5E20"/>
+                </a:solidFill>
+              </a:rPr>
+              <a:t>Managed ID</a:t>
+            </a:r>
+          </a:p>
+        </p:txBody>
+      </p:sp>
+      <p:sp>
+        <p:nvSpPr>
+          <p:cNvPr id="52" name="Rectangle 51"/>
+          <p:cNvSpPr/>
+          <p:nvPr/>
+        </p:nvSpPr>
+        <p:spPr>
+          <a:xfrm>
+            <a:off x="6903720" y="411480"/>
+            <a:ext cx="3566160" cy="6172200"/>
+          </a:xfrm>
+          <a:prstGeom prst="rect">
+            <a:avLst/>
+          </a:prstGeom>
+          <a:solidFill>
+            <a:srgbClr val="F3E5F5"/>
+          </a:solidFill>
+          <a:ln w="19050">
+            <a:solidFill>
+              <a:srgbClr val="6A1A9A"/>
+            </a:solidFill>
+          </a:ln>
+        </p:spPr>
+        <p:style>
+          <a:lnRef idx="1">
+            <a:schemeClr val="accent1"/>
+          </a:lnRef>
+          <a:fillRef idx="3">
+            <a:schemeClr val="accent1"/>
+          </a:fillRef>
+          <a:effectRef idx="2">
+            <a:schemeClr val="accent1"/>
+          </a:effectRef>
+          <a:fontRef idx="minor">
+            <a:schemeClr val="lt1"/>
+          </a:fontRef>
+        </p:style>
+        <p:txBody>
+          <a:bodyPr rtlCol="0" anchor="ctr"/>
+          <a:lstStyle/>
+          <a:p>
+            <a:pPr algn="ctr"/>
+          </a:p>
+        </p:txBody>
+      </p:sp>
+      <p:sp>
+        <p:nvSpPr>
+          <p:cNvPr id="53" name="TextBox 52"/>
+          <p:cNvSpPr txBox="1"/>
+          <p:nvPr/>
+        </p:nvSpPr>
+        <p:spPr>
+          <a:xfrm>
+            <a:off x="6903720" y="429768"/>
+            <a:ext cx="3566160" cy="228600"/>
+          </a:xfrm>
+          <a:prstGeom prst="rect">
+            <a:avLst/>
+          </a:prstGeom>
+          <a:noFill/>
+        </p:spPr>
+        <p:txBody>
+          <a:bodyPr wrap="square">
+            <a:spAutoFit/>
+          </a:bodyPr>
+          <a:lstStyle/>
+          <a:p>
+            <a:pPr algn="ctr"/>
+            <a:r>
+              <a:rPr sz="850" b="1">
+                <a:solidFill>
+                  <a:srgbClr val="6A1A9A"/>
+                </a:solidFill>
+              </a:rPr>
+              <a:t>Azure マネージドゾーン（VNet 外）</a:t>
+            </a:r>
+          </a:p>
+        </p:txBody>
+      </p:sp>
+      <p:sp>
+        <p:nvSpPr>
+          <p:cNvPr id="54" name="Rectangle 53"/>
+          <p:cNvSpPr/>
+          <p:nvPr/>
+        </p:nvSpPr>
+        <p:spPr>
+          <a:xfrm>
+            <a:off x="7040880" y="749808"/>
+            <a:ext cx="3291840" cy="594360"/>
+          </a:xfrm>
+          <a:prstGeom prst="rect">
+            <a:avLst/>
+          </a:prstGeom>
+          <a:solidFill>
+            <a:srgbClr val="FFFFFF"/>
+          </a:solidFill>
+          <a:ln w="15240">
+            <a:solidFill>
+              <a:srgbClr val="0078D4"/>
+            </a:solidFill>
+          </a:ln>
+        </p:spPr>
+        <p:style>
+          <a:lnRef idx="1">
+            <a:schemeClr val="accent1"/>
+          </a:lnRef>
+          <a:fillRef idx="3">
+            <a:schemeClr val="accent1"/>
+          </a:fillRef>
+          <a:effectRef idx="2">
+            <a:schemeClr val="accent1"/>
+          </a:effectRef>
+          <a:fontRef idx="minor">
+            <a:schemeClr val="lt1"/>
+          </a:fontRef>
+        </p:style>
+        <p:txBody>
+          <a:bodyPr rtlCol="0" anchor="ctr"/>
+          <a:lstStyle/>
+          <a:p>
+            <a:pPr algn="ctr"/>
+          </a:p>
+        </p:txBody>
+      </p:sp>
+      <p:sp>
+        <p:nvSpPr>
+          <p:cNvPr id="55" name="TextBox 54"/>
+          <p:cNvSpPr txBox="1"/>
+          <p:nvPr/>
+        </p:nvSpPr>
+        <p:spPr>
+          <a:xfrm>
+            <a:off x="7040880" y="786384"/>
+            <a:ext cx="3291840" cy="219456"/>
+          </a:xfrm>
+          <a:prstGeom prst="rect">
+            <a:avLst/>
+          </a:prstGeom>
+          <a:noFill/>
+        </p:spPr>
+        <p:txBody>
+          <a:bodyPr wrap="square">
+            <a:spAutoFit/>
+          </a:bodyPr>
+          <a:lstStyle/>
+          <a:p>
+            <a:pPr algn="ctr"/>
+            <a:r>
+              <a:rPr sz="900" b="1">
+                <a:solidFill>
+                  <a:srgbClr val="1A1A1A"/>
+                </a:solidFill>
+              </a:rPr>
+              <a:t>Storage Account</a:t>
+            </a:r>
+          </a:p>
+        </p:txBody>
+      </p:sp>
+      <p:sp>
+        <p:nvSpPr>
+          <p:cNvPr id="56" name="TextBox 55"/>
+          <p:cNvSpPr txBox="1"/>
+          <p:nvPr/>
+        </p:nvSpPr>
+        <p:spPr>
+          <a:xfrm>
+            <a:off x="7040880" y="996695"/>
+            <a:ext cx="3291840" cy="182880"/>
+          </a:xfrm>
+          <a:prstGeom prst="rect">
+            <a:avLst/>
+          </a:prstGeom>
+          <a:noFill/>
+        </p:spPr>
+        <p:txBody>
+          <a:bodyPr wrap="square">
+            <a:spAutoFit/>
+          </a:bodyPr>
+          <a:lstStyle/>
+          <a:p>
+            <a:pPr algn="ctr"/>
+            <a:r>
+              <a:rPr sz="750" b="0">
+                <a:solidFill>
+                  <a:srgbClr val="606060"/>
+                </a:solidFill>
+              </a:rPr>
+              <a:t>RAG 用 blob</a:t>
+            </a:r>
+          </a:p>
+        </p:txBody>
+      </p:sp>
+      <p:sp>
+        <p:nvSpPr>
+          <p:cNvPr id="57" name="Rectangle 56"/>
+          <p:cNvSpPr/>
+          <p:nvPr/>
+        </p:nvSpPr>
+        <p:spPr>
+          <a:xfrm>
+            <a:off x="7040880" y="1444752"/>
+            <a:ext cx="3291840" cy="594360"/>
+          </a:xfrm>
+          <a:prstGeom prst="rect">
+            <a:avLst/>
+          </a:prstGeom>
+          <a:solidFill>
+            <a:srgbClr val="FFFFFF"/>
+          </a:solidFill>
+          <a:ln w="15240">
+            <a:solidFill>
+              <a:srgbClr val="0078D4"/>
+            </a:solidFill>
+          </a:ln>
+        </p:spPr>
+        <p:style>
+          <a:lnRef idx="1">
+            <a:schemeClr val="accent1"/>
+          </a:lnRef>
+          <a:fillRef idx="3">
+            <a:schemeClr val="accent1"/>
+          </a:fillRef>
+          <a:effectRef idx="2">
+            <a:schemeClr val="accent1"/>
+          </a:effectRef>
+          <a:fontRef idx="minor">
+            <a:schemeClr val="lt1"/>
+          </a:fontRef>
+        </p:style>
+        <p:txBody>
+          <a:bodyPr rtlCol="0" anchor="ctr"/>
+          <a:lstStyle/>
+          <a:p>
+            <a:pPr algn="ctr"/>
+          </a:p>
+        </p:txBody>
+      </p:sp>
+      <p:sp>
+        <p:nvSpPr>
+          <p:cNvPr id="58" name="TextBox 57"/>
+          <p:cNvSpPr txBox="1"/>
+          <p:nvPr/>
+        </p:nvSpPr>
+        <p:spPr>
+          <a:xfrm>
+            <a:off x="7040880" y="1481328"/>
+            <a:ext cx="3291840" cy="219456"/>
+          </a:xfrm>
+          <a:prstGeom prst="rect">
+            <a:avLst/>
+          </a:prstGeom>
+          <a:noFill/>
+        </p:spPr>
+        <p:txBody>
+          <a:bodyPr wrap="square">
+            <a:spAutoFit/>
+          </a:bodyPr>
+          <a:lstStyle/>
+          <a:p>
+            <a:pPr algn="ctr"/>
+            <a:r>
+              <a:rPr sz="900" b="1">
+                <a:solidFill>
+                  <a:srgbClr val="1A1A1A"/>
+                </a:solidFill>
+              </a:rPr>
+              <a:t>Azure AI Search</a:t>
+            </a:r>
+          </a:p>
+        </p:txBody>
+      </p:sp>
+      <p:sp>
+        <p:nvSpPr>
+          <p:cNvPr id="59" name="TextBox 58"/>
+          <p:cNvSpPr txBox="1"/>
+          <p:nvPr/>
+        </p:nvSpPr>
+        <p:spPr>
+          <a:xfrm>
+            <a:off x="7040880" y="1691640"/>
+            <a:ext cx="3291840" cy="182880"/>
+          </a:xfrm>
+          <a:prstGeom prst="rect">
+            <a:avLst/>
+          </a:prstGeom>
+          <a:noFill/>
+        </p:spPr>
+        <p:txBody>
+          <a:bodyPr wrap="square">
+            <a:spAutoFit/>
+          </a:bodyPr>
+          <a:lstStyle/>
+          <a:p>
+            <a:pPr algn="ctr"/>
+            <a:r>
+              <a:rPr sz="750" b="0">
+                <a:solidFill>
+                  <a:srgbClr val="606060"/>
+                </a:solidFill>
+              </a:rPr>
+              <a:t>ベクトル検索 / RAG</a:t>
+            </a:r>
+          </a:p>
+        </p:txBody>
+      </p:sp>
+      <p:sp>
+        <p:nvSpPr>
+          <p:cNvPr id="60" name="Rectangle 59"/>
+          <p:cNvSpPr/>
+          <p:nvPr/>
+        </p:nvSpPr>
+        <p:spPr>
+          <a:xfrm>
+            <a:off x="7040880" y="2139696"/>
+            <a:ext cx="3291840" cy="594360"/>
+          </a:xfrm>
+          <a:prstGeom prst="rect">
+            <a:avLst/>
+          </a:prstGeom>
+          <a:solidFill>
+            <a:srgbClr val="FFFFFF"/>
+          </a:solidFill>
+          <a:ln w="15240">
+            <a:solidFill>
+              <a:srgbClr val="0078D4"/>
+            </a:solidFill>
+          </a:ln>
+        </p:spPr>
+        <p:style>
+          <a:lnRef idx="1">
+            <a:schemeClr val="accent1"/>
+          </a:lnRef>
+          <a:fillRef idx="3">
+            <a:schemeClr val="accent1"/>
+          </a:fillRef>
+          <a:effectRef idx="2">
+            <a:schemeClr val="accent1"/>
+          </a:effectRef>
+          <a:fontRef idx="minor">
+            <a:schemeClr val="lt1"/>
+          </a:fontRef>
+        </p:style>
+        <p:txBody>
+          <a:bodyPr rtlCol="0" anchor="ctr"/>
+          <a:lstStyle/>
+          <a:p>
+            <a:pPr algn="ctr"/>
+          </a:p>
+        </p:txBody>
+      </p:sp>
+      <p:sp>
+        <p:nvSpPr>
+          <p:cNvPr id="61" name="TextBox 60"/>
+          <p:cNvSpPr txBox="1"/>
+          <p:nvPr/>
+        </p:nvSpPr>
+        <p:spPr>
+          <a:xfrm>
+            <a:off x="7040880" y="2176272"/>
+            <a:ext cx="3291840" cy="219456"/>
+          </a:xfrm>
+          <a:prstGeom prst="rect">
+            <a:avLst/>
+          </a:prstGeom>
+          <a:noFill/>
+        </p:spPr>
+        <p:txBody>
+          <a:bodyPr wrap="square">
+            <a:spAutoFit/>
+          </a:bodyPr>
+          <a:lstStyle/>
+          <a:p>
+            <a:pPr algn="ctr"/>
+            <a:r>
+              <a:rPr sz="900" b="1">
+                <a:solidFill>
+                  <a:srgbClr val="1A1A1A"/>
+                </a:solidFill>
+              </a:rPr>
+              <a:t>App Service Frontend</a:t>
+            </a:r>
+          </a:p>
+        </p:txBody>
+      </p:sp>
+      <p:sp>
+        <p:nvSpPr>
+          <p:cNvPr id="62" name="TextBox 61"/>
+          <p:cNvSpPr txBox="1"/>
+          <p:nvPr/>
+        </p:nvSpPr>
+        <p:spPr>
+          <a:xfrm>
+            <a:off x="7040880" y="2386584"/>
+            <a:ext cx="3291840" cy="182880"/>
+          </a:xfrm>
+          <a:prstGeom prst="rect">
+            <a:avLst/>
+          </a:prstGeom>
+          <a:noFill/>
+        </p:spPr>
+        <p:txBody>
+          <a:bodyPr wrap="square">
+            <a:spAutoFit/>
+          </a:bodyPr>
+          <a:lstStyle/>
+          <a:p>
+            <a:pPr algn="ctr"/>
+            <a:r>
+              <a:rPr sz="750" b="0">
+                <a:solidFill>
+                  <a:srgbClr val="606060"/>
+                </a:solidFill>
+              </a:rPr>
+              <a:t>Public 無効</a:t>
+            </a:r>
+          </a:p>
+        </p:txBody>
+      </p:sp>
+      <p:sp>
+        <p:nvSpPr>
+          <p:cNvPr id="63" name="Rectangle 62"/>
+          <p:cNvSpPr/>
+          <p:nvPr/>
+        </p:nvSpPr>
+        <p:spPr>
+          <a:xfrm>
+            <a:off x="7040880" y="2834640"/>
+            <a:ext cx="3291840" cy="594360"/>
+          </a:xfrm>
+          <a:prstGeom prst="rect">
+            <a:avLst/>
+          </a:prstGeom>
+          <a:solidFill>
+            <a:srgbClr val="FFFFFF"/>
+          </a:solidFill>
+          <a:ln w="15240">
+            <a:solidFill>
+              <a:srgbClr val="0078D4"/>
+            </a:solidFill>
+          </a:ln>
+        </p:spPr>
+        <p:style>
+          <a:lnRef idx="1">
+            <a:schemeClr val="accent1"/>
+          </a:lnRef>
+          <a:fillRef idx="3">
+            <a:schemeClr val="accent1"/>
+          </a:fillRef>
+          <a:effectRef idx="2">
+            <a:schemeClr val="accent1"/>
+          </a:effectRef>
+          <a:fontRef idx="minor">
+            <a:schemeClr val="lt1"/>
+          </a:fontRef>
+        </p:style>
+        <p:txBody>
+          <a:bodyPr rtlCol="0" anchor="ctr"/>
+          <a:lstStyle/>
+          <a:p>
+            <a:pPr algn="ctr"/>
+          </a:p>
+        </p:txBody>
+      </p:sp>
+      <p:sp>
+        <p:nvSpPr>
+          <p:cNvPr id="64" name="TextBox 63"/>
+          <p:cNvSpPr txBox="1"/>
+          <p:nvPr/>
+        </p:nvSpPr>
+        <p:spPr>
+          <a:xfrm>
+            <a:off x="7040880" y="2871216"/>
+            <a:ext cx="3291840" cy="219456"/>
+          </a:xfrm>
+          <a:prstGeom prst="rect">
+            <a:avLst/>
+          </a:prstGeom>
+          <a:noFill/>
+        </p:spPr>
+        <p:txBody>
+          <a:bodyPr wrap="square">
+            <a:spAutoFit/>
+          </a:bodyPr>
+          <a:lstStyle/>
+          <a:p>
+            <a:pPr algn="ctr"/>
+            <a:r>
+              <a:rPr sz="900" b="1">
+                <a:solidFill>
+                  <a:srgbClr val="1A1A1A"/>
+                </a:solidFill>
+              </a:rPr>
+              <a:t>App Service Backend</a:t>
+            </a:r>
+          </a:p>
+        </p:txBody>
+      </p:sp>
+      <p:sp>
+        <p:nvSpPr>
+          <p:cNvPr id="65" name="TextBox 64"/>
+          <p:cNvSpPr txBox="1"/>
+          <p:nvPr/>
+        </p:nvSpPr>
+        <p:spPr>
+          <a:xfrm>
+            <a:off x="7040880" y="3081528"/>
+            <a:ext cx="3291840" cy="182880"/>
+          </a:xfrm>
+          <a:prstGeom prst="rect">
+            <a:avLst/>
+          </a:prstGeom>
+          <a:noFill/>
+        </p:spPr>
+        <p:txBody>
+          <a:bodyPr wrap="square">
+            <a:spAutoFit/>
+          </a:bodyPr>
+          <a:lstStyle/>
+          <a:p>
+            <a:pPr algn="ctr"/>
+            <a:r>
+              <a:rPr sz="750" b="0">
+                <a:solidFill>
+                  <a:srgbClr val="606060"/>
+                </a:solidFill>
+              </a:rPr>
+              <a:t>Public 無効</a:t>
+            </a:r>
+          </a:p>
+        </p:txBody>
+      </p:sp>
+      <p:sp>
+        <p:nvSpPr>
+          <p:cNvPr id="66" name="Rectangle 65"/>
+          <p:cNvSpPr/>
+          <p:nvPr/>
+        </p:nvSpPr>
+        <p:spPr>
+          <a:xfrm>
+            <a:off x="7040880" y="3529584"/>
+            <a:ext cx="3291840" cy="594360"/>
+          </a:xfrm>
+          <a:prstGeom prst="rect">
+            <a:avLst/>
+          </a:prstGeom>
+          <a:solidFill>
+            <a:srgbClr val="FFFFFF"/>
+          </a:solidFill>
+          <a:ln w="15240">
+            <a:solidFill>
+              <a:srgbClr val="1B5E20"/>
+            </a:solidFill>
+          </a:ln>
+        </p:spPr>
+        <p:style>
+          <a:lnRef idx="1">
+            <a:schemeClr val="accent1"/>
+          </a:lnRef>
+          <a:fillRef idx="3">
+            <a:schemeClr val="accent1"/>
+          </a:fillRef>
+          <a:effectRef idx="2">
+            <a:schemeClr val="accent1"/>
+          </a:effectRef>
+          <a:fontRef idx="minor">
+            <a:schemeClr val="lt1"/>
+          </a:fontRef>
+        </p:style>
+        <p:txBody>
+          <a:bodyPr rtlCol="0" anchor="ctr"/>
+          <a:lstStyle/>
+          <a:p>
+            <a:pPr algn="ctr"/>
+          </a:p>
+        </p:txBody>
+      </p:sp>
+      <p:sp>
+        <p:nvSpPr>
+          <p:cNvPr id="67" name="TextBox 66"/>
+          <p:cNvSpPr txBox="1"/>
+          <p:nvPr/>
+        </p:nvSpPr>
+        <p:spPr>
+          <a:xfrm>
+            <a:off x="7040880" y="3566160"/>
+            <a:ext cx="3291840" cy="219456"/>
+          </a:xfrm>
+          <a:prstGeom prst="rect">
+            <a:avLst/>
+          </a:prstGeom>
+          <a:noFill/>
+        </p:spPr>
+        <p:txBody>
+          <a:bodyPr wrap="square">
+            <a:spAutoFit/>
+          </a:bodyPr>
+          <a:lstStyle/>
+          <a:p>
+            <a:pPr algn="ctr"/>
+            <a:r>
+              <a:rPr sz="900" b="1">
+                <a:solidFill>
+                  <a:srgbClr val="1A1A1A"/>
+                </a:solidFill>
+              </a:rPr>
+              <a:t>Azure Functions</a:t>
+            </a:r>
+          </a:p>
+        </p:txBody>
+      </p:sp>
+      <p:sp>
+        <p:nvSpPr>
+          <p:cNvPr id="68" name="TextBox 67"/>
+          <p:cNvSpPr txBox="1"/>
+          <p:nvPr/>
+        </p:nvSpPr>
+        <p:spPr>
+          <a:xfrm>
+            <a:off x="7040880" y="3776472"/>
+            <a:ext cx="3291840" cy="182880"/>
+          </a:xfrm>
+          <a:prstGeom prst="rect">
+            <a:avLst/>
+          </a:prstGeom>
+          <a:noFill/>
+        </p:spPr>
+        <p:txBody>
+          <a:bodyPr wrap="square">
+            <a:spAutoFit/>
+          </a:bodyPr>
+          <a:lstStyle/>
+          <a:p>
+            <a:pPr algn="ctr"/>
+            <a:r>
+              <a:rPr sz="750" b="0">
+                <a:solidFill>
+                  <a:srgbClr val="606060"/>
+                </a:solidFill>
+              </a:rPr>
+              <a:t>Public 無効</a:t>
+            </a:r>
+          </a:p>
+        </p:txBody>
+      </p:sp>
+      <p:sp>
+        <p:nvSpPr>
+          <p:cNvPr id="69" name="Rectangle 68"/>
+          <p:cNvSpPr/>
+          <p:nvPr/>
+        </p:nvSpPr>
+        <p:spPr>
+          <a:xfrm>
+            <a:off x="7040880" y="4224528"/>
+            <a:ext cx="3291840" cy="2103120"/>
+          </a:xfrm>
+          <a:prstGeom prst="rect">
+            <a:avLst/>
+          </a:prstGeom>
+          <a:solidFill>
+            <a:srgbClr val="EEE0F8"/>
+          </a:solidFill>
+          <a:ln w="15240">
+            <a:solidFill>
+              <a:srgbClr val="6A1A9A"/>
+            </a:solidFill>
+          </a:ln>
+        </p:spPr>
+        <p:style>
+          <a:lnRef idx="1">
+            <a:schemeClr val="accent1"/>
+          </a:lnRef>
+          <a:fillRef idx="3">
+            <a:schemeClr val="accent1"/>
+          </a:fillRef>
+          <a:effectRef idx="2">
+            <a:schemeClr val="accent1"/>
+          </a:effectRef>
+          <a:fontRef idx="minor">
+            <a:schemeClr val="lt1"/>
+          </a:fontRef>
+        </p:style>
+        <p:txBody>
+          <a:bodyPr rtlCol="0" anchor="ctr"/>
+          <a:lstStyle/>
+          <a:p>
+            <a:pPr algn="ctr"/>
+          </a:p>
+        </p:txBody>
+      </p:sp>
+      <p:sp>
+        <p:nvSpPr>
+          <p:cNvPr id="70" name="TextBox 69"/>
+          <p:cNvSpPr txBox="1"/>
+          <p:nvPr/>
+        </p:nvSpPr>
+        <p:spPr>
+          <a:xfrm>
+            <a:off x="7040880" y="4242816"/>
+            <a:ext cx="3291840" cy="219456"/>
+          </a:xfrm>
+          <a:prstGeom prst="rect">
+            <a:avLst/>
+          </a:prstGeom>
+          <a:noFill/>
+        </p:spPr>
+        <p:txBody>
+          <a:bodyPr wrap="square">
+            <a:spAutoFit/>
+          </a:bodyPr>
+          <a:lstStyle/>
+          <a:p>
+            <a:pPr algn="ctr"/>
+            <a:r>
+              <a:rPr sz="850" b="1">
+                <a:solidFill>
+                  <a:srgbClr val="6A1A9A"/>
+                </a:solidFill>
+              </a:rPr>
+              <a:t>Azure AI Foundry</a:t>
+            </a:r>
+          </a:p>
+        </p:txBody>
+      </p:sp>
+      <p:sp>
+        <p:nvSpPr>
+          <p:cNvPr id="71" name="Rectangle 70"/>
+          <p:cNvSpPr/>
+          <p:nvPr/>
+        </p:nvSpPr>
+        <p:spPr>
+          <a:xfrm>
+            <a:off x="7132320" y="4517136"/>
+            <a:ext cx="1508760" cy="475488"/>
+          </a:xfrm>
+          <a:prstGeom prst="rect">
+            <a:avLst/>
+          </a:prstGeom>
+          <a:solidFill>
+            <a:srgbClr val="FFFFFF"/>
+          </a:solidFill>
+          <a:ln w="15240">
+            <a:solidFill>
+              <a:srgbClr val="6A1A9A"/>
+            </a:solidFill>
+          </a:ln>
+        </p:spPr>
+        <p:style>
+          <a:lnRef idx="1">
+            <a:schemeClr val="accent1"/>
+          </a:lnRef>
+          <a:fillRef idx="3">
+            <a:schemeClr val="accent1"/>
+          </a:fillRef>
+          <a:effectRef idx="2">
+            <a:schemeClr val="accent1"/>
+          </a:effectRef>
+          <a:fontRef idx="minor">
+            <a:schemeClr val="lt1"/>
+          </a:fontRef>
+        </p:style>
+        <p:txBody>
+          <a:bodyPr rtlCol="0" anchor="ctr"/>
+          <a:lstStyle/>
+          <a:p>
+            <a:pPr algn="ctr"/>
+          </a:p>
+        </p:txBody>
+      </p:sp>
+      <p:sp>
+        <p:nvSpPr>
+          <p:cNvPr id="72" name="TextBox 71"/>
+          <p:cNvSpPr txBox="1"/>
+          <p:nvPr/>
+        </p:nvSpPr>
+        <p:spPr>
+          <a:xfrm>
+            <a:off x="7132320" y="4553712"/>
+            <a:ext cx="1508760" cy="219456"/>
+          </a:xfrm>
+          <a:prstGeom prst="rect">
+            <a:avLst/>
+          </a:prstGeom>
+          <a:noFill/>
+        </p:spPr>
+        <p:txBody>
+          <a:bodyPr wrap="square">
+            <a:spAutoFit/>
+          </a:bodyPr>
+          <a:lstStyle/>
+          <a:p>
+            <a:pPr algn="ctr"/>
+            <a:r>
+              <a:rPr sz="900" b="1">
+                <a:solidFill>
+                  <a:srgbClr val="1A1A1A"/>
+                </a:solidFill>
+              </a:rPr>
+              <a:t>親エージェント</a:t>
+            </a:r>
+          </a:p>
+        </p:txBody>
+      </p:sp>
+      <p:sp>
+        <p:nvSpPr>
+          <p:cNvPr id="73" name="Rectangle 72"/>
+          <p:cNvSpPr/>
+          <p:nvPr/>
+        </p:nvSpPr>
+        <p:spPr>
+          <a:xfrm>
+            <a:off x="8732520" y="4517136"/>
+            <a:ext cx="1508760" cy="475488"/>
+          </a:xfrm>
+          <a:prstGeom prst="rect">
+            <a:avLst/>
+          </a:prstGeom>
+          <a:solidFill>
+            <a:srgbClr val="FFFFFF"/>
+          </a:solidFill>
+          <a:ln w="15240">
+            <a:solidFill>
+              <a:srgbClr val="6A1A9A"/>
+            </a:solidFill>
+          </a:ln>
+        </p:spPr>
+        <p:style>
+          <a:lnRef idx="1">
+            <a:schemeClr val="accent1"/>
+          </a:lnRef>
+          <a:fillRef idx="3">
+            <a:schemeClr val="accent1"/>
+          </a:fillRef>
+          <a:effectRef idx="2">
+            <a:schemeClr val="accent1"/>
+          </a:effectRef>
+          <a:fontRef idx="minor">
+            <a:schemeClr val="lt1"/>
+          </a:fontRef>
+        </p:style>
+        <p:txBody>
+          <a:bodyPr rtlCol="0" anchor="ctr"/>
+          <a:lstStyle/>
+          <a:p>
+            <a:pPr algn="ctr"/>
+          </a:p>
+        </p:txBody>
+      </p:sp>
+      <p:sp>
+        <p:nvSpPr>
+          <p:cNvPr id="74" name="TextBox 73"/>
+          <p:cNvSpPr txBox="1"/>
+          <p:nvPr/>
+        </p:nvSpPr>
+        <p:spPr>
+          <a:xfrm>
+            <a:off x="8732520" y="4553712"/>
+            <a:ext cx="1508760" cy="219456"/>
+          </a:xfrm>
+          <a:prstGeom prst="rect">
+            <a:avLst/>
+          </a:prstGeom>
+          <a:noFill/>
+        </p:spPr>
+        <p:txBody>
+          <a:bodyPr wrap="square">
+            <a:spAutoFit/>
+          </a:bodyPr>
+          <a:lstStyle/>
+          <a:p>
+            <a:pPr algn="ctr"/>
+            <a:r>
+              <a:rPr sz="900" b="1">
+                <a:solidFill>
+                  <a:srgbClr val="1A1A1A"/>
+                </a:solidFill>
+              </a:rPr>
+              <a:t>子エージェント</a:t>
+            </a:r>
+          </a:p>
+        </p:txBody>
+      </p:sp>
+      <p:sp>
+        <p:nvSpPr>
+          <p:cNvPr id="75" name="Rectangle 74"/>
+          <p:cNvSpPr/>
+          <p:nvPr/>
+        </p:nvSpPr>
+        <p:spPr>
+          <a:xfrm>
+            <a:off x="7132320" y="5074920"/>
+            <a:ext cx="1508760" cy="475488"/>
+          </a:xfrm>
+          <a:prstGeom prst="rect">
+            <a:avLst/>
+          </a:prstGeom>
+          <a:solidFill>
+            <a:srgbClr val="FFFFFF"/>
+          </a:solidFill>
+          <a:ln w="15240">
+            <a:solidFill>
+              <a:srgbClr val="6A1A9A"/>
+            </a:solidFill>
+          </a:ln>
+        </p:spPr>
+        <p:style>
+          <a:lnRef idx="1">
+            <a:schemeClr val="accent1"/>
+          </a:lnRef>
+          <a:fillRef idx="3">
+            <a:schemeClr val="accent1"/>
+          </a:fillRef>
+          <a:effectRef idx="2">
+            <a:schemeClr val="accent1"/>
+          </a:effectRef>
+          <a:fontRef idx="minor">
+            <a:schemeClr val="lt1"/>
+          </a:fontRef>
+        </p:style>
+        <p:txBody>
+          <a:bodyPr rtlCol="0" anchor="ctr"/>
+          <a:lstStyle/>
+          <a:p>
+            <a:pPr algn="ctr"/>
+          </a:p>
+        </p:txBody>
+      </p:sp>
+      <p:sp>
+        <p:nvSpPr>
+          <p:cNvPr id="76" name="TextBox 75"/>
+          <p:cNvSpPr txBox="1"/>
+          <p:nvPr/>
+        </p:nvSpPr>
+        <p:spPr>
+          <a:xfrm>
+            <a:off x="7132320" y="5111496"/>
+            <a:ext cx="1508760" cy="219456"/>
+          </a:xfrm>
+          <a:prstGeom prst="rect">
+            <a:avLst/>
+          </a:prstGeom>
+          <a:noFill/>
+        </p:spPr>
+        <p:txBody>
+          <a:bodyPr wrap="square">
+            <a:spAutoFit/>
+          </a:bodyPr>
+          <a:lstStyle/>
+          <a:p>
+            <a:pPr algn="ctr"/>
+            <a:r>
+              <a:rPr sz="900" b="1">
+                <a:solidFill>
+                  <a:srgbClr val="1A1A1A"/>
+                </a:solidFill>
+              </a:rPr>
+              <a:t>GPT-5.2</a:t>
+            </a:r>
+          </a:p>
+        </p:txBody>
+      </p:sp>
+      <p:sp>
+        <p:nvSpPr>
+          <p:cNvPr id="77" name="TextBox 76"/>
+          <p:cNvSpPr txBox="1"/>
+          <p:nvPr/>
+        </p:nvSpPr>
+        <p:spPr>
+          <a:xfrm>
+            <a:off x="7132320" y="5321808"/>
+            <a:ext cx="1508760" cy="182880"/>
+          </a:xfrm>
+          <a:prstGeom prst="rect">
+            <a:avLst/>
+          </a:prstGeom>
+          <a:noFill/>
+        </p:spPr>
+        <p:txBody>
+          <a:bodyPr wrap="square">
+            <a:spAutoFit/>
+          </a:bodyPr>
+          <a:lstStyle/>
+          <a:p>
+            <a:pPr algn="ctr"/>
+            <a:r>
+              <a:rPr sz="750" b="0">
+                <a:solidFill>
+                  <a:srgbClr val="606060"/>
+                </a:solidFill>
+              </a:rPr>
+              <a:t>LLM</a:t>
+            </a:r>
+          </a:p>
+        </p:txBody>
+      </p:sp>
+      <p:sp>
+        <p:nvSpPr>
+          <p:cNvPr id="78" name="Rectangle 77"/>
+          <p:cNvSpPr/>
+          <p:nvPr/>
+        </p:nvSpPr>
+        <p:spPr>
+          <a:xfrm>
+            <a:off x="8732520" y="5074920"/>
+            <a:ext cx="1508760" cy="475488"/>
+          </a:xfrm>
+          <a:prstGeom prst="rect">
+            <a:avLst/>
+          </a:prstGeom>
+          <a:solidFill>
+            <a:srgbClr val="FFFFFF"/>
+          </a:solidFill>
+          <a:ln w="15240">
+            <a:solidFill>
+              <a:srgbClr val="6A1A9A"/>
+            </a:solidFill>
+          </a:ln>
+        </p:spPr>
+        <p:style>
+          <a:lnRef idx="1">
+            <a:schemeClr val="accent1"/>
+          </a:lnRef>
+          <a:fillRef idx="3">
+            <a:schemeClr val="accent1"/>
+          </a:fillRef>
+          <a:effectRef idx="2">
+            <a:schemeClr val="accent1"/>
+          </a:effectRef>
+          <a:fontRef idx="minor">
+            <a:schemeClr val="lt1"/>
+          </a:fontRef>
+        </p:style>
+        <p:txBody>
+          <a:bodyPr rtlCol="0" anchor="ctr"/>
+          <a:lstStyle/>
+          <a:p>
+            <a:pPr algn="ctr"/>
+          </a:p>
+        </p:txBody>
+      </p:sp>
+      <p:sp>
+        <p:nvSpPr>
+          <p:cNvPr id="79" name="TextBox 78"/>
+          <p:cNvSpPr txBox="1"/>
+          <p:nvPr/>
+        </p:nvSpPr>
+        <p:spPr>
+          <a:xfrm>
+            <a:off x="8732520" y="5111496"/>
+            <a:ext cx="1508760" cy="219456"/>
+          </a:xfrm>
+          <a:prstGeom prst="rect">
+            <a:avLst/>
+          </a:prstGeom>
+          <a:noFill/>
+        </p:spPr>
+        <p:txBody>
+          <a:bodyPr wrap="square">
+            <a:spAutoFit/>
+          </a:bodyPr>
+          <a:lstStyle/>
+          <a:p>
+            <a:pPr algn="ctr"/>
+            <a:r>
+              <a:rPr sz="900" b="1">
+                <a:solidFill>
+                  <a:srgbClr val="1A1A1A"/>
+                </a:solidFill>
+              </a:rPr>
+              <a:t>Embedding 003</a:t>
+            </a:r>
+          </a:p>
+        </p:txBody>
+      </p:sp>
+      <p:sp>
+        <p:nvSpPr>
+          <p:cNvPr id="80" name="Rectangle 79"/>
+          <p:cNvSpPr/>
+          <p:nvPr/>
+        </p:nvSpPr>
+        <p:spPr>
+          <a:xfrm>
+            <a:off x="7040880" y="6400800"/>
+            <a:ext cx="3291840" cy="347472"/>
+          </a:xfrm>
+          <a:prstGeom prst="rect">
+            <a:avLst/>
+          </a:prstGeom>
+          <a:solidFill>
+            <a:srgbClr val="FFF8E1"/>
+          </a:solidFill>
+          <a:ln w="12700">
+            <a:solidFill>
+              <a:srgbClr val="F57F17"/>
+            </a:solidFill>
+          </a:ln>
+        </p:spPr>
+        <p:style>
+          <a:lnRef idx="1">
+            <a:schemeClr val="accent1"/>
+          </a:lnRef>
+          <a:fillRef idx="3">
+            <a:schemeClr val="accent1"/>
+          </a:fillRef>
+          <a:effectRef idx="2">
+            <a:schemeClr val="accent1"/>
+          </a:effectRef>
+          <a:fontRef idx="minor">
+            <a:schemeClr val="lt1"/>
+          </a:fontRef>
+        </p:style>
+        <p:txBody>
+          <a:bodyPr rtlCol="0" anchor="ctr"/>
+          <a:lstStyle/>
+          <a:p>
+            <a:pPr algn="ctr"/>
+          </a:p>
+        </p:txBody>
+      </p:sp>
+      <p:sp>
+        <p:nvSpPr>
+          <p:cNvPr id="81" name="TextBox 80"/>
+          <p:cNvSpPr txBox="1"/>
+          <p:nvPr/>
+        </p:nvSpPr>
+        <p:spPr>
+          <a:xfrm>
+            <a:off x="7040880" y="6409944"/>
+            <a:ext cx="3291840" cy="274320"/>
+          </a:xfrm>
+          <a:prstGeom prst="rect">
+            <a:avLst/>
+          </a:prstGeom>
+          <a:noFill/>
+        </p:spPr>
+        <p:txBody>
+          <a:bodyPr wrap="square">
+            <a:spAutoFit/>
+          </a:bodyPr>
+          <a:lstStyle/>
+          <a:p>
+            <a:pPr algn="ctr"/>
+            <a:r>
+              <a:rPr sz="800" b="1">
+                <a:solidFill>
+                  <a:srgbClr val="E65100"/>
+                </a:solidFill>
+              </a:rPr>
+              <a:t>Log Analytics Workspace（監視）</a:t>
             </a:r>
           </a:p>
         </p:txBody>
       </p:sp>
       <p:cxnSp>
         <p:nvCxnSpPr>
-          <p:cNvPr id="49" name="Connector 48"/>
+          <p:cNvPr id="82" name="Connector 81"/>
           <p:cNvCxnSpPr/>
           <p:nvPr/>
         </p:nvCxnSpPr>
         <p:spPr>
-          <a:xfrm>
-            <a:off x="1097280" y="1508760"/>
-            <a:ext cx="0" cy="246888"/>
+          <a:xfrm flipV="1">
+            <a:off x="1828800" y="1234440"/>
+            <a:ext cx="347472" cy="329184"/>
           </a:xfrm>
           <a:prstGeom prst="bentConnector3">
             <a:avLst/>
@@ -4928,14 +6210,14 @@
       </p:cxnSp>
       <p:cxnSp>
         <p:nvCxnSpPr>
-          <p:cNvPr id="50" name="Connector 49"/>
+          <p:cNvPr id="83" name="Connector 82"/>
           <p:cNvCxnSpPr/>
           <p:nvPr/>
         </p:nvCxnSpPr>
         <p:spPr>
-          <a:xfrm flipV="1">
-            <a:off x="1874519" y="1325880"/>
-            <a:ext cx="594361" cy="429768"/>
+          <a:xfrm>
+            <a:off x="2359152" y="1481328"/>
+            <a:ext cx="0" cy="237744"/>
           </a:xfrm>
           <a:prstGeom prst="bentConnector3">
             <a:avLst/>
@@ -4963,14 +6245,14 @@
       </p:cxnSp>
       <p:cxnSp>
         <p:nvCxnSpPr>
-          <p:cNvPr id="51" name="Connector 50"/>
+          <p:cNvPr id="84" name="Connector 83"/>
           <p:cNvCxnSpPr/>
           <p:nvPr/>
         </p:nvCxnSpPr>
         <p:spPr>
-          <a:xfrm flipV="1">
-            <a:off x="3931920" y="1069848"/>
-            <a:ext cx="548640" cy="256032"/>
+          <a:xfrm>
+            <a:off x="4206240" y="2450592"/>
+            <a:ext cx="228600" cy="0"/>
           </a:xfrm>
           <a:prstGeom prst="bentConnector3">
             <a:avLst/>
@@ -4998,14 +6280,14 @@
       </p:cxnSp>
       <p:cxnSp>
         <p:nvCxnSpPr>
-          <p:cNvPr id="52" name="Connector 51"/>
+          <p:cNvPr id="85" name="Connector 84"/>
           <p:cNvCxnSpPr/>
           <p:nvPr/>
         </p:nvCxnSpPr>
         <p:spPr>
           <a:xfrm>
-            <a:off x="5623560" y="3017520"/>
-            <a:ext cx="0" cy="548640"/>
+            <a:off x="4206240" y="3145536"/>
+            <a:ext cx="228600" cy="0"/>
           </a:xfrm>
           <a:prstGeom prst="bentConnector3">
             <a:avLst/>
@@ -5033,14 +6315,14 @@
       </p:cxnSp>
       <p:cxnSp>
         <p:nvCxnSpPr>
-          <p:cNvPr id="53" name="Connector 52"/>
+          <p:cNvPr id="86" name="Connector 85"/>
           <p:cNvCxnSpPr/>
           <p:nvPr/>
         </p:nvCxnSpPr>
         <p:spPr>
-          <a:xfrm flipV="1">
-            <a:off x="6629400" y="3520440"/>
-            <a:ext cx="2971800" cy="411480"/>
+          <a:xfrm>
+            <a:off x="4206240" y="3840480"/>
+            <a:ext cx="228600" cy="1069848"/>
           </a:xfrm>
           <a:prstGeom prst="bentConnector3">
             <a:avLst/>
@@ -5066,16 +6348,352 @@
           </a:fontRef>
         </p:style>
       </p:cxnSp>
-      <p:sp>
-        <p:nvSpPr>
-          <p:cNvPr id="54" name="TextBox 53"/>
-          <p:cNvSpPr txBox="1"/>
-          <p:nvPr/>
-        </p:nvSpPr>
-        <p:spPr>
-          <a:xfrm>
-            <a:off x="182880" y="5029200"/>
-            <a:ext cx="11795760" cy="228600"/>
+      <p:cxnSp>
+        <p:nvCxnSpPr>
+          <p:cNvPr id="87" name="Connector 86"/>
+          <p:cNvCxnSpPr/>
+          <p:nvPr/>
+        </p:nvCxnSpPr>
+        <p:spPr>
+          <a:xfrm>
+            <a:off x="6720840" y="1014984"/>
+            <a:ext cx="182880" cy="0"/>
+          </a:xfrm>
+          <a:prstGeom prst="bentConnector3">
+            <a:avLst/>
+          </a:prstGeom>
+          <a:ln w="19050">
+            <a:solidFill>
+              <a:srgbClr val="0078D4"/>
+            </a:solidFill>
+          </a:ln>
+        </p:spPr>
+        <p:style>
+          <a:lnRef idx="2">
+            <a:schemeClr val="accent1"/>
+          </a:lnRef>
+          <a:fillRef idx="0">
+            <a:schemeClr val="accent1"/>
+          </a:fillRef>
+          <a:effectRef idx="1">
+            <a:schemeClr val="accent1"/>
+          </a:effectRef>
+          <a:fontRef idx="minor">
+            <a:schemeClr val="tx1"/>
+          </a:fontRef>
+        </p:style>
+      </p:cxnSp>
+      <p:cxnSp>
+        <p:nvCxnSpPr>
+          <p:cNvPr id="88" name="Connector 87"/>
+          <p:cNvCxnSpPr/>
+          <p:nvPr/>
+        </p:nvCxnSpPr>
+        <p:spPr>
+          <a:xfrm>
+            <a:off x="6720840" y="1709928"/>
+            <a:ext cx="182880" cy="0"/>
+          </a:xfrm>
+          <a:prstGeom prst="bentConnector3">
+            <a:avLst/>
+          </a:prstGeom>
+          <a:ln w="19050">
+            <a:solidFill>
+              <a:srgbClr val="0078D4"/>
+            </a:solidFill>
+          </a:ln>
+        </p:spPr>
+        <p:style>
+          <a:lnRef idx="2">
+            <a:schemeClr val="accent1"/>
+          </a:lnRef>
+          <a:fillRef idx="0">
+            <a:schemeClr val="accent1"/>
+          </a:fillRef>
+          <a:effectRef idx="1">
+            <a:schemeClr val="accent1"/>
+          </a:effectRef>
+          <a:fontRef idx="minor">
+            <a:schemeClr val="tx1"/>
+          </a:fontRef>
+        </p:style>
+      </p:cxnSp>
+      <p:cxnSp>
+        <p:nvCxnSpPr>
+          <p:cNvPr id="89" name="Connector 88"/>
+          <p:cNvCxnSpPr/>
+          <p:nvPr/>
+        </p:nvCxnSpPr>
+        <p:spPr>
+          <a:xfrm>
+            <a:off x="6720840" y="4443984"/>
+            <a:ext cx="182880" cy="36576"/>
+          </a:xfrm>
+          <a:prstGeom prst="bentConnector3">
+            <a:avLst/>
+          </a:prstGeom>
+          <a:ln w="19050">
+            <a:solidFill>
+              <a:srgbClr val="0078D4"/>
+            </a:solidFill>
+          </a:ln>
+        </p:spPr>
+        <p:style>
+          <a:lnRef idx="2">
+            <a:schemeClr val="accent1"/>
+          </a:lnRef>
+          <a:fillRef idx="0">
+            <a:schemeClr val="accent1"/>
+          </a:fillRef>
+          <a:effectRef idx="1">
+            <a:schemeClr val="accent1"/>
+          </a:effectRef>
+          <a:fontRef idx="minor">
+            <a:schemeClr val="tx1"/>
+          </a:fontRef>
+        </p:style>
+      </p:cxnSp>
+      <p:sp>
+        <p:nvSpPr>
+          <p:cNvPr id="90" name="Rectangle 89"/>
+          <p:cNvSpPr/>
+          <p:nvPr/>
+        </p:nvSpPr>
+        <p:spPr>
+          <a:xfrm>
+            <a:off x="9875520" y="2423160"/>
+            <a:ext cx="548640" cy="201168"/>
+          </a:xfrm>
+          <a:prstGeom prst="rect">
+            <a:avLst/>
+          </a:prstGeom>
+          <a:solidFill>
+            <a:srgbClr val="C62828"/>
+          </a:solidFill>
+          <a:ln>
+            <a:noFill/>
+          </a:ln>
+        </p:spPr>
+        <p:style>
+          <a:lnRef idx="1">
+            <a:schemeClr val="accent1"/>
+          </a:lnRef>
+          <a:fillRef idx="3">
+            <a:schemeClr val="accent1"/>
+          </a:fillRef>
+          <a:effectRef idx="2">
+            <a:schemeClr val="accent1"/>
+          </a:effectRef>
+          <a:fontRef idx="minor">
+            <a:schemeClr val="lt1"/>
+          </a:fontRef>
+        </p:style>
+        <p:txBody>
+          <a:bodyPr rtlCol="0" anchor="ctr"/>
+          <a:lstStyle/>
+          <a:p>
+            <a:pPr algn="ctr"/>
+          </a:p>
+        </p:txBody>
+      </p:sp>
+      <p:sp>
+        <p:nvSpPr>
+          <p:cNvPr id="91" name="TextBox 90"/>
+          <p:cNvSpPr txBox="1"/>
+          <p:nvPr/>
+        </p:nvSpPr>
+        <p:spPr>
+          <a:xfrm>
+            <a:off x="9875520" y="2432304"/>
+            <a:ext cx="548640" cy="182880"/>
+          </a:xfrm>
+          <a:prstGeom prst="rect">
+            <a:avLst/>
+          </a:prstGeom>
+          <a:noFill/>
+        </p:spPr>
+        <p:txBody>
+          <a:bodyPr wrap="square">
+            <a:spAutoFit/>
+          </a:bodyPr>
+          <a:lstStyle/>
+          <a:p>
+            <a:pPr algn="ctr"/>
+            <a:r>
+              <a:rPr sz="650" b="1">
+                <a:solidFill>
+                  <a:srgbClr val="FFFFFF"/>
+                </a:solidFill>
+              </a:rPr>
+              <a:t>PUB×</a:t>
+            </a:r>
+          </a:p>
+        </p:txBody>
+      </p:sp>
+      <p:sp>
+        <p:nvSpPr>
+          <p:cNvPr id="92" name="Rectangle 91"/>
+          <p:cNvSpPr/>
+          <p:nvPr/>
+        </p:nvSpPr>
+        <p:spPr>
+          <a:xfrm>
+            <a:off x="9875520" y="3118103"/>
+            <a:ext cx="548640" cy="201168"/>
+          </a:xfrm>
+          <a:prstGeom prst="rect">
+            <a:avLst/>
+          </a:prstGeom>
+          <a:solidFill>
+            <a:srgbClr val="C62828"/>
+          </a:solidFill>
+          <a:ln>
+            <a:noFill/>
+          </a:ln>
+        </p:spPr>
+        <p:style>
+          <a:lnRef idx="1">
+            <a:schemeClr val="accent1"/>
+          </a:lnRef>
+          <a:fillRef idx="3">
+            <a:schemeClr val="accent1"/>
+          </a:fillRef>
+          <a:effectRef idx="2">
+            <a:schemeClr val="accent1"/>
+          </a:effectRef>
+          <a:fontRef idx="minor">
+            <a:schemeClr val="lt1"/>
+          </a:fontRef>
+        </p:style>
+        <p:txBody>
+          <a:bodyPr rtlCol="0" anchor="ctr"/>
+          <a:lstStyle/>
+          <a:p>
+            <a:pPr algn="ctr"/>
+          </a:p>
+        </p:txBody>
+      </p:sp>
+      <p:sp>
+        <p:nvSpPr>
+          <p:cNvPr id="93" name="TextBox 92"/>
+          <p:cNvSpPr txBox="1"/>
+          <p:nvPr/>
+        </p:nvSpPr>
+        <p:spPr>
+          <a:xfrm>
+            <a:off x="9875520" y="3127248"/>
+            <a:ext cx="548640" cy="182880"/>
+          </a:xfrm>
+          <a:prstGeom prst="rect">
+            <a:avLst/>
+          </a:prstGeom>
+          <a:noFill/>
+        </p:spPr>
+        <p:txBody>
+          <a:bodyPr wrap="square">
+            <a:spAutoFit/>
+          </a:bodyPr>
+          <a:lstStyle/>
+          <a:p>
+            <a:pPr algn="ctr"/>
+            <a:r>
+              <a:rPr sz="650" b="1">
+                <a:solidFill>
+                  <a:srgbClr val="FFFFFF"/>
+                </a:solidFill>
+              </a:rPr>
+              <a:t>PUB×</a:t>
+            </a:r>
+          </a:p>
+        </p:txBody>
+      </p:sp>
+      <p:sp>
+        <p:nvSpPr>
+          <p:cNvPr id="94" name="Rectangle 93"/>
+          <p:cNvSpPr/>
+          <p:nvPr/>
+        </p:nvSpPr>
+        <p:spPr>
+          <a:xfrm>
+            <a:off x="9875520" y="3813048"/>
+            <a:ext cx="548640" cy="201168"/>
+          </a:xfrm>
+          <a:prstGeom prst="rect">
+            <a:avLst/>
+          </a:prstGeom>
+          <a:solidFill>
+            <a:srgbClr val="C62828"/>
+          </a:solidFill>
+          <a:ln>
+            <a:noFill/>
+          </a:ln>
+        </p:spPr>
+        <p:style>
+          <a:lnRef idx="1">
+            <a:schemeClr val="accent1"/>
+          </a:lnRef>
+          <a:fillRef idx="3">
+            <a:schemeClr val="accent1"/>
+          </a:fillRef>
+          <a:effectRef idx="2">
+            <a:schemeClr val="accent1"/>
+          </a:effectRef>
+          <a:fontRef idx="minor">
+            <a:schemeClr val="lt1"/>
+          </a:fontRef>
+        </p:style>
+        <p:txBody>
+          <a:bodyPr rtlCol="0" anchor="ctr"/>
+          <a:lstStyle/>
+          <a:p>
+            <a:pPr algn="ctr"/>
+          </a:p>
+        </p:txBody>
+      </p:sp>
+      <p:sp>
+        <p:nvSpPr>
+          <p:cNvPr id="95" name="TextBox 94"/>
+          <p:cNvSpPr txBox="1"/>
+          <p:nvPr/>
+        </p:nvSpPr>
+        <p:spPr>
+          <a:xfrm>
+            <a:off x="9875520" y="3822191"/>
+            <a:ext cx="548640" cy="182880"/>
+          </a:xfrm>
+          <a:prstGeom prst="rect">
+            <a:avLst/>
+          </a:prstGeom>
+          <a:noFill/>
+        </p:spPr>
+        <p:txBody>
+          <a:bodyPr wrap="square">
+            <a:spAutoFit/>
+          </a:bodyPr>
+          <a:lstStyle/>
+          <a:p>
+            <a:pPr algn="ctr"/>
+            <a:r>
+              <a:rPr sz="650" b="1">
+                <a:solidFill>
+                  <a:srgbClr val="FFFFFF"/>
+                </a:solidFill>
+              </a:rPr>
+              <a:t>PUB×</a:t>
+            </a:r>
+          </a:p>
+        </p:txBody>
+      </p:sp>
+      <p:sp>
+        <p:nvSpPr>
+          <p:cNvPr id="96" name="TextBox 95"/>
+          <p:cNvSpPr txBox="1"/>
+          <p:nvPr/>
+        </p:nvSpPr>
+        <p:spPr>
+          <a:xfrm>
+            <a:off x="137160" y="6629400"/>
+            <a:ext cx="11887200" cy="201168"/>
           </a:xfrm>
           <a:prstGeom prst="rect">
             <a:avLst/>
@@ -5092,10 +6710,10 @@
             <a:r>
               <a:rPr sz="800" b="0">
                 <a:solidFill>
-                  <a:srgbClr val="C00000"/>
-                </a:solidFill>
-              </a:rPr>
-              <a:t>※ Public Network Access: Disabled（社外から DNS 解決不可・接続不可）</a:t>
+                  <a:srgbClr val="C62828"/>
+                </a:solidFill>
+              </a:rPr>
+              <a:t>※ App Service / Functions は Public Endpoint 無効 — 社外から DNS 解決不可・接続不可</a:t>
             </a:r>
           </a:p>
         </p:txBody>
@@ -5126,28 +6744,28 @@
         </p:nvSpPr>
         <p:spPr>
           <a:xfrm>
-            <a:off x="182880" y="91440"/>
-            <a:ext cx="11795760" cy="365760"/>
-          </a:xfrm>
-          <a:prstGeom prst="rect">
-            <a:avLst/>
-          </a:prstGeom>
-          <a:noFill/>
-        </p:spPr>
-        <p:txBody>
-          <a:bodyPr wrap="square">
-            <a:spAutoFit/>
-          </a:bodyPr>
-          <a:lstStyle/>
-          <a:p>
-            <a:pPr algn="ctr"/>
-            <a:r>
-              <a:rPr sz="1600" b="1">
+            <a:off x="182880" y="45720"/>
+            <a:ext cx="11795760" cy="347472"/>
+          </a:xfrm>
+          <a:prstGeom prst="rect">
+            <a:avLst/>
+          </a:prstGeom>
+          <a:noFill/>
+        </p:spPr>
+        <p:txBody>
+          <a:bodyPr wrap="square">
+            <a:spAutoFit/>
+          </a:bodyPr>
+          <a:lstStyle/>
+          <a:p>
+            <a:pPr algn="ctr"/>
+            <a:r>
+              <a:rPr sz="1500" b="1">
                 <a:solidFill>
                   <a:srgbClr val="0078D4"/>
                 </a:solidFill>
               </a:rPr>
-              <a:t>ネットワーク設計 — アドレス・リソース一覧</a:t>
+              <a:t>Subnet の役割と Private Endpoint 一覧</a:t>
             </a:r>
           </a:p>
         </p:txBody>
@@ -5160,8 +6778,8 @@
         </p:nvSpPr>
         <p:spPr>
           <a:xfrm>
-            <a:off x="274320" y="594360"/>
-            <a:ext cx="1280160" cy="347472"/>
+            <a:off x="228600" y="475488"/>
+            <a:ext cx="2103120" cy="320040"/>
           </a:xfrm>
           <a:prstGeom prst="rect">
             <a:avLst/>
@@ -5203,28 +6821,28 @@
         </p:nvSpPr>
         <p:spPr>
           <a:xfrm>
-            <a:off x="274320" y="640080"/>
-            <a:ext cx="1280160" cy="256032"/>
-          </a:xfrm>
-          <a:prstGeom prst="rect">
-            <a:avLst/>
-          </a:prstGeom>
-          <a:noFill/>
-        </p:spPr>
-        <p:txBody>
-          <a:bodyPr wrap="square">
-            <a:spAutoFit/>
-          </a:bodyPr>
-          <a:lstStyle/>
-          <a:p>
-            <a:pPr algn="ctr"/>
-            <a:r>
-              <a:rPr sz="1000" b="1">
+            <a:off x="228600" y="521208"/>
+            <a:ext cx="2103120" cy="256032"/>
+          </a:xfrm>
+          <a:prstGeom prst="rect">
+            <a:avLst/>
+          </a:prstGeom>
+          <a:noFill/>
+        </p:spPr>
+        <p:txBody>
+          <a:bodyPr wrap="square">
+            <a:spAutoFit/>
+          </a:bodyPr>
+          <a:lstStyle/>
+          <a:p>
+            <a:pPr algn="ctr"/>
+            <a:r>
+              <a:rPr sz="900" b="1">
                 <a:solidFill>
                   <a:srgbClr val="FFFFFF"/>
                 </a:solidFill>
               </a:rPr>
-              <a:t>カテゴリ</a:t>
+              <a:t>Subnet 名</a:t>
             </a:r>
           </a:p>
         </p:txBody>
@@ -5237,8 +6855,8 @@
         </p:nvSpPr>
         <p:spPr>
           <a:xfrm>
-            <a:off x="1645920" y="594360"/>
-            <a:ext cx="1920240" cy="347472"/>
+            <a:off x="2377440" y="475488"/>
+            <a:ext cx="1280160" cy="320040"/>
           </a:xfrm>
           <a:prstGeom prst="rect">
             <a:avLst/>
@@ -5280,28 +6898,28 @@
         </p:nvSpPr>
         <p:spPr>
           <a:xfrm>
-            <a:off x="1645920" y="640080"/>
-            <a:ext cx="1920240" cy="256032"/>
-          </a:xfrm>
-          <a:prstGeom prst="rect">
-            <a:avLst/>
-          </a:prstGeom>
-          <a:noFill/>
-        </p:spPr>
-        <p:txBody>
-          <a:bodyPr wrap="square">
-            <a:spAutoFit/>
-          </a:bodyPr>
-          <a:lstStyle/>
-          <a:p>
-            <a:pPr algn="ctr"/>
-            <a:r>
-              <a:rPr sz="1000" b="1">
+            <a:off x="2377440" y="521208"/>
+            <a:ext cx="1280160" cy="256032"/>
+          </a:xfrm>
+          <a:prstGeom prst="rect">
+            <a:avLst/>
+          </a:prstGeom>
+          <a:noFill/>
+        </p:spPr>
+        <p:txBody>
+          <a:bodyPr wrap="square">
+            <a:spAutoFit/>
+          </a:bodyPr>
+          <a:lstStyle/>
+          <a:p>
+            <a:pPr algn="ctr"/>
+            <a:r>
+              <a:rPr sz="900" b="1">
                 <a:solidFill>
                   <a:srgbClr val="FFFFFF"/>
                 </a:solidFill>
               </a:rPr>
-              <a:t>リソース名</a:t>
+              <a:t>アドレス</a:t>
             </a:r>
           </a:p>
         </p:txBody>
@@ -5314,8 +6932,8 @@
         </p:nvSpPr>
         <p:spPr>
           <a:xfrm>
-            <a:off x="3657600" y="594360"/>
-            <a:ext cx="2468880" cy="347472"/>
+            <a:off x="3703320" y="475488"/>
+            <a:ext cx="2377440" cy="320040"/>
           </a:xfrm>
           <a:prstGeom prst="rect">
             <a:avLst/>
@@ -5357,28 +6975,28 @@
         </p:nvSpPr>
         <p:spPr>
           <a:xfrm>
-            <a:off x="3657600" y="640080"/>
-            <a:ext cx="2468880" cy="256032"/>
-          </a:xfrm>
-          <a:prstGeom prst="rect">
-            <a:avLst/>
-          </a:prstGeom>
-          <a:noFill/>
-        </p:spPr>
-        <p:txBody>
-          <a:bodyPr wrap="square">
-            <a:spAutoFit/>
-          </a:bodyPr>
-          <a:lstStyle/>
-          <a:p>
-            <a:pPr algn="ctr"/>
-            <a:r>
-              <a:rPr sz="1000" b="1">
+            <a:off x="3703320" y="521208"/>
+            <a:ext cx="2377440" cy="256032"/>
+          </a:xfrm>
+          <a:prstGeom prst="rect">
+            <a:avLst/>
+          </a:prstGeom>
+          <a:noFill/>
+        </p:spPr>
+        <p:txBody>
+          <a:bodyPr wrap="square">
+            <a:spAutoFit/>
+          </a:bodyPr>
+          <a:lstStyle/>
+          <a:p>
+            <a:pPr algn="ctr"/>
+            <a:r>
+              <a:rPr sz="900" b="1">
                 <a:solidFill>
                   <a:srgbClr val="FFFFFF"/>
                 </a:solidFill>
               </a:rPr>
-              <a:t>設定値</a:t>
+              <a:t>役割</a:t>
             </a:r>
           </a:p>
         </p:txBody>
@@ -5391,8 +7009,8 @@
         </p:nvSpPr>
         <p:spPr>
           <a:xfrm>
-            <a:off x="6217920" y="594360"/>
-            <a:ext cx="5303520" cy="347472"/>
+            <a:off x="6126480" y="475488"/>
+            <a:ext cx="2103120" cy="320040"/>
           </a:xfrm>
           <a:prstGeom prst="rect">
             <a:avLst/>
@@ -5434,28 +7052,28 @@
         </p:nvSpPr>
         <p:spPr>
           <a:xfrm>
-            <a:off x="6217920" y="640080"/>
-            <a:ext cx="5303520" cy="256032"/>
-          </a:xfrm>
-          <a:prstGeom prst="rect">
-            <a:avLst/>
-          </a:prstGeom>
-          <a:noFill/>
-        </p:spPr>
-        <p:txBody>
-          <a:bodyPr wrap="square">
-            <a:spAutoFit/>
-          </a:bodyPr>
-          <a:lstStyle/>
-          <a:p>
-            <a:pPr algn="ctr"/>
-            <a:r>
-              <a:rPr sz="1000" b="1">
+            <a:off x="6126480" y="521208"/>
+            <a:ext cx="2103120" cy="256032"/>
+          </a:xfrm>
+          <a:prstGeom prst="rect">
+            <a:avLst/>
+          </a:prstGeom>
+          <a:noFill/>
+        </p:spPr>
+        <p:txBody>
+          <a:bodyPr wrap="square">
+            <a:spAutoFit/>
+          </a:bodyPr>
+          <a:lstStyle/>
+          <a:p>
+            <a:pPr algn="ctr"/>
+            <a:r>
+              <a:rPr sz="900" b="1">
                 <a:solidFill>
                   <a:srgbClr val="FFFFFF"/>
                 </a:solidFill>
               </a:rPr>
-              <a:t>備考</a:t>
+              <a:t>委任</a:t>
             </a:r>
           </a:p>
         </p:txBody>
@@ -5468,19 +7086,17 @@
         </p:nvSpPr>
         <p:spPr>
           <a:xfrm>
-            <a:off x="274320" y="941832"/>
-            <a:ext cx="1280160" cy="347472"/>
+            <a:off x="8275320" y="475488"/>
+            <a:ext cx="2194560" cy="320040"/>
           </a:xfrm>
           <a:prstGeom prst="rect">
             <a:avLst/>
           </a:prstGeom>
           <a:solidFill>
-            <a:srgbClr val="FFFFFF"/>
+            <a:srgbClr val="0078D4"/>
           </a:solidFill>
-          <a:ln w="6350">
-            <a:solidFill>
-              <a:srgbClr val="CCCCCC"/>
-            </a:solidFill>
+          <a:ln>
+            <a:noFill/>
           </a:ln>
         </p:spPr>
         <p:style>
@@ -5513,28 +7129,28 @@
         </p:nvSpPr>
         <p:spPr>
           <a:xfrm>
-            <a:off x="320040" y="987552"/>
-            <a:ext cx="1188719" cy="256032"/>
-          </a:xfrm>
-          <a:prstGeom prst="rect">
-            <a:avLst/>
-          </a:prstGeom>
-          <a:noFill/>
-        </p:spPr>
-        <p:txBody>
-          <a:bodyPr wrap="square">
-            <a:spAutoFit/>
-          </a:bodyPr>
-          <a:lstStyle/>
-          <a:p>
-            <a:pPr algn="l"/>
-            <a:r>
-              <a:rPr sz="900" b="0">
-                <a:solidFill>
-                  <a:srgbClr val="1A1A1A"/>
-                </a:solidFill>
-              </a:rPr>
-              <a:t>VNet</a:t>
+            <a:off x="8275320" y="521208"/>
+            <a:ext cx="2194560" cy="256032"/>
+          </a:xfrm>
+          <a:prstGeom prst="rect">
+            <a:avLst/>
+          </a:prstGeom>
+          <a:noFill/>
+        </p:spPr>
+        <p:txBody>
+          <a:bodyPr wrap="square">
+            <a:spAutoFit/>
+          </a:bodyPr>
+          <a:lstStyle/>
+          <a:p>
+            <a:pPr algn="ctr"/>
+            <a:r>
+              <a:rPr sz="900" b="1">
+                <a:solidFill>
+                  <a:srgbClr val="FFFFFF"/>
+                </a:solidFill>
+              </a:rPr>
+              <a:t>中に置くもの</a:t>
             </a:r>
           </a:p>
         </p:txBody>
@@ -5547,18 +7163,18 @@
         </p:nvSpPr>
         <p:spPr>
           <a:xfrm>
-            <a:off x="1645920" y="941832"/>
-            <a:ext cx="1920240" cy="347472"/>
+            <a:off x="228600" y="795528"/>
+            <a:ext cx="2103120" cy="530352"/>
           </a:xfrm>
           <a:prstGeom prst="rect">
             <a:avLst/>
           </a:prstGeom>
           <a:solidFill>
-            <a:srgbClr val="FFFFFF"/>
+            <a:srgbClr val="E8EAED"/>
           </a:solidFill>
-          <a:ln w="6350">
+          <a:ln w="10160">
             <a:solidFill>
-              <a:srgbClr val="CCCCCC"/>
+              <a:srgbClr val="909090"/>
             </a:solidFill>
           </a:ln>
         </p:spPr>
@@ -5592,8 +7208,8 @@
         </p:nvSpPr>
         <p:spPr>
           <a:xfrm>
-            <a:off x="1691640" y="987552"/>
-            <a:ext cx="1828800" cy="256032"/>
+            <a:off x="274320" y="832104"/>
+            <a:ext cx="2011679" cy="475488"/>
           </a:xfrm>
           <a:prstGeom prst="rect">
             <a:avLst/>
@@ -5608,12 +7224,12 @@
           <a:p>
             <a:pPr algn="l"/>
             <a:r>
-              <a:rPr sz="900" b="0">
-                <a:solidFill>
-                  <a:srgbClr val="1A1A1A"/>
-                </a:solidFill>
-              </a:rPr>
-              <a:t>vnet-rg-azure-test</a:t>
+              <a:rPr sz="850" b="1">
+                <a:solidFill>
+                  <a:srgbClr val="909090"/>
+                </a:solidFill>
+              </a:rPr>
+              <a:t>GatewaySubnet</a:t>
             </a:r>
           </a:p>
         </p:txBody>
@@ -5626,8 +7242,8 @@
         </p:nvSpPr>
         <p:spPr>
           <a:xfrm>
-            <a:off x="3657600" y="941832"/>
-            <a:ext cx="2468880" cy="347472"/>
+            <a:off x="2377440" y="795528"/>
+            <a:ext cx="1280160" cy="530352"/>
           </a:xfrm>
           <a:prstGeom prst="rect">
             <a:avLst/>
@@ -5635,7 +7251,7 @@
           <a:solidFill>
             <a:srgbClr val="FFFFFF"/>
           </a:solidFill>
-          <a:ln w="6350">
+          <a:ln w="10160">
             <a:solidFill>
               <a:srgbClr val="CCCCCC"/>
             </a:solidFill>
@@ -5671,8 +7287,8 @@
         </p:nvSpPr>
         <p:spPr>
           <a:xfrm>
-            <a:off x="3703320" y="987552"/>
-            <a:ext cx="2377440" cy="256032"/>
+            <a:off x="2423160" y="832104"/>
+            <a:ext cx="1188719" cy="475488"/>
           </a:xfrm>
           <a:prstGeom prst="rect">
             <a:avLst/>
@@ -5687,12 +7303,12 @@
           <a:p>
             <a:pPr algn="l"/>
             <a:r>
-              <a:rPr sz="900" b="0">
+              <a:rPr sz="850" b="0">
                 <a:solidFill>
                   <a:srgbClr val="1A1A1A"/>
                 </a:solidFill>
               </a:rPr>
-              <a:t>10.0.0.0/16</a:t>
+              <a:t>10.0.255.0/27</a:t>
             </a:r>
           </a:p>
         </p:txBody>
@@ -5705,8 +7321,8 @@
         </p:nvSpPr>
         <p:spPr>
           <a:xfrm>
-            <a:off x="6217920" y="941832"/>
-            <a:ext cx="5303520" cy="347472"/>
+            <a:off x="3703320" y="795528"/>
+            <a:ext cx="2377440" cy="530352"/>
           </a:xfrm>
           <a:prstGeom prst="rect">
             <a:avLst/>
@@ -5714,7 +7330,7 @@
           <a:solidFill>
             <a:srgbClr val="FFFFFF"/>
           </a:solidFill>
-          <a:ln w="6350">
+          <a:ln w="10160">
             <a:solidFill>
               <a:srgbClr val="CCCCCC"/>
             </a:solidFill>
@@ -5750,8 +7366,8 @@
         </p:nvSpPr>
         <p:spPr>
           <a:xfrm>
-            <a:off x="6263640" y="987552"/>
-            <a:ext cx="5212080" cy="256032"/>
+            <a:off x="3749039" y="832104"/>
+            <a:ext cx="2286000" cy="475488"/>
           </a:xfrm>
           <a:prstGeom prst="rect">
             <a:avLst/>
@@ -5766,12 +7382,12 @@
           <a:p>
             <a:pPr algn="l"/>
             <a:r>
-              <a:rPr sz="900" b="0">
+              <a:rPr sz="850" b="0">
                 <a:solidFill>
                   <a:srgbClr val="1A1A1A"/>
                 </a:solidFill>
               </a:rPr>
-              <a:t>リージョン: Japan East</a:t>
+              <a:t>VPN Gateway 専用（名前固定）</a:t>
             </a:r>
           </a:p>
         </p:txBody>
@@ -5784,16 +7400,16 @@
         </p:nvSpPr>
         <p:spPr>
           <a:xfrm>
-            <a:off x="274320" y="1289304"/>
-            <a:ext cx="1280160" cy="347472"/>
+            <a:off x="6126480" y="795528"/>
+            <a:ext cx="2103120" cy="530352"/>
           </a:xfrm>
           <a:prstGeom prst="rect">
             <a:avLst/>
           </a:prstGeom>
           <a:solidFill>
-            <a:srgbClr val="F5F8FF"/>
+            <a:srgbClr val="FFFFFF"/>
           </a:solidFill>
-          <a:ln w="6350">
+          <a:ln w="10160">
             <a:solidFill>
               <a:srgbClr val="CCCCCC"/>
             </a:solidFill>
@@ -5829,8 +7445,8 @@
         </p:nvSpPr>
         <p:spPr>
           <a:xfrm>
-            <a:off x="320040" y="1335024"/>
-            <a:ext cx="1188719" cy="256032"/>
+            <a:off x="6172200" y="832104"/>
+            <a:ext cx="2011679" cy="475488"/>
           </a:xfrm>
           <a:prstGeom prst="rect">
             <a:avLst/>
@@ -5845,12 +7461,12 @@
           <a:p>
             <a:pPr algn="l"/>
             <a:r>
-              <a:rPr sz="900" b="0">
+              <a:rPr sz="850" b="0">
                 <a:solidFill>
                   <a:srgbClr val="1A1A1A"/>
                 </a:solidFill>
               </a:rPr>
-              <a:t>Subnet</a:t>
+              <a:t>なし</a:t>
             </a:r>
           </a:p>
         </p:txBody>
@@ -5863,16 +7479,16 @@
         </p:nvSpPr>
         <p:spPr>
           <a:xfrm>
-            <a:off x="1645920" y="1289304"/>
-            <a:ext cx="1920240" cy="347472"/>
+            <a:off x="8275320" y="795528"/>
+            <a:ext cx="2194560" cy="530352"/>
           </a:xfrm>
           <a:prstGeom prst="rect">
             <a:avLst/>
           </a:prstGeom>
           <a:solidFill>
-            <a:srgbClr val="F5F8FF"/>
+            <a:srgbClr val="FFFFFF"/>
           </a:solidFill>
-          <a:ln w="6350">
+          <a:ln w="10160">
             <a:solidFill>
               <a:srgbClr val="CCCCCC"/>
             </a:solidFill>
@@ -5908,8 +7524,8 @@
         </p:nvSpPr>
         <p:spPr>
           <a:xfrm>
-            <a:off x="1691640" y="1335024"/>
-            <a:ext cx="1828800" cy="256032"/>
+            <a:off x="8321040" y="832104"/>
+            <a:ext cx="2103120" cy="475488"/>
           </a:xfrm>
           <a:prstGeom prst="rect">
             <a:avLst/>
@@ -5924,12 +7540,12 @@
           <a:p>
             <a:pPr algn="l"/>
             <a:r>
-              <a:rPr sz="900" b="0">
+              <a:rPr sz="850" b="0">
                 <a:solidFill>
                   <a:srgbClr val="1A1A1A"/>
                 </a:solidFill>
               </a:rPr>
-              <a:t>GatewaySubnet</a:t>
+              <a:t>VPN Gateway のみ</a:t>
             </a:r>
           </a:p>
         </p:txBody>
@@ -5942,18 +7558,18 @@
         </p:nvSpPr>
         <p:spPr>
           <a:xfrm>
-            <a:off x="3657600" y="1289304"/>
-            <a:ext cx="2468880" cy="347472"/>
+            <a:off x="228600" y="1362456"/>
+            <a:ext cx="2103120" cy="530352"/>
           </a:xfrm>
           <a:prstGeom prst="rect">
             <a:avLst/>
           </a:prstGeom>
           <a:solidFill>
-            <a:srgbClr val="F5F8FF"/>
+            <a:srgbClr val="B2DFDB"/>
           </a:solidFill>
-          <a:ln w="6350">
+          <a:ln w="10160">
             <a:solidFill>
-              <a:srgbClr val="CCCCCC"/>
+              <a:srgbClr val="00695C"/>
             </a:solidFill>
           </a:ln>
         </p:spPr>
@@ -5987,8 +7603,8 @@
         </p:nvSpPr>
         <p:spPr>
           <a:xfrm>
-            <a:off x="3703320" y="1335024"/>
-            <a:ext cx="2377440" cy="256032"/>
+            <a:off x="274320" y="1399032"/>
+            <a:ext cx="2011679" cy="475488"/>
           </a:xfrm>
           <a:prstGeom prst="rect">
             <a:avLst/>
@@ -6003,12 +7619,12 @@
           <a:p>
             <a:pPr algn="l"/>
             <a:r>
-              <a:rPr sz="900" b="0">
-                <a:solidFill>
-                  <a:srgbClr val="1A1A1A"/>
-                </a:solidFill>
-              </a:rPr>
-              <a:t>10.0.255.0/27</a:t>
+              <a:rPr sz="850" b="1">
+                <a:solidFill>
+                  <a:srgbClr val="00695C"/>
+                </a:solidFill>
+              </a:rPr>
+              <a:t>subnet-pe</a:t>
             </a:r>
           </a:p>
         </p:txBody>
@@ -6021,16 +7637,16 @@
         </p:nvSpPr>
         <p:spPr>
           <a:xfrm>
-            <a:off x="6217920" y="1289304"/>
-            <a:ext cx="5303520" cy="347472"/>
+            <a:off x="2377440" y="1362456"/>
+            <a:ext cx="1280160" cy="530352"/>
           </a:xfrm>
           <a:prstGeom prst="rect">
             <a:avLst/>
           </a:prstGeom>
           <a:solidFill>
-            <a:srgbClr val="F5F8FF"/>
+            <a:srgbClr val="FFFFFF"/>
           </a:solidFill>
-          <a:ln w="6350">
+          <a:ln w="10160">
             <a:solidFill>
               <a:srgbClr val="CCCCCC"/>
             </a:solidFill>
@@ -6066,8 +7682,8 @@
         </p:nvSpPr>
         <p:spPr>
           <a:xfrm>
-            <a:off x="6263640" y="1335024"/>
-            <a:ext cx="5212080" cy="256032"/>
+            <a:off x="2423160" y="1399032"/>
+            <a:ext cx="1188719" cy="475488"/>
           </a:xfrm>
           <a:prstGeom prst="rect">
             <a:avLst/>
@@ -6082,12 +7698,12 @@
           <a:p>
             <a:pPr algn="l"/>
             <a:r>
-              <a:rPr sz="900" b="0">
+              <a:rPr sz="850" b="0">
                 <a:solidFill>
                   <a:srgbClr val="1A1A1A"/>
                 </a:solidFill>
               </a:rPr>
-              <a:t>VPN Gateway 専用（名前固定）</a:t>
+              <a:t>10.0.2.0/24</a:t>
             </a:r>
           </a:p>
         </p:txBody>
@@ -6100,8 +7716,8 @@
         </p:nvSpPr>
         <p:spPr>
           <a:xfrm>
-            <a:off x="274320" y="1636776"/>
-            <a:ext cx="1280160" cy="347472"/>
+            <a:off x="3703320" y="1362456"/>
+            <a:ext cx="2377440" cy="530352"/>
           </a:xfrm>
           <a:prstGeom prst="rect">
             <a:avLst/>
@@ -6109,7 +7725,7 @@
           <a:solidFill>
             <a:srgbClr val="FFFFFF"/>
           </a:solidFill>
-          <a:ln w="6350">
+          <a:ln w="10160">
             <a:solidFill>
               <a:srgbClr val="CCCCCC"/>
             </a:solidFill>
@@ -6145,8 +7761,8 @@
         </p:nvSpPr>
         <p:spPr>
           <a:xfrm>
-            <a:off x="320040" y="1682496"/>
-            <a:ext cx="1188719" cy="256032"/>
+            <a:off x="3749039" y="1399032"/>
+            <a:ext cx="2286000" cy="475488"/>
           </a:xfrm>
           <a:prstGeom prst="rect">
             <a:avLst/>
@@ -6161,12 +7777,13 @@
           <a:p>
             <a:pPr algn="l"/>
             <a:r>
-              <a:rPr sz="900" b="0">
+              <a:rPr sz="850" b="0">
                 <a:solidFill>
                   <a:srgbClr val="1A1A1A"/>
                 </a:solidFill>
               </a:rPr>
-              <a:t>Subnet</a:t>
+              <a:t>外→リソースへの入口
+（インバウンド受け口）</a:t>
             </a:r>
           </a:p>
         </p:txBody>
@@ -6179,8 +7796,8 @@
         </p:nvSpPr>
         <p:spPr>
           <a:xfrm>
-            <a:off x="1645920" y="1636776"/>
-            <a:ext cx="1920240" cy="347472"/>
+            <a:off x="6126480" y="1362456"/>
+            <a:ext cx="2103120" cy="530352"/>
           </a:xfrm>
           <a:prstGeom prst="rect">
             <a:avLst/>
@@ -6188,7 +7805,7 @@
           <a:solidFill>
             <a:srgbClr val="FFFFFF"/>
           </a:solidFill>
-          <a:ln w="6350">
+          <a:ln w="10160">
             <a:solidFill>
               <a:srgbClr val="CCCCCC"/>
             </a:solidFill>
@@ -6224,8 +7841,8 @@
         </p:nvSpPr>
         <p:spPr>
           <a:xfrm>
-            <a:off x="1691640" y="1682496"/>
-            <a:ext cx="1828800" cy="256032"/>
+            <a:off x="6172200" y="1399032"/>
+            <a:ext cx="2011679" cy="475488"/>
           </a:xfrm>
           <a:prstGeom prst="rect">
             <a:avLst/>
@@ -6240,12 +7857,12 @@
           <a:p>
             <a:pPr algn="l"/>
             <a:r>
-              <a:rPr sz="900" b="0">
+              <a:rPr sz="850" b="0">
                 <a:solidFill>
                   <a:srgbClr val="1A1A1A"/>
                 </a:solidFill>
               </a:rPr>
-              <a:t>subnet-app</a:t>
+              <a:t>なし</a:t>
             </a:r>
           </a:p>
         </p:txBody>
@@ -6258,8 +7875,8 @@
         </p:nvSpPr>
         <p:spPr>
           <a:xfrm>
-            <a:off x="3657600" y="1636776"/>
-            <a:ext cx="2468880" cy="347472"/>
+            <a:off x="8275320" y="1362456"/>
+            <a:ext cx="2194560" cy="530352"/>
           </a:xfrm>
           <a:prstGeom prst="rect">
             <a:avLst/>
@@ -6267,7 +7884,7 @@
           <a:solidFill>
             <a:srgbClr val="FFFFFF"/>
           </a:solidFill>
-          <a:ln w="6350">
+          <a:ln w="10160">
             <a:solidFill>
               <a:srgbClr val="CCCCCC"/>
             </a:solidFill>
@@ -6303,8 +7920,8 @@
         </p:nvSpPr>
         <p:spPr>
           <a:xfrm>
-            <a:off x="3703320" y="1682496"/>
-            <a:ext cx="2377440" cy="256032"/>
+            <a:off x="8321040" y="1399032"/>
+            <a:ext cx="2103120" cy="475488"/>
           </a:xfrm>
           <a:prstGeom prst="rect">
             <a:avLst/>
@@ -6319,12 +7936,12 @@
           <a:p>
             <a:pPr algn="l"/>
             <a:r>
-              <a:rPr sz="900" b="0">
+              <a:rPr sz="850" b="0">
                 <a:solidFill>
                   <a:srgbClr val="1A1A1A"/>
                 </a:solidFill>
               </a:rPr>
-              <a:t>10.0.1.0/24</a:t>
+              <a:t>Private Endpoint 全て</a:t>
             </a:r>
           </a:p>
         </p:txBody>
@@ -6337,18 +7954,18 @@
         </p:nvSpPr>
         <p:spPr>
           <a:xfrm>
-            <a:off x="6217920" y="1636776"/>
-            <a:ext cx="5303520" cy="347472"/>
+            <a:off x="228600" y="1929384"/>
+            <a:ext cx="2103120" cy="530352"/>
           </a:xfrm>
           <a:prstGeom prst="rect">
             <a:avLst/>
           </a:prstGeom>
           <a:solidFill>
-            <a:srgbClr val="FFFFFF"/>
+            <a:srgbClr val="B3D9F7"/>
           </a:solidFill>
-          <a:ln w="6350">
+          <a:ln w="10160">
             <a:solidFill>
-              <a:srgbClr val="CCCCCC"/>
+              <a:srgbClr val="01579B"/>
             </a:solidFill>
           </a:ln>
         </p:spPr>
@@ -6382,8 +7999,8 @@
         </p:nvSpPr>
         <p:spPr>
           <a:xfrm>
-            <a:off x="6263640" y="1682496"/>
-            <a:ext cx="5212080" cy="256032"/>
+            <a:off x="274320" y="1965960"/>
+            <a:ext cx="2011679" cy="475488"/>
           </a:xfrm>
           <a:prstGeom prst="rect">
             <a:avLst/>
@@ -6398,12 +8015,12 @@
           <a:p>
             <a:pPr algn="l"/>
             <a:r>
-              <a:rPr sz="900" b="0">
-                <a:solidFill>
-                  <a:srgbClr val="1A1A1A"/>
-                </a:solidFill>
-              </a:rPr>
-              <a:t>App Service 用</a:t>
+              <a:rPr sz="850" b="1">
+                <a:solidFill>
+                  <a:srgbClr val="01579B"/>
+                </a:solidFill>
+              </a:rPr>
+              <a:t>subnet-integration</a:t>
             </a:r>
           </a:p>
         </p:txBody>
@@ -6416,16 +8033,16 @@
         </p:nvSpPr>
         <p:spPr>
           <a:xfrm>
-            <a:off x="274320" y="1984248"/>
-            <a:ext cx="1280160" cy="347472"/>
+            <a:off x="2377440" y="1929384"/>
+            <a:ext cx="1280160" cy="530352"/>
           </a:xfrm>
           <a:prstGeom prst="rect">
             <a:avLst/>
           </a:prstGeom>
           <a:solidFill>
-            <a:srgbClr val="F5F8FF"/>
+            <a:srgbClr val="FFFFFF"/>
           </a:solidFill>
-          <a:ln w="6350">
+          <a:ln w="10160">
             <a:solidFill>
               <a:srgbClr val="CCCCCC"/>
             </a:solidFill>
@@ -6461,8 +8078,8 @@
         </p:nvSpPr>
         <p:spPr>
           <a:xfrm>
-            <a:off x="320040" y="2029967"/>
-            <a:ext cx="1188719" cy="256032"/>
+            <a:off x="2423160" y="1965960"/>
+            <a:ext cx="1188719" cy="475488"/>
           </a:xfrm>
           <a:prstGeom prst="rect">
             <a:avLst/>
@@ -6477,12 +8094,12 @@
           <a:p>
             <a:pPr algn="l"/>
             <a:r>
-              <a:rPr sz="900" b="0">
+              <a:rPr sz="850" b="0">
                 <a:solidFill>
                   <a:srgbClr val="1A1A1A"/>
                 </a:solidFill>
               </a:rPr>
-              <a:t>NSG</a:t>
+              <a:t>10.0.1.0/24</a:t>
             </a:r>
           </a:p>
         </p:txBody>
@@ -6495,16 +8112,16 @@
         </p:nvSpPr>
         <p:spPr>
           <a:xfrm>
-            <a:off x="1645920" y="1984248"/>
-            <a:ext cx="1920240" cy="347472"/>
+            <a:off x="3703320" y="1929384"/>
+            <a:ext cx="2377440" cy="530352"/>
           </a:xfrm>
           <a:prstGeom prst="rect">
             <a:avLst/>
           </a:prstGeom>
           <a:solidFill>
-            <a:srgbClr val="F5F8FF"/>
+            <a:srgbClr val="FFFFFF"/>
           </a:solidFill>
-          <a:ln w="6350">
+          <a:ln w="10160">
             <a:solidFill>
               <a:srgbClr val="CCCCCC"/>
             </a:solidFill>
@@ -6540,8 +8157,8 @@
         </p:nvSpPr>
         <p:spPr>
           <a:xfrm>
-            <a:off x="1691640" y="2029967"/>
-            <a:ext cx="1828800" cy="256032"/>
+            <a:off x="3749039" y="1965960"/>
+            <a:ext cx="2286000" cy="475488"/>
           </a:xfrm>
           <a:prstGeom prst="rect">
             <a:avLst/>
@@ -6556,12 +8173,13 @@
           <a:p>
             <a:pPr algn="l"/>
             <a:r>
-              <a:rPr sz="900" b="0">
+              <a:rPr sz="850" b="0">
                 <a:solidFill>
                   <a:srgbClr val="1A1A1A"/>
                 </a:solidFill>
               </a:rPr>
-              <a:t>nsg-app</a:t>
+              <a:t>App Service→VNet の出口
+（アウトバウンド）</a:t>
             </a:r>
           </a:p>
         </p:txBody>
@@ -6574,16 +8192,16 @@
         </p:nvSpPr>
         <p:spPr>
           <a:xfrm>
-            <a:off x="3657600" y="1984248"/>
-            <a:ext cx="2468880" cy="347472"/>
+            <a:off x="6126480" y="1929384"/>
+            <a:ext cx="2103120" cy="530352"/>
           </a:xfrm>
           <a:prstGeom prst="rect">
             <a:avLst/>
           </a:prstGeom>
           <a:solidFill>
-            <a:srgbClr val="F5F8FF"/>
+            <a:srgbClr val="FFFFFF"/>
           </a:solidFill>
-          <a:ln w="6350">
+          <a:ln w="10160">
             <a:solidFill>
               <a:srgbClr val="CCCCCC"/>
             </a:solidFill>
@@ -6619,8 +8237,8 @@
         </p:nvSpPr>
         <p:spPr>
           <a:xfrm>
-            <a:off x="3703320" y="2029967"/>
-            <a:ext cx="2377440" cy="256032"/>
+            <a:off x="6172200" y="1965960"/>
+            <a:ext cx="2011679" cy="475488"/>
           </a:xfrm>
           <a:prstGeom prst="rect">
             <a:avLst/>
@@ -6635,12 +8253,12 @@
           <a:p>
             <a:pPr algn="l"/>
             <a:r>
-              <a:rPr sz="900" b="0">
+              <a:rPr sz="850" b="0">
                 <a:solidFill>
                   <a:srgbClr val="1A1A1A"/>
                 </a:solidFill>
               </a:rPr>
-              <a:t>Inbound 許可: 443</a:t>
+              <a:t>Microsoft.Web/serverFarms</a:t>
             </a:r>
           </a:p>
         </p:txBody>
@@ -6653,16 +8271,16 @@
         </p:nvSpPr>
         <p:spPr>
           <a:xfrm>
-            <a:off x="6217920" y="1984248"/>
-            <a:ext cx="5303520" cy="347472"/>
+            <a:off x="8275320" y="1929384"/>
+            <a:ext cx="2194560" cy="530352"/>
           </a:xfrm>
           <a:prstGeom prst="rect">
             <a:avLst/>
           </a:prstGeom>
           <a:solidFill>
-            <a:srgbClr val="F5F8FF"/>
+            <a:srgbClr val="FFFFFF"/>
           </a:solidFill>
-          <a:ln w="6350">
+          <a:ln w="10160">
             <a:solidFill>
               <a:srgbClr val="CCCCCC"/>
             </a:solidFill>
@@ -6698,8 +8316,8 @@
         </p:nvSpPr>
         <p:spPr>
           <a:xfrm>
-            <a:off x="6263640" y="2029967"/>
-            <a:ext cx="5212080" cy="256032"/>
+            <a:off x="8321040" y="1965960"/>
+            <a:ext cx="2103120" cy="475488"/>
           </a:xfrm>
           <a:prstGeom prst="rect">
             <a:avLst/>
@@ -6714,12 +8332,12 @@
           <a:p>
             <a:pPr algn="l"/>
             <a:r>
-              <a:rPr sz="900" b="0">
+              <a:rPr sz="850" b="0">
                 <a:solidFill>
                   <a:srgbClr val="1A1A1A"/>
                 </a:solidFill>
               </a:rPr>
-              <a:t>送信元: オンプレIP（tfvars 参照）</a:t>
+              <a:t>App Service FE / BE</a:t>
             </a:r>
           </a:p>
         </p:txBody>
@@ -6732,18 +8350,18 @@
         </p:nvSpPr>
         <p:spPr>
           <a:xfrm>
-            <a:off x="274320" y="2331720"/>
-            <a:ext cx="1280160" cy="347472"/>
+            <a:off x="228600" y="2496312"/>
+            <a:ext cx="2103120" cy="530352"/>
           </a:xfrm>
           <a:prstGeom prst="rect">
             <a:avLst/>
           </a:prstGeom>
           <a:solidFill>
-            <a:srgbClr val="FFFFFF"/>
+            <a:srgbClr val="C8E6C9"/>
           </a:solidFill>
-          <a:ln w="6350">
+          <a:ln w="10160">
             <a:solidFill>
-              <a:srgbClr val="CCCCCC"/>
+              <a:srgbClr val="1B5E20"/>
             </a:solidFill>
           </a:ln>
         </p:spPr>
@@ -6777,8 +8395,8 @@
         </p:nvSpPr>
         <p:spPr>
           <a:xfrm>
-            <a:off x="320040" y="2377439"/>
-            <a:ext cx="1188719" cy="256032"/>
+            <a:off x="274320" y="2532888"/>
+            <a:ext cx="2011679" cy="475488"/>
           </a:xfrm>
           <a:prstGeom prst="rect">
             <a:avLst/>
@@ -6793,12 +8411,12 @@
           <a:p>
             <a:pPr algn="l"/>
             <a:r>
-              <a:rPr sz="900" b="0">
-                <a:solidFill>
-                  <a:srgbClr val="1A1A1A"/>
-                </a:solidFill>
-              </a:rPr>
-              <a:t>VPN GW</a:t>
+              <a:rPr sz="850" b="1">
+                <a:solidFill>
+                  <a:srgbClr val="1B5E20"/>
+                </a:solidFill>
+              </a:rPr>
+              <a:t>subnet-func-integration</a:t>
             </a:r>
           </a:p>
         </p:txBody>
@@ -6811,8 +8429,8 @@
         </p:nvSpPr>
         <p:spPr>
           <a:xfrm>
-            <a:off x="1645920" y="2331720"/>
-            <a:ext cx="1920240" cy="347472"/>
+            <a:off x="2377440" y="2496312"/>
+            <a:ext cx="1280160" cy="530352"/>
           </a:xfrm>
           <a:prstGeom prst="rect">
             <a:avLst/>
@@ -6820,7 +8438,7 @@
           <a:solidFill>
             <a:srgbClr val="FFFFFF"/>
           </a:solidFill>
-          <a:ln w="6350">
+          <a:ln w="10160">
             <a:solidFill>
               <a:srgbClr val="CCCCCC"/>
             </a:solidFill>
@@ -6856,8 +8474,8 @@
         </p:nvSpPr>
         <p:spPr>
           <a:xfrm>
-            <a:off x="1691640" y="2377439"/>
-            <a:ext cx="1828800" cy="256032"/>
+            <a:off x="2423160" y="2532888"/>
+            <a:ext cx="1188719" cy="475488"/>
           </a:xfrm>
           <a:prstGeom prst="rect">
             <a:avLst/>
@@ -6872,12 +8490,12 @@
           <a:p>
             <a:pPr algn="l"/>
             <a:r>
-              <a:rPr sz="900" b="0">
+              <a:rPr sz="850" b="0">
                 <a:solidFill>
                   <a:srgbClr val="1A1A1A"/>
                 </a:solidFill>
               </a:rPr>
-              <a:t>vpngw-main</a:t>
+              <a:t>10.0.4.0/24</a:t>
             </a:r>
           </a:p>
         </p:txBody>
@@ -6890,8 +8508,8 @@
         </p:nvSpPr>
         <p:spPr>
           <a:xfrm>
-            <a:off x="3657600" y="2331720"/>
-            <a:ext cx="2468880" cy="347472"/>
+            <a:off x="3703320" y="2496312"/>
+            <a:ext cx="2377440" cy="530352"/>
           </a:xfrm>
           <a:prstGeom prst="rect">
             <a:avLst/>
@@ -6899,7 +8517,7 @@
           <a:solidFill>
             <a:srgbClr val="FFFFFF"/>
           </a:solidFill>
-          <a:ln w="6350">
+          <a:ln w="10160">
             <a:solidFill>
               <a:srgbClr val="CCCCCC"/>
             </a:solidFill>
@@ -6935,8 +8553,8 @@
         </p:nvSpPr>
         <p:spPr>
           <a:xfrm>
-            <a:off x="3703320" y="2377439"/>
-            <a:ext cx="2377440" cy="256032"/>
+            <a:off x="3749039" y="2532888"/>
+            <a:ext cx="2286000" cy="475488"/>
           </a:xfrm>
           <a:prstGeom prst="rect">
             <a:avLst/>
@@ -6951,12 +8569,13 @@
           <a:p>
             <a:pPr algn="l"/>
             <a:r>
-              <a:rPr sz="900" b="0">
+              <a:rPr sz="850" b="0">
                 <a:solidFill>
                   <a:srgbClr val="1A1A1A"/>
                 </a:solidFill>
               </a:rPr>
-              <a:t>SKU: VpnGw1</a:t>
+              <a:t>Functions→VNet の出口
+（アウトバウンド）</a:t>
             </a:r>
           </a:p>
         </p:txBody>
@@ -6969,8 +8588,8 @@
         </p:nvSpPr>
         <p:spPr>
           <a:xfrm>
-            <a:off x="6217920" y="2331720"/>
-            <a:ext cx="5303520" cy="347472"/>
+            <a:off x="6126480" y="2496312"/>
+            <a:ext cx="2103120" cy="530352"/>
           </a:xfrm>
           <a:prstGeom prst="rect">
             <a:avLst/>
@@ -6978,7 +8597,7 @@
           <a:solidFill>
             <a:srgbClr val="FFFFFF"/>
           </a:solidFill>
-          <a:ln w="6350">
+          <a:ln w="10160">
             <a:solidFill>
               <a:srgbClr val="CCCCCC"/>
             </a:solidFill>
@@ -7014,8 +8633,8 @@
         </p:nvSpPr>
         <p:spPr>
           <a:xfrm>
-            <a:off x="6263640" y="2377439"/>
-            <a:ext cx="5212080" cy="256032"/>
+            <a:off x="6172200" y="2532888"/>
+            <a:ext cx="2011679" cy="475488"/>
           </a:xfrm>
           <a:prstGeom prst="rect">
             <a:avLst/>
@@ -7030,12 +8649,12 @@
           <a:p>
             <a:pPr algn="l"/>
             <a:r>
-              <a:rPr sz="900" b="0">
+              <a:rPr sz="850" b="0">
                 <a:solidFill>
                   <a:srgbClr val="1A1A1A"/>
                 </a:solidFill>
               </a:rPr>
-              <a:t>Public IP は output で確認</a:t>
+              <a:t>Microsoft.App/environments</a:t>
             </a:r>
           </a:p>
         </p:txBody>
@@ -7048,16 +8667,16 @@
         </p:nvSpPr>
         <p:spPr>
           <a:xfrm>
-            <a:off x="274320" y="2679192"/>
-            <a:ext cx="1280160" cy="347472"/>
+            <a:off x="8275320" y="2496312"/>
+            <a:ext cx="2194560" cy="530352"/>
           </a:xfrm>
           <a:prstGeom prst="rect">
             <a:avLst/>
           </a:prstGeom>
           <a:solidFill>
-            <a:srgbClr val="F5F8FF"/>
+            <a:srgbClr val="FFFFFF"/>
           </a:solidFill>
-          <a:ln w="6350">
+          <a:ln w="10160">
             <a:solidFill>
               <a:srgbClr val="CCCCCC"/>
             </a:solidFill>
@@ -7093,8 +8712,8 @@
         </p:nvSpPr>
         <p:spPr>
           <a:xfrm>
-            <a:off x="320040" y="2724912"/>
-            <a:ext cx="1188719" cy="256032"/>
+            <a:off x="8321040" y="2532888"/>
+            <a:ext cx="2103120" cy="475488"/>
           </a:xfrm>
           <a:prstGeom prst="rect">
             <a:avLst/>
@@ -7109,37 +8728,69 @@
           <a:p>
             <a:pPr algn="l"/>
             <a:r>
-              <a:rPr sz="900" b="0">
+              <a:rPr sz="850" b="0">
                 <a:solidFill>
                   <a:srgbClr val="1A1A1A"/>
                 </a:solidFill>
               </a:rPr>
-              <a:t>App Service</a:t>
-            </a:r>
-          </a:p>
-        </p:txBody>
-      </p:sp>
-      <p:sp>
-        <p:nvSpPr>
-          <p:cNvPr id="53" name="Rectangle 52"/>
+              <a:t>Azure Functions</a:t>
+            </a:r>
+          </a:p>
+        </p:txBody>
+      </p:sp>
+      <p:sp>
+        <p:nvSpPr>
+          <p:cNvPr id="53" name="TextBox 52"/>
+          <p:cNvSpPr txBox="1"/>
+          <p:nvPr/>
+        </p:nvSpPr>
+        <p:spPr>
+          <a:xfrm>
+            <a:off x="228600" y="2880360"/>
+            <a:ext cx="11612880" cy="274320"/>
+          </a:xfrm>
+          <a:prstGeom prst="rect">
+            <a:avLst/>
+          </a:prstGeom>
+          <a:noFill/>
+        </p:spPr>
+        <p:txBody>
+          <a:bodyPr wrap="square">
+            <a:spAutoFit/>
+          </a:bodyPr>
+          <a:lstStyle/>
+          <a:p>
+            <a:pPr algn="ctr"/>
+            <a:r>
+              <a:rPr sz="1000" b="1">
+                <a:solidFill>
+                  <a:srgbClr val="00695C"/>
+                </a:solidFill>
+              </a:rPr>
+              <a:t>Private Endpoint 一覧（全て subnet-pe に配置）</a:t>
+            </a:r>
+          </a:p>
+        </p:txBody>
+      </p:sp>
+      <p:sp>
+        <p:nvSpPr>
+          <p:cNvPr id="54" name="Rectangle 53"/>
           <p:cNvSpPr/>
           <p:nvPr/>
         </p:nvSpPr>
         <p:spPr>
           <a:xfrm>
-            <a:off x="1645920" y="2679192"/>
-            <a:ext cx="1920240" cy="347472"/>
+            <a:off x="228600" y="3182112"/>
+            <a:ext cx="1554480" cy="292608"/>
           </a:xfrm>
           <a:prstGeom prst="rect">
             <a:avLst/>
           </a:prstGeom>
           <a:solidFill>
-            <a:srgbClr val="F5F8FF"/>
+            <a:srgbClr val="00695C"/>
           </a:solidFill>
-          <a:ln w="6350">
-            <a:solidFill>
-              <a:srgbClr val="CCCCCC"/>
-            </a:solidFill>
+          <a:ln>
+            <a:noFill/>
           </a:ln>
         </p:spPr>
         <p:style>
@@ -7166,59 +8817,57 @@
       </p:sp>
       <p:sp>
         <p:nvSpPr>
-          <p:cNvPr id="54" name="TextBox 53"/>
-          <p:cNvSpPr txBox="1"/>
-          <p:nvPr/>
-        </p:nvSpPr>
-        <p:spPr>
-          <a:xfrm>
-            <a:off x="1691640" y="2724912"/>
-            <a:ext cx="1828800" cy="256032"/>
-          </a:xfrm>
-          <a:prstGeom prst="rect">
-            <a:avLst/>
-          </a:prstGeom>
-          <a:noFill/>
-        </p:spPr>
-        <p:txBody>
-          <a:bodyPr wrap="square">
-            <a:spAutoFit/>
-          </a:bodyPr>
-          <a:lstStyle/>
-          <a:p>
-            <a:pPr algn="l"/>
-            <a:r>
-              <a:rPr sz="900" b="0">
-                <a:solidFill>
-                  <a:srgbClr val="1A1A1A"/>
-                </a:solidFill>
-              </a:rPr>
-              <a:t>app-fe-test</a:t>
-            </a:r>
-          </a:p>
-        </p:txBody>
-      </p:sp>
-      <p:sp>
-        <p:nvSpPr>
-          <p:cNvPr id="55" name="Rectangle 54"/>
+          <p:cNvPr id="55" name="TextBox 54"/>
+          <p:cNvSpPr txBox="1"/>
+          <p:nvPr/>
+        </p:nvSpPr>
+        <p:spPr>
+          <a:xfrm>
+            <a:off x="228600" y="3200400"/>
+            <a:ext cx="1554480" cy="256032"/>
+          </a:xfrm>
+          <a:prstGeom prst="rect">
+            <a:avLst/>
+          </a:prstGeom>
+          <a:noFill/>
+        </p:spPr>
+        <p:txBody>
+          <a:bodyPr wrap="square">
+            <a:spAutoFit/>
+          </a:bodyPr>
+          <a:lstStyle/>
+          <a:p>
+            <a:pPr algn="ctr"/>
+            <a:r>
+              <a:rPr sz="900" b="1">
+                <a:solidFill>
+                  <a:srgbClr val="FFFFFF"/>
+                </a:solidFill>
+              </a:rPr>
+              <a:t>PE 名</a:t>
+            </a:r>
+          </a:p>
+        </p:txBody>
+      </p:sp>
+      <p:sp>
+        <p:nvSpPr>
+          <p:cNvPr id="56" name="Rectangle 55"/>
           <p:cNvSpPr/>
           <p:nvPr/>
         </p:nvSpPr>
         <p:spPr>
           <a:xfrm>
-            <a:off x="3657600" y="2679192"/>
-            <a:ext cx="2468880" cy="347472"/>
+            <a:off x="1828800" y="3182112"/>
+            <a:ext cx="2286000" cy="292608"/>
           </a:xfrm>
           <a:prstGeom prst="rect">
             <a:avLst/>
           </a:prstGeom>
           <a:solidFill>
-            <a:srgbClr val="F5F8FF"/>
+            <a:srgbClr val="00695C"/>
           </a:solidFill>
-          <a:ln w="6350">
-            <a:solidFill>
-              <a:srgbClr val="CCCCCC"/>
-            </a:solidFill>
+          <a:ln>
+            <a:noFill/>
           </a:ln>
         </p:spPr>
         <p:style>
@@ -7245,59 +8894,57 @@
       </p:sp>
       <p:sp>
         <p:nvSpPr>
-          <p:cNvPr id="56" name="TextBox 55"/>
-          <p:cNvSpPr txBox="1"/>
-          <p:nvPr/>
-        </p:nvSpPr>
-        <p:spPr>
-          <a:xfrm>
-            <a:off x="3703320" y="2724912"/>
-            <a:ext cx="2377440" cy="256032"/>
-          </a:xfrm>
-          <a:prstGeom prst="rect">
-            <a:avLst/>
-          </a:prstGeom>
-          <a:noFill/>
-        </p:spPr>
-        <p:txBody>
-          <a:bodyPr wrap="square">
-            <a:spAutoFit/>
-          </a:bodyPr>
-          <a:lstStyle/>
-          <a:p>
-            <a:pPr algn="l"/>
-            <a:r>
-              <a:rPr sz="900" b="0">
-                <a:solidFill>
-                  <a:srgbClr val="1A1A1A"/>
-                </a:solidFill>
-              </a:rPr>
-              <a:t>B1 / Linux</a:t>
-            </a:r>
-          </a:p>
-        </p:txBody>
-      </p:sp>
-      <p:sp>
-        <p:nvSpPr>
-          <p:cNvPr id="57" name="Rectangle 56"/>
+          <p:cNvPr id="57" name="TextBox 56"/>
+          <p:cNvSpPr txBox="1"/>
+          <p:nvPr/>
+        </p:nvSpPr>
+        <p:spPr>
+          <a:xfrm>
+            <a:off x="1828800" y="3200400"/>
+            <a:ext cx="2286000" cy="256032"/>
+          </a:xfrm>
+          <a:prstGeom prst="rect">
+            <a:avLst/>
+          </a:prstGeom>
+          <a:noFill/>
+        </p:spPr>
+        <p:txBody>
+          <a:bodyPr wrap="square">
+            <a:spAutoFit/>
+          </a:bodyPr>
+          <a:lstStyle/>
+          <a:p>
+            <a:pPr algn="ctr"/>
+            <a:r>
+              <a:rPr sz="900" b="1">
+                <a:solidFill>
+                  <a:srgbClr val="FFFFFF"/>
+                </a:solidFill>
+              </a:rPr>
+              <a:t>接続先リソース</a:t>
+            </a:r>
+          </a:p>
+        </p:txBody>
+      </p:sp>
+      <p:sp>
+        <p:nvSpPr>
+          <p:cNvPr id="58" name="Rectangle 57"/>
           <p:cNvSpPr/>
           <p:nvPr/>
         </p:nvSpPr>
         <p:spPr>
           <a:xfrm>
-            <a:off x="6217920" y="2679192"/>
-            <a:ext cx="5303520" cy="347472"/>
+            <a:off x="4160520" y="3182112"/>
+            <a:ext cx="3200400" cy="292608"/>
           </a:xfrm>
           <a:prstGeom prst="rect">
             <a:avLst/>
           </a:prstGeom>
           <a:solidFill>
-            <a:srgbClr val="F5F8FF"/>
+            <a:srgbClr val="00695C"/>
           </a:solidFill>
-          <a:ln w="6350">
-            <a:solidFill>
-              <a:srgbClr val="CCCCCC"/>
-            </a:solidFill>
+          <a:ln>
+            <a:noFill/>
           </a:ln>
         </p:spPr>
         <p:style>
@@ -7324,59 +8971,57 @@
       </p:sp>
       <p:sp>
         <p:nvSpPr>
-          <p:cNvPr id="58" name="TextBox 57"/>
-          <p:cNvSpPr txBox="1"/>
-          <p:nvPr/>
-        </p:nvSpPr>
-        <p:spPr>
-          <a:xfrm>
-            <a:off x="6263640" y="2724912"/>
-            <a:ext cx="5212080" cy="256032"/>
-          </a:xfrm>
-          <a:prstGeom prst="rect">
-            <a:avLst/>
-          </a:prstGeom>
-          <a:noFill/>
-        </p:spPr>
-        <p:txBody>
-          <a:bodyPr wrap="square">
-            <a:spAutoFit/>
-          </a:bodyPr>
-          <a:lstStyle/>
-          <a:p>
-            <a:pPr algn="l"/>
-            <a:r>
-              <a:rPr sz="900" b="0">
-                <a:solidFill>
-                  <a:srgbClr val="1A1A1A"/>
-                </a:solidFill>
-              </a:rPr>
-              <a:t>Frontend（Public 無効）</a:t>
-            </a:r>
-          </a:p>
-        </p:txBody>
-      </p:sp>
-      <p:sp>
-        <p:nvSpPr>
-          <p:cNvPr id="59" name="Rectangle 58"/>
+          <p:cNvPr id="59" name="TextBox 58"/>
+          <p:cNvSpPr txBox="1"/>
+          <p:nvPr/>
+        </p:nvSpPr>
+        <p:spPr>
+          <a:xfrm>
+            <a:off x="4160520" y="3200400"/>
+            <a:ext cx="3200400" cy="256032"/>
+          </a:xfrm>
+          <a:prstGeom prst="rect">
+            <a:avLst/>
+          </a:prstGeom>
+          <a:noFill/>
+        </p:spPr>
+        <p:txBody>
+          <a:bodyPr wrap="square">
+            <a:spAutoFit/>
+          </a:bodyPr>
+          <a:lstStyle/>
+          <a:p>
+            <a:pPr algn="ctr"/>
+            <a:r>
+              <a:rPr sz="900" b="1">
+                <a:solidFill>
+                  <a:srgbClr val="FFFFFF"/>
+                </a:solidFill>
+              </a:rPr>
+              <a:t>Private DNS Zone</a:t>
+            </a:r>
+          </a:p>
+        </p:txBody>
+      </p:sp>
+      <p:sp>
+        <p:nvSpPr>
+          <p:cNvPr id="60" name="Rectangle 59"/>
           <p:cNvSpPr/>
           <p:nvPr/>
         </p:nvSpPr>
         <p:spPr>
           <a:xfrm>
-            <a:off x="274320" y="3026664"/>
-            <a:ext cx="1280160" cy="347472"/>
+            <a:off x="7406640" y="3182112"/>
+            <a:ext cx="3566160" cy="292608"/>
           </a:xfrm>
           <a:prstGeom prst="rect">
             <a:avLst/>
           </a:prstGeom>
           <a:solidFill>
-            <a:srgbClr val="FFFFFF"/>
+            <a:srgbClr val="00695C"/>
           </a:solidFill>
-          <a:ln w="6350">
-            <a:solidFill>
-              <a:srgbClr val="CCCCCC"/>
-            </a:solidFill>
+          <a:ln>
+            <a:noFill/>
           </a:ln>
         </p:spPr>
         <p:style>
@@ -7403,56 +9048,56 @@
       </p:sp>
       <p:sp>
         <p:nvSpPr>
-          <p:cNvPr id="60" name="TextBox 59"/>
-          <p:cNvSpPr txBox="1"/>
-          <p:nvPr/>
-        </p:nvSpPr>
-        <p:spPr>
-          <a:xfrm>
-            <a:off x="320040" y="3072384"/>
-            <a:ext cx="1188719" cy="256032"/>
-          </a:xfrm>
-          <a:prstGeom prst="rect">
-            <a:avLst/>
-          </a:prstGeom>
-          <a:noFill/>
-        </p:spPr>
-        <p:txBody>
-          <a:bodyPr wrap="square">
-            <a:spAutoFit/>
-          </a:bodyPr>
-          <a:lstStyle/>
-          <a:p>
-            <a:pPr algn="l"/>
-            <a:r>
-              <a:rPr sz="900" b="0">
-                <a:solidFill>
-                  <a:srgbClr val="1A1A1A"/>
-                </a:solidFill>
-              </a:rPr>
-              <a:t>App Service</a:t>
-            </a:r>
-          </a:p>
-        </p:txBody>
-      </p:sp>
-      <p:sp>
-        <p:nvSpPr>
-          <p:cNvPr id="61" name="Rectangle 60"/>
+          <p:cNvPr id="61" name="TextBox 60"/>
+          <p:cNvSpPr txBox="1"/>
+          <p:nvPr/>
+        </p:nvSpPr>
+        <p:spPr>
+          <a:xfrm>
+            <a:off x="7406640" y="3200400"/>
+            <a:ext cx="3566160" cy="256032"/>
+          </a:xfrm>
+          <a:prstGeom prst="rect">
+            <a:avLst/>
+          </a:prstGeom>
+          <a:noFill/>
+        </p:spPr>
+        <p:txBody>
+          <a:bodyPr wrap="square">
+            <a:spAutoFit/>
+          </a:bodyPr>
+          <a:lstStyle/>
+          <a:p>
+            <a:pPr algn="ctr"/>
+            <a:r>
+              <a:rPr sz="900" b="1">
+                <a:solidFill>
+                  <a:srgbClr val="FFFFFF"/>
+                </a:solidFill>
+              </a:rPr>
+              <a:t>備考</a:t>
+            </a:r>
+          </a:p>
+        </p:txBody>
+      </p:sp>
+      <p:sp>
+        <p:nvSpPr>
+          <p:cNvPr id="62" name="Rectangle 61"/>
           <p:cNvSpPr/>
           <p:nvPr/>
         </p:nvSpPr>
         <p:spPr>
           <a:xfrm>
-            <a:off x="1645920" y="3026664"/>
-            <a:ext cx="1920240" cy="347472"/>
+            <a:off x="228600" y="3474720"/>
+            <a:ext cx="1554480" cy="420624"/>
           </a:xfrm>
           <a:prstGeom prst="rect">
             <a:avLst/>
           </a:prstGeom>
           <a:solidFill>
-            <a:srgbClr val="FFFFFF"/>
+            <a:srgbClr val="E0F7FA"/>
           </a:solidFill>
-          <a:ln w="6350">
+          <a:ln w="7620">
             <a:solidFill>
               <a:srgbClr val="CCCCCC"/>
             </a:solidFill>
@@ -7482,14 +9127,14 @@
       </p:sp>
       <p:sp>
         <p:nvSpPr>
-          <p:cNvPr id="62" name="TextBox 61"/>
-          <p:cNvSpPr txBox="1"/>
-          <p:nvPr/>
-        </p:nvSpPr>
-        <p:spPr>
-          <a:xfrm>
-            <a:off x="1691640" y="3072384"/>
-            <a:ext cx="1828800" cy="256032"/>
+          <p:cNvPr id="63" name="TextBox 62"/>
+          <p:cNvSpPr txBox="1"/>
+          <p:nvPr/>
+        </p:nvSpPr>
+        <p:spPr>
+          <a:xfrm>
+            <a:off x="274320" y="3511296"/>
+            <a:ext cx="1463039" cy="347472"/>
           </a:xfrm>
           <a:prstGeom prst="rect">
             <a:avLst/>
@@ -7504,34 +9149,34 @@
           <a:p>
             <a:pPr algn="l"/>
             <a:r>
-              <a:rPr sz="900" b="0">
+              <a:rPr sz="850" b="0">
                 <a:solidFill>
                   <a:srgbClr val="1A1A1A"/>
                 </a:solidFill>
               </a:rPr>
-              <a:t>app-be-test</a:t>
-            </a:r>
-          </a:p>
-        </p:txBody>
-      </p:sp>
-      <p:sp>
-        <p:nvSpPr>
-          <p:cNvPr id="63" name="Rectangle 62"/>
+              <a:t>PE: Frontend</a:t>
+            </a:r>
+          </a:p>
+        </p:txBody>
+      </p:sp>
+      <p:sp>
+        <p:nvSpPr>
+          <p:cNvPr id="64" name="Rectangle 63"/>
           <p:cNvSpPr/>
           <p:nvPr/>
         </p:nvSpPr>
         <p:spPr>
           <a:xfrm>
-            <a:off x="3657600" y="3026664"/>
-            <a:ext cx="2468880" cy="347472"/>
+            <a:off x="1828800" y="3474720"/>
+            <a:ext cx="2286000" cy="420624"/>
           </a:xfrm>
           <a:prstGeom prst="rect">
             <a:avLst/>
           </a:prstGeom>
           <a:solidFill>
-            <a:srgbClr val="FFFFFF"/>
+            <a:srgbClr val="E0F7FA"/>
           </a:solidFill>
-          <a:ln w="6350">
+          <a:ln w="7620">
             <a:solidFill>
               <a:srgbClr val="CCCCCC"/>
             </a:solidFill>
@@ -7561,14 +9206,14 @@
       </p:sp>
       <p:sp>
         <p:nvSpPr>
-          <p:cNvPr id="64" name="TextBox 63"/>
-          <p:cNvSpPr txBox="1"/>
-          <p:nvPr/>
-        </p:nvSpPr>
-        <p:spPr>
-          <a:xfrm>
-            <a:off x="3703320" y="3072384"/>
-            <a:ext cx="2377440" cy="256032"/>
+          <p:cNvPr id="65" name="TextBox 64"/>
+          <p:cNvSpPr txBox="1"/>
+          <p:nvPr/>
+        </p:nvSpPr>
+        <p:spPr>
+          <a:xfrm>
+            <a:off x="1874519" y="3511296"/>
+            <a:ext cx="2194560" cy="347472"/>
           </a:xfrm>
           <a:prstGeom prst="rect">
             <a:avLst/>
@@ -7583,34 +9228,34 @@
           <a:p>
             <a:pPr algn="l"/>
             <a:r>
-              <a:rPr sz="900" b="0">
+              <a:rPr sz="850" b="0">
                 <a:solidFill>
                   <a:srgbClr val="1A1A1A"/>
                 </a:solidFill>
               </a:rPr>
-              <a:t>B1 / Linux</a:t>
-            </a:r>
-          </a:p>
-        </p:txBody>
-      </p:sp>
-      <p:sp>
-        <p:nvSpPr>
-          <p:cNvPr id="65" name="Rectangle 64"/>
+              <a:t>App Service Frontend</a:t>
+            </a:r>
+          </a:p>
+        </p:txBody>
+      </p:sp>
+      <p:sp>
+        <p:nvSpPr>
+          <p:cNvPr id="66" name="Rectangle 65"/>
           <p:cNvSpPr/>
           <p:nvPr/>
         </p:nvSpPr>
         <p:spPr>
           <a:xfrm>
-            <a:off x="6217920" y="3026664"/>
-            <a:ext cx="5303520" cy="347472"/>
+            <a:off x="4160520" y="3474720"/>
+            <a:ext cx="3200400" cy="420624"/>
           </a:xfrm>
           <a:prstGeom prst="rect">
             <a:avLst/>
           </a:prstGeom>
           <a:solidFill>
-            <a:srgbClr val="FFFFFF"/>
+            <a:srgbClr val="E0F7FA"/>
           </a:solidFill>
-          <a:ln w="6350">
+          <a:ln w="7620">
             <a:solidFill>
               <a:srgbClr val="CCCCCC"/>
             </a:solidFill>
@@ -7640,14 +9285,14 @@
       </p:sp>
       <p:sp>
         <p:nvSpPr>
-          <p:cNvPr id="66" name="TextBox 65"/>
-          <p:cNvSpPr txBox="1"/>
-          <p:nvPr/>
-        </p:nvSpPr>
-        <p:spPr>
-          <a:xfrm>
-            <a:off x="6263640" y="3072384"/>
-            <a:ext cx="5212080" cy="256032"/>
+          <p:cNvPr id="67" name="TextBox 66"/>
+          <p:cNvSpPr txBox="1"/>
+          <p:nvPr/>
+        </p:nvSpPr>
+        <p:spPr>
+          <a:xfrm>
+            <a:off x="4206240" y="3511296"/>
+            <a:ext cx="3108960" cy="347472"/>
           </a:xfrm>
           <a:prstGeom prst="rect">
             <a:avLst/>
@@ -7662,34 +9307,34 @@
           <a:p>
             <a:pPr algn="l"/>
             <a:r>
-              <a:rPr sz="900" b="0">
+              <a:rPr sz="850" b="0">
                 <a:solidFill>
                   <a:srgbClr val="1A1A1A"/>
                 </a:solidFill>
               </a:rPr>
-              <a:t>Backend（Public 無効）</a:t>
-            </a:r>
-          </a:p>
-        </p:txBody>
-      </p:sp>
-      <p:sp>
-        <p:nvSpPr>
-          <p:cNvPr id="67" name="Rectangle 66"/>
+              <a:t>privatelink.azurewebsites.net</a:t>
+            </a:r>
+          </a:p>
+        </p:txBody>
+      </p:sp>
+      <p:sp>
+        <p:nvSpPr>
+          <p:cNvPr id="68" name="Rectangle 67"/>
           <p:cNvSpPr/>
           <p:nvPr/>
         </p:nvSpPr>
         <p:spPr>
           <a:xfrm>
-            <a:off x="274320" y="3374136"/>
-            <a:ext cx="1280160" cy="347472"/>
+            <a:off x="7406640" y="3474720"/>
+            <a:ext cx="3566160" cy="420624"/>
           </a:xfrm>
           <a:prstGeom prst="rect">
             <a:avLst/>
           </a:prstGeom>
           <a:solidFill>
-            <a:srgbClr val="F5F8FF"/>
+            <a:srgbClr val="E0F7FA"/>
           </a:solidFill>
-          <a:ln w="6350">
+          <a:ln w="7620">
             <a:solidFill>
               <a:srgbClr val="CCCCCC"/>
             </a:solidFill>
@@ -7719,14 +9364,14 @@
       </p:sp>
       <p:sp>
         <p:nvSpPr>
-          <p:cNvPr id="68" name="TextBox 67"/>
-          <p:cNvSpPr txBox="1"/>
-          <p:nvPr/>
-        </p:nvSpPr>
-        <p:spPr>
-          <a:xfrm>
-            <a:off x="320040" y="3419856"/>
-            <a:ext cx="1188719" cy="256032"/>
+          <p:cNvPr id="69" name="TextBox 68"/>
+          <p:cNvSpPr txBox="1"/>
+          <p:nvPr/>
+        </p:nvSpPr>
+        <p:spPr>
+          <a:xfrm>
+            <a:off x="7452360" y="3511296"/>
+            <a:ext cx="3474720" cy="347472"/>
           </a:xfrm>
           <a:prstGeom prst="rect">
             <a:avLst/>
@@ -7741,34 +9386,34 @@
           <a:p>
             <a:pPr algn="l"/>
             <a:r>
-              <a:rPr sz="900" b="0">
+              <a:rPr sz="850" b="0">
                 <a:solidFill>
                   <a:srgbClr val="1A1A1A"/>
                 </a:solidFill>
               </a:rPr>
-              <a:t>PE</a:t>
-            </a:r>
-          </a:p>
-        </p:txBody>
-      </p:sp>
-      <p:sp>
-        <p:nvSpPr>
-          <p:cNvPr id="69" name="Rectangle 68"/>
+              <a:t>Public 無効</a:t>
+            </a:r>
+          </a:p>
+        </p:txBody>
+      </p:sp>
+      <p:sp>
+        <p:nvSpPr>
+          <p:cNvPr id="70" name="Rectangle 69"/>
           <p:cNvSpPr/>
           <p:nvPr/>
         </p:nvSpPr>
         <p:spPr>
           <a:xfrm>
-            <a:off x="1645920" y="3374136"/>
-            <a:ext cx="1920240" cy="347472"/>
+            <a:off x="228600" y="3931920"/>
+            <a:ext cx="1554480" cy="420624"/>
           </a:xfrm>
           <a:prstGeom prst="rect">
             <a:avLst/>
           </a:prstGeom>
           <a:solidFill>
-            <a:srgbClr val="F5F8FF"/>
+            <a:srgbClr val="FFFFFF"/>
           </a:solidFill>
-          <a:ln w="6350">
+          <a:ln w="7620">
             <a:solidFill>
               <a:srgbClr val="CCCCCC"/>
             </a:solidFill>
@@ -7798,14 +9443,14 @@
       </p:sp>
       <p:sp>
         <p:nvSpPr>
-          <p:cNvPr id="70" name="TextBox 69"/>
-          <p:cNvSpPr txBox="1"/>
-          <p:nvPr/>
-        </p:nvSpPr>
-        <p:spPr>
-          <a:xfrm>
-            <a:off x="1691640" y="3419856"/>
-            <a:ext cx="1828800" cy="256032"/>
+          <p:cNvPr id="71" name="TextBox 70"/>
+          <p:cNvSpPr txBox="1"/>
+          <p:nvPr/>
+        </p:nvSpPr>
+        <p:spPr>
+          <a:xfrm>
+            <a:off x="274320" y="3968496"/>
+            <a:ext cx="1463039" cy="347472"/>
           </a:xfrm>
           <a:prstGeom prst="rect">
             <a:avLst/>
@@ -7820,34 +9465,34 @@
           <a:p>
             <a:pPr algn="l"/>
             <a:r>
-              <a:rPr sz="900" b="0">
+              <a:rPr sz="850" b="0">
                 <a:solidFill>
                   <a:srgbClr val="1A1A1A"/>
                 </a:solidFill>
               </a:rPr>
-              <a:t>pe-app-fe-test</a:t>
-            </a:r>
-          </a:p>
-        </p:txBody>
-      </p:sp>
-      <p:sp>
-        <p:nvSpPr>
-          <p:cNvPr id="71" name="Rectangle 70"/>
+              <a:t>PE: Backend</a:t>
+            </a:r>
+          </a:p>
+        </p:txBody>
+      </p:sp>
+      <p:sp>
+        <p:nvSpPr>
+          <p:cNvPr id="72" name="Rectangle 71"/>
           <p:cNvSpPr/>
           <p:nvPr/>
         </p:nvSpPr>
         <p:spPr>
           <a:xfrm>
-            <a:off x="3657600" y="3374136"/>
-            <a:ext cx="2468880" cy="347472"/>
+            <a:off x="1828800" y="3931920"/>
+            <a:ext cx="2286000" cy="420624"/>
           </a:xfrm>
           <a:prstGeom prst="rect">
             <a:avLst/>
           </a:prstGeom>
           <a:solidFill>
-            <a:srgbClr val="F5F8FF"/>
+            <a:srgbClr val="FFFFFF"/>
           </a:solidFill>
-          <a:ln w="6350">
+          <a:ln w="7620">
             <a:solidFill>
               <a:srgbClr val="CCCCCC"/>
             </a:solidFill>
@@ -7877,14 +9522,14 @@
       </p:sp>
       <p:sp>
         <p:nvSpPr>
-          <p:cNvPr id="72" name="TextBox 71"/>
-          <p:cNvSpPr txBox="1"/>
-          <p:nvPr/>
-        </p:nvSpPr>
-        <p:spPr>
-          <a:xfrm>
-            <a:off x="3703320" y="3419856"/>
-            <a:ext cx="2377440" cy="256032"/>
+          <p:cNvPr id="73" name="TextBox 72"/>
+          <p:cNvSpPr txBox="1"/>
+          <p:nvPr/>
+        </p:nvSpPr>
+        <p:spPr>
+          <a:xfrm>
+            <a:off x="1874519" y="3968496"/>
+            <a:ext cx="2194560" cy="347472"/>
           </a:xfrm>
           <a:prstGeom prst="rect">
             <a:avLst/>
@@ -7899,34 +9544,34 @@
           <a:p>
             <a:pPr algn="l"/>
             <a:r>
-              <a:rPr sz="900" b="0">
+              <a:rPr sz="850" b="0">
                 <a:solidFill>
                   <a:srgbClr val="1A1A1A"/>
                 </a:solidFill>
               </a:rPr>
-              <a:t>subnet-app に配置</a:t>
-            </a:r>
-          </a:p>
-        </p:txBody>
-      </p:sp>
-      <p:sp>
-        <p:nvSpPr>
-          <p:cNvPr id="73" name="Rectangle 72"/>
+              <a:t>App Service Backend</a:t>
+            </a:r>
+          </a:p>
+        </p:txBody>
+      </p:sp>
+      <p:sp>
+        <p:nvSpPr>
+          <p:cNvPr id="74" name="Rectangle 73"/>
           <p:cNvSpPr/>
           <p:nvPr/>
         </p:nvSpPr>
         <p:spPr>
           <a:xfrm>
-            <a:off x="6217920" y="3374136"/>
-            <a:ext cx="5303520" cy="347472"/>
+            <a:off x="4160520" y="3931920"/>
+            <a:ext cx="3200400" cy="420624"/>
           </a:xfrm>
           <a:prstGeom prst="rect">
             <a:avLst/>
           </a:prstGeom>
           <a:solidFill>
-            <a:srgbClr val="F5F8FF"/>
+            <a:srgbClr val="FFFFFF"/>
           </a:solidFill>
-          <a:ln w="6350">
+          <a:ln w="7620">
             <a:solidFill>
               <a:srgbClr val="CCCCCC"/>
             </a:solidFill>
@@ -7956,14 +9601,14 @@
       </p:sp>
       <p:sp>
         <p:nvSpPr>
-          <p:cNvPr id="74" name="TextBox 73"/>
-          <p:cNvSpPr txBox="1"/>
-          <p:nvPr/>
-        </p:nvSpPr>
-        <p:spPr>
-          <a:xfrm>
-            <a:off x="6263640" y="3419856"/>
-            <a:ext cx="5212080" cy="256032"/>
+          <p:cNvPr id="75" name="TextBox 74"/>
+          <p:cNvSpPr txBox="1"/>
+          <p:nvPr/>
+        </p:nvSpPr>
+        <p:spPr>
+          <a:xfrm>
+            <a:off x="4206240" y="3968496"/>
+            <a:ext cx="3108960" cy="347472"/>
           </a:xfrm>
           <a:prstGeom prst="rect">
             <a:avLst/>
@@ -7978,26 +9623,26 @@
           <a:p>
             <a:pPr algn="l"/>
             <a:r>
-              <a:rPr sz="900" b="0">
+              <a:rPr sz="850" b="0">
                 <a:solidFill>
                   <a:srgbClr val="1A1A1A"/>
                 </a:solidFill>
               </a:rPr>
-              <a:t>Frontend Private Endpoint</a:t>
-            </a:r>
-          </a:p>
-        </p:txBody>
-      </p:sp>
-      <p:sp>
-        <p:nvSpPr>
-          <p:cNvPr id="75" name="Rectangle 74"/>
+              <a:t>privatelink.azurewebsites.net</a:t>
+            </a:r>
+          </a:p>
+        </p:txBody>
+      </p:sp>
+      <p:sp>
+        <p:nvSpPr>
+          <p:cNvPr id="76" name="Rectangle 75"/>
           <p:cNvSpPr/>
           <p:nvPr/>
         </p:nvSpPr>
         <p:spPr>
           <a:xfrm>
-            <a:off x="274320" y="3721608"/>
-            <a:ext cx="1280160" cy="347472"/>
+            <a:off x="7406640" y="3931920"/>
+            <a:ext cx="3566160" cy="420624"/>
           </a:xfrm>
           <a:prstGeom prst="rect">
             <a:avLst/>
@@ -8005,7 +9650,7 @@
           <a:solidFill>
             <a:srgbClr val="FFFFFF"/>
           </a:solidFill>
-          <a:ln w="6350">
+          <a:ln w="7620">
             <a:solidFill>
               <a:srgbClr val="CCCCCC"/>
             </a:solidFill>
@@ -8035,14 +9680,14 @@
       </p:sp>
       <p:sp>
         <p:nvSpPr>
-          <p:cNvPr id="76" name="TextBox 75"/>
-          <p:cNvSpPr txBox="1"/>
-          <p:nvPr/>
-        </p:nvSpPr>
-        <p:spPr>
-          <a:xfrm>
-            <a:off x="320040" y="3767328"/>
-            <a:ext cx="1188719" cy="256032"/>
+          <p:cNvPr id="77" name="TextBox 76"/>
+          <p:cNvSpPr txBox="1"/>
+          <p:nvPr/>
+        </p:nvSpPr>
+        <p:spPr>
+          <a:xfrm>
+            <a:off x="7452360" y="3968496"/>
+            <a:ext cx="3474720" cy="347472"/>
           </a:xfrm>
           <a:prstGeom prst="rect">
             <a:avLst/>
@@ -8057,34 +9702,34 @@
           <a:p>
             <a:pPr algn="l"/>
             <a:r>
-              <a:rPr sz="900" b="0">
+              <a:rPr sz="850" b="0">
                 <a:solidFill>
                   <a:srgbClr val="1A1A1A"/>
                 </a:solidFill>
               </a:rPr>
-              <a:t>PE</a:t>
-            </a:r>
-          </a:p>
-        </p:txBody>
-      </p:sp>
-      <p:sp>
-        <p:nvSpPr>
-          <p:cNvPr id="77" name="Rectangle 76"/>
+              <a:t>Public 無効</a:t>
+            </a:r>
+          </a:p>
+        </p:txBody>
+      </p:sp>
+      <p:sp>
+        <p:nvSpPr>
+          <p:cNvPr id="78" name="Rectangle 77"/>
           <p:cNvSpPr/>
           <p:nvPr/>
         </p:nvSpPr>
         <p:spPr>
           <a:xfrm>
-            <a:off x="1645920" y="3721608"/>
-            <a:ext cx="1920240" cy="347472"/>
+            <a:off x="228600" y="4389120"/>
+            <a:ext cx="1554480" cy="420624"/>
           </a:xfrm>
           <a:prstGeom prst="rect">
             <a:avLst/>
           </a:prstGeom>
           <a:solidFill>
-            <a:srgbClr val="FFFFFF"/>
+            <a:srgbClr val="E0F7FA"/>
           </a:solidFill>
-          <a:ln w="6350">
+          <a:ln w="7620">
             <a:solidFill>
               <a:srgbClr val="CCCCCC"/>
             </a:solidFill>
@@ -8114,14 +9759,14 @@
       </p:sp>
       <p:sp>
         <p:nvSpPr>
-          <p:cNvPr id="78" name="TextBox 77"/>
-          <p:cNvSpPr txBox="1"/>
-          <p:nvPr/>
-        </p:nvSpPr>
-        <p:spPr>
-          <a:xfrm>
-            <a:off x="1691640" y="3767328"/>
-            <a:ext cx="1828800" cy="256032"/>
+          <p:cNvPr id="79" name="TextBox 78"/>
+          <p:cNvSpPr txBox="1"/>
+          <p:nvPr/>
+        </p:nvSpPr>
+        <p:spPr>
+          <a:xfrm>
+            <a:off x="274320" y="4425696"/>
+            <a:ext cx="1463039" cy="347472"/>
           </a:xfrm>
           <a:prstGeom prst="rect">
             <a:avLst/>
@@ -8136,34 +9781,34 @@
           <a:p>
             <a:pPr algn="l"/>
             <a:r>
-              <a:rPr sz="900" b="0">
+              <a:rPr sz="850" b="0">
                 <a:solidFill>
                   <a:srgbClr val="1A1A1A"/>
                 </a:solidFill>
               </a:rPr>
-              <a:t>pe-app-be-test</a:t>
-            </a:r>
-          </a:p>
-        </p:txBody>
-      </p:sp>
-      <p:sp>
-        <p:nvSpPr>
-          <p:cNvPr id="79" name="Rectangle 78"/>
+              <a:t>PE: Functions</a:t>
+            </a:r>
+          </a:p>
+        </p:txBody>
+      </p:sp>
+      <p:sp>
+        <p:nvSpPr>
+          <p:cNvPr id="80" name="Rectangle 79"/>
           <p:cNvSpPr/>
           <p:nvPr/>
         </p:nvSpPr>
         <p:spPr>
           <a:xfrm>
-            <a:off x="3657600" y="3721608"/>
-            <a:ext cx="2468880" cy="347472"/>
+            <a:off x="1828800" y="4389120"/>
+            <a:ext cx="2286000" cy="420624"/>
           </a:xfrm>
           <a:prstGeom prst="rect">
             <a:avLst/>
           </a:prstGeom>
           <a:solidFill>
-            <a:srgbClr val="FFFFFF"/>
+            <a:srgbClr val="E0F7FA"/>
           </a:solidFill>
-          <a:ln w="6350">
+          <a:ln w="7620">
             <a:solidFill>
               <a:srgbClr val="CCCCCC"/>
             </a:solidFill>
@@ -8193,14 +9838,14 @@
       </p:sp>
       <p:sp>
         <p:nvSpPr>
-          <p:cNvPr id="80" name="TextBox 79"/>
-          <p:cNvSpPr txBox="1"/>
-          <p:nvPr/>
-        </p:nvSpPr>
-        <p:spPr>
-          <a:xfrm>
-            <a:off x="3703320" y="3767328"/>
-            <a:ext cx="2377440" cy="256032"/>
+          <p:cNvPr id="81" name="TextBox 80"/>
+          <p:cNvSpPr txBox="1"/>
+          <p:nvPr/>
+        </p:nvSpPr>
+        <p:spPr>
+          <a:xfrm>
+            <a:off x="1874519" y="4425696"/>
+            <a:ext cx="2194560" cy="347472"/>
           </a:xfrm>
           <a:prstGeom prst="rect">
             <a:avLst/>
@@ -8215,34 +9860,34 @@
           <a:p>
             <a:pPr algn="l"/>
             <a:r>
-              <a:rPr sz="900" b="0">
+              <a:rPr sz="850" b="0">
                 <a:solidFill>
                   <a:srgbClr val="1A1A1A"/>
                 </a:solidFill>
               </a:rPr>
-              <a:t>subnet-app に配置</a:t>
-            </a:r>
-          </a:p>
-        </p:txBody>
-      </p:sp>
-      <p:sp>
-        <p:nvSpPr>
-          <p:cNvPr id="81" name="Rectangle 80"/>
+              <a:t>Azure Functions</a:t>
+            </a:r>
+          </a:p>
+        </p:txBody>
+      </p:sp>
+      <p:sp>
+        <p:nvSpPr>
+          <p:cNvPr id="82" name="Rectangle 81"/>
           <p:cNvSpPr/>
           <p:nvPr/>
         </p:nvSpPr>
         <p:spPr>
           <a:xfrm>
-            <a:off x="6217920" y="3721608"/>
-            <a:ext cx="5303520" cy="347472"/>
+            <a:off x="4160520" y="4389120"/>
+            <a:ext cx="3200400" cy="420624"/>
           </a:xfrm>
           <a:prstGeom prst="rect">
             <a:avLst/>
           </a:prstGeom>
           <a:solidFill>
-            <a:srgbClr val="FFFFFF"/>
+            <a:srgbClr val="E0F7FA"/>
           </a:solidFill>
-          <a:ln w="6350">
+          <a:ln w="7620">
             <a:solidFill>
               <a:srgbClr val="CCCCCC"/>
             </a:solidFill>
@@ -8272,14 +9917,14 @@
       </p:sp>
       <p:sp>
         <p:nvSpPr>
-          <p:cNvPr id="82" name="TextBox 81"/>
-          <p:cNvSpPr txBox="1"/>
-          <p:nvPr/>
-        </p:nvSpPr>
-        <p:spPr>
-          <a:xfrm>
-            <a:off x="6263640" y="3767328"/>
-            <a:ext cx="5212080" cy="256032"/>
+          <p:cNvPr id="83" name="TextBox 82"/>
+          <p:cNvSpPr txBox="1"/>
+          <p:nvPr/>
+        </p:nvSpPr>
+        <p:spPr>
+          <a:xfrm>
+            <a:off x="4206240" y="4425696"/>
+            <a:ext cx="3108960" cy="347472"/>
           </a:xfrm>
           <a:prstGeom prst="rect">
             <a:avLst/>
@@ -8294,34 +9939,34 @@
           <a:p>
             <a:pPr algn="l"/>
             <a:r>
-              <a:rPr sz="900" b="0">
+              <a:rPr sz="850" b="0">
                 <a:solidFill>
                   <a:srgbClr val="1A1A1A"/>
                 </a:solidFill>
               </a:rPr>
-              <a:t>Backend Private Endpoint</a:t>
-            </a:r>
-          </a:p>
-        </p:txBody>
-      </p:sp>
-      <p:sp>
-        <p:nvSpPr>
-          <p:cNvPr id="83" name="Rectangle 82"/>
+              <a:t>privatelink.azurewebsites.net</a:t>
+            </a:r>
+          </a:p>
+        </p:txBody>
+      </p:sp>
+      <p:sp>
+        <p:nvSpPr>
+          <p:cNvPr id="84" name="Rectangle 83"/>
           <p:cNvSpPr/>
           <p:nvPr/>
         </p:nvSpPr>
         <p:spPr>
           <a:xfrm>
-            <a:off x="274320" y="4069080"/>
-            <a:ext cx="1280160" cy="347472"/>
+            <a:off x="7406640" y="4389120"/>
+            <a:ext cx="3566160" cy="420624"/>
           </a:xfrm>
           <a:prstGeom prst="rect">
             <a:avLst/>
           </a:prstGeom>
           <a:solidFill>
-            <a:srgbClr val="F5F8FF"/>
+            <a:srgbClr val="E0F7FA"/>
           </a:solidFill>
-          <a:ln w="6350">
+          <a:ln w="7620">
             <a:solidFill>
               <a:srgbClr val="CCCCCC"/>
             </a:solidFill>
@@ -8351,14 +9996,14 @@
       </p:sp>
       <p:sp>
         <p:nvSpPr>
-          <p:cNvPr id="84" name="TextBox 83"/>
-          <p:cNvSpPr txBox="1"/>
-          <p:nvPr/>
-        </p:nvSpPr>
-        <p:spPr>
-          <a:xfrm>
-            <a:off x="320040" y="4114800"/>
-            <a:ext cx="1188719" cy="256032"/>
+          <p:cNvPr id="85" name="TextBox 84"/>
+          <p:cNvSpPr txBox="1"/>
+          <p:nvPr/>
+        </p:nvSpPr>
+        <p:spPr>
+          <a:xfrm>
+            <a:off x="7452360" y="4425696"/>
+            <a:ext cx="3474720" cy="347472"/>
           </a:xfrm>
           <a:prstGeom prst="rect">
             <a:avLst/>
@@ -8373,34 +10018,34 @@
           <a:p>
             <a:pPr algn="l"/>
             <a:r>
-              <a:rPr sz="900" b="0">
+              <a:rPr sz="850" b="0">
                 <a:solidFill>
                   <a:srgbClr val="1A1A1A"/>
                 </a:solidFill>
               </a:rPr>
-              <a:t>DNS Zone</a:t>
-            </a:r>
-          </a:p>
-        </p:txBody>
-      </p:sp>
-      <p:sp>
-        <p:nvSpPr>
-          <p:cNvPr id="85" name="Rectangle 84"/>
+              <a:t>Public 無効 / Flex Consumption</a:t>
+            </a:r>
+          </a:p>
+        </p:txBody>
+      </p:sp>
+      <p:sp>
+        <p:nvSpPr>
+          <p:cNvPr id="86" name="Rectangle 85"/>
           <p:cNvSpPr/>
           <p:nvPr/>
         </p:nvSpPr>
         <p:spPr>
           <a:xfrm>
-            <a:off x="1645920" y="4069080"/>
-            <a:ext cx="1920240" cy="347472"/>
+            <a:off x="228600" y="4846320"/>
+            <a:ext cx="1554480" cy="420624"/>
           </a:xfrm>
           <a:prstGeom prst="rect">
             <a:avLst/>
           </a:prstGeom>
           <a:solidFill>
-            <a:srgbClr val="F5F8FF"/>
+            <a:srgbClr val="FFFFFF"/>
           </a:solidFill>
-          <a:ln w="6350">
+          <a:ln w="7620">
             <a:solidFill>
               <a:srgbClr val="CCCCCC"/>
             </a:solidFill>
@@ -8430,14 +10075,14 @@
       </p:sp>
       <p:sp>
         <p:nvSpPr>
-          <p:cNvPr id="86" name="TextBox 85"/>
-          <p:cNvSpPr txBox="1"/>
-          <p:nvPr/>
-        </p:nvSpPr>
-        <p:spPr>
-          <a:xfrm>
-            <a:off x="1691640" y="4114800"/>
-            <a:ext cx="1828800" cy="256032"/>
+          <p:cNvPr id="87" name="TextBox 86"/>
+          <p:cNvSpPr txBox="1"/>
+          <p:nvPr/>
+        </p:nvSpPr>
+        <p:spPr>
+          <a:xfrm>
+            <a:off x="274320" y="4882896"/>
+            <a:ext cx="1463039" cy="347472"/>
           </a:xfrm>
           <a:prstGeom prst="rect">
             <a:avLst/>
@@ -8452,34 +10097,34 @@
           <a:p>
             <a:pPr algn="l"/>
             <a:r>
-              <a:rPr sz="900" b="0">
+              <a:rPr sz="850" b="0">
                 <a:solidFill>
                   <a:srgbClr val="1A1A1A"/>
                 </a:solidFill>
               </a:rPr>
-              <a:t>privatelink.azurewebsites.net</a:t>
-            </a:r>
-          </a:p>
-        </p:txBody>
-      </p:sp>
-      <p:sp>
-        <p:nvSpPr>
-          <p:cNvPr id="87" name="Rectangle 86"/>
+              <a:t>PE: Storage</a:t>
+            </a:r>
+          </a:p>
+        </p:txBody>
+      </p:sp>
+      <p:sp>
+        <p:nvSpPr>
+          <p:cNvPr id="88" name="Rectangle 87"/>
           <p:cNvSpPr/>
           <p:nvPr/>
         </p:nvSpPr>
         <p:spPr>
           <a:xfrm>
-            <a:off x="3657600" y="4069080"/>
-            <a:ext cx="2468880" cy="347472"/>
+            <a:off x="1828800" y="4846320"/>
+            <a:ext cx="2286000" cy="420624"/>
           </a:xfrm>
           <a:prstGeom prst="rect">
             <a:avLst/>
           </a:prstGeom>
           <a:solidFill>
-            <a:srgbClr val="F5F8FF"/>
+            <a:srgbClr val="FFFFFF"/>
           </a:solidFill>
-          <a:ln w="6350">
+          <a:ln w="7620">
             <a:solidFill>
               <a:srgbClr val="CCCCCC"/>
             </a:solidFill>
@@ -8509,14 +10154,14 @@
       </p:sp>
       <p:sp>
         <p:nvSpPr>
-          <p:cNvPr id="88" name="TextBox 87"/>
-          <p:cNvSpPr txBox="1"/>
-          <p:nvPr/>
-        </p:nvSpPr>
-        <p:spPr>
-          <a:xfrm>
-            <a:off x="3703320" y="4114800"/>
-            <a:ext cx="2377440" cy="256032"/>
+          <p:cNvPr id="89" name="TextBox 88"/>
+          <p:cNvSpPr txBox="1"/>
+          <p:nvPr/>
+        </p:nvSpPr>
+        <p:spPr>
+          <a:xfrm>
+            <a:off x="1874519" y="4882896"/>
+            <a:ext cx="2194560" cy="347472"/>
           </a:xfrm>
           <a:prstGeom prst="rect">
             <a:avLst/>
@@ -8531,34 +10176,34 @@
           <a:p>
             <a:pPr algn="l"/>
             <a:r>
-              <a:rPr sz="900" b="0">
+              <a:rPr sz="850" b="0">
                 <a:solidFill>
                   <a:srgbClr val="1A1A1A"/>
                 </a:solidFill>
               </a:rPr>
-              <a:t>VNet リンク済み</a:t>
-            </a:r>
-          </a:p>
-        </p:txBody>
-      </p:sp>
-      <p:sp>
-        <p:nvSpPr>
-          <p:cNvPr id="89" name="Rectangle 88"/>
+              <a:t>Storage Account</a:t>
+            </a:r>
+          </a:p>
+        </p:txBody>
+      </p:sp>
+      <p:sp>
+        <p:nvSpPr>
+          <p:cNvPr id="90" name="Rectangle 89"/>
           <p:cNvSpPr/>
           <p:nvPr/>
         </p:nvSpPr>
         <p:spPr>
           <a:xfrm>
-            <a:off x="6217920" y="4069080"/>
-            <a:ext cx="5303520" cy="347472"/>
+            <a:off x="4160520" y="4846320"/>
+            <a:ext cx="3200400" cy="420624"/>
           </a:xfrm>
           <a:prstGeom prst="rect">
             <a:avLst/>
           </a:prstGeom>
           <a:solidFill>
-            <a:srgbClr val="F5F8FF"/>
+            <a:srgbClr val="FFFFFF"/>
           </a:solidFill>
-          <a:ln w="6350">
+          <a:ln w="7620">
             <a:solidFill>
               <a:srgbClr val="CCCCCC"/>
             </a:solidFill>
@@ -8588,14 +10233,14 @@
       </p:sp>
       <p:sp>
         <p:nvSpPr>
-          <p:cNvPr id="90" name="TextBox 89"/>
-          <p:cNvSpPr txBox="1"/>
-          <p:nvPr/>
-        </p:nvSpPr>
-        <p:spPr>
-          <a:xfrm>
-            <a:off x="6263640" y="4114800"/>
-            <a:ext cx="5212080" cy="256032"/>
+          <p:cNvPr id="91" name="TextBox 90"/>
+          <p:cNvSpPr txBox="1"/>
+          <p:nvPr/>
+        </p:nvSpPr>
+        <p:spPr>
+          <a:xfrm>
+            <a:off x="4206240" y="4882896"/>
+            <a:ext cx="3108960" cy="347472"/>
           </a:xfrm>
           <a:prstGeom prst="rect">
             <a:avLst/>
@@ -8610,46 +10255,723 @@
           <a:p>
             <a:pPr algn="l"/>
             <a:r>
-              <a:rPr sz="900" b="0">
+              <a:rPr sz="850" b="0">
                 <a:solidFill>
                   <a:srgbClr val="1A1A1A"/>
                 </a:solidFill>
               </a:rPr>
-              <a:t>VNet 内の名前解決</a:t>
-            </a:r>
-          </a:p>
-        </p:txBody>
-      </p:sp>
-      <p:sp>
-        <p:nvSpPr>
-          <p:cNvPr id="91" name="TextBox 90"/>
-          <p:cNvSpPr txBox="1"/>
-          <p:nvPr/>
-        </p:nvSpPr>
-        <p:spPr>
-          <a:xfrm>
-            <a:off x="274320" y="6309360"/>
-            <a:ext cx="10972800" cy="228600"/>
-          </a:xfrm>
-          <a:prstGeom prst="rect">
-            <a:avLst/>
-          </a:prstGeom>
-          <a:noFill/>
-        </p:spPr>
-        <p:txBody>
-          <a:bodyPr wrap="square">
-            <a:spAutoFit/>
-          </a:bodyPr>
-          <a:lstStyle/>
-          <a:p>
-            <a:pPr algn="ctr"/>
-            <a:r>
-              <a:rPr sz="800" b="0">
-                <a:solidFill>
-                  <a:srgbClr val="C00000"/>
-                </a:solidFill>
-              </a:rPr>
-              <a:t>※ terraform.tfvars の allowed_ip_ranges にオンプレのグローバルIPを設定すること</a:t>
+              <a:t>privatelink.blob.core.windows.net</a:t>
+            </a:r>
+          </a:p>
+        </p:txBody>
+      </p:sp>
+      <p:sp>
+        <p:nvSpPr>
+          <p:cNvPr id="92" name="Rectangle 91"/>
+          <p:cNvSpPr/>
+          <p:nvPr/>
+        </p:nvSpPr>
+        <p:spPr>
+          <a:xfrm>
+            <a:off x="7406640" y="4846320"/>
+            <a:ext cx="3566160" cy="420624"/>
+          </a:xfrm>
+          <a:prstGeom prst="rect">
+            <a:avLst/>
+          </a:prstGeom>
+          <a:solidFill>
+            <a:srgbClr val="FFFFFF"/>
+          </a:solidFill>
+          <a:ln w="7620">
+            <a:solidFill>
+              <a:srgbClr val="CCCCCC"/>
+            </a:solidFill>
+          </a:ln>
+        </p:spPr>
+        <p:style>
+          <a:lnRef idx="1">
+            <a:schemeClr val="accent1"/>
+          </a:lnRef>
+          <a:fillRef idx="3">
+            <a:schemeClr val="accent1"/>
+          </a:fillRef>
+          <a:effectRef idx="2">
+            <a:schemeClr val="accent1"/>
+          </a:effectRef>
+          <a:fontRef idx="minor">
+            <a:schemeClr val="lt1"/>
+          </a:fontRef>
+        </p:style>
+        <p:txBody>
+          <a:bodyPr rtlCol="0" anchor="ctr"/>
+          <a:lstStyle/>
+          <a:p>
+            <a:pPr algn="ctr"/>
+          </a:p>
+        </p:txBody>
+      </p:sp>
+      <p:sp>
+        <p:nvSpPr>
+          <p:cNvPr id="93" name="TextBox 92"/>
+          <p:cNvSpPr txBox="1"/>
+          <p:nvPr/>
+        </p:nvSpPr>
+        <p:spPr>
+          <a:xfrm>
+            <a:off x="7452360" y="4882896"/>
+            <a:ext cx="3474720" cy="347472"/>
+          </a:xfrm>
+          <a:prstGeom prst="rect">
+            <a:avLst/>
+          </a:prstGeom>
+          <a:noFill/>
+        </p:spPr>
+        <p:txBody>
+          <a:bodyPr wrap="square">
+            <a:spAutoFit/>
+          </a:bodyPr>
+          <a:lstStyle/>
+          <a:p>
+            <a:pPr algn="l"/>
+            <a:r>
+              <a:rPr sz="850" b="0">
+                <a:solidFill>
+                  <a:srgbClr val="1A1A1A"/>
+                </a:solidFill>
+              </a:rPr>
+              <a:t>blob サブリソース</a:t>
+            </a:r>
+          </a:p>
+        </p:txBody>
+      </p:sp>
+      <p:sp>
+        <p:nvSpPr>
+          <p:cNvPr id="94" name="Rectangle 93"/>
+          <p:cNvSpPr/>
+          <p:nvPr/>
+        </p:nvSpPr>
+        <p:spPr>
+          <a:xfrm>
+            <a:off x="228600" y="5303520"/>
+            <a:ext cx="1554480" cy="420624"/>
+          </a:xfrm>
+          <a:prstGeom prst="rect">
+            <a:avLst/>
+          </a:prstGeom>
+          <a:solidFill>
+            <a:srgbClr val="E0F7FA"/>
+          </a:solidFill>
+          <a:ln w="7620">
+            <a:solidFill>
+              <a:srgbClr val="CCCCCC"/>
+            </a:solidFill>
+          </a:ln>
+        </p:spPr>
+        <p:style>
+          <a:lnRef idx="1">
+            <a:schemeClr val="accent1"/>
+          </a:lnRef>
+          <a:fillRef idx="3">
+            <a:schemeClr val="accent1"/>
+          </a:fillRef>
+          <a:effectRef idx="2">
+            <a:schemeClr val="accent1"/>
+          </a:effectRef>
+          <a:fontRef idx="minor">
+            <a:schemeClr val="lt1"/>
+          </a:fontRef>
+        </p:style>
+        <p:txBody>
+          <a:bodyPr rtlCol="0" anchor="ctr"/>
+          <a:lstStyle/>
+          <a:p>
+            <a:pPr algn="ctr"/>
+          </a:p>
+        </p:txBody>
+      </p:sp>
+      <p:sp>
+        <p:nvSpPr>
+          <p:cNvPr id="95" name="TextBox 94"/>
+          <p:cNvSpPr txBox="1"/>
+          <p:nvPr/>
+        </p:nvSpPr>
+        <p:spPr>
+          <a:xfrm>
+            <a:off x="274320" y="5340096"/>
+            <a:ext cx="1463039" cy="347472"/>
+          </a:xfrm>
+          <a:prstGeom prst="rect">
+            <a:avLst/>
+          </a:prstGeom>
+          <a:noFill/>
+        </p:spPr>
+        <p:txBody>
+          <a:bodyPr wrap="square">
+            <a:spAutoFit/>
+          </a:bodyPr>
+          <a:lstStyle/>
+          <a:p>
+            <a:pPr algn="l"/>
+            <a:r>
+              <a:rPr sz="850" b="0">
+                <a:solidFill>
+                  <a:srgbClr val="1A1A1A"/>
+                </a:solidFill>
+              </a:rPr>
+              <a:t>PE: AI Search</a:t>
+            </a:r>
+          </a:p>
+        </p:txBody>
+      </p:sp>
+      <p:sp>
+        <p:nvSpPr>
+          <p:cNvPr id="96" name="Rectangle 95"/>
+          <p:cNvSpPr/>
+          <p:nvPr/>
+        </p:nvSpPr>
+        <p:spPr>
+          <a:xfrm>
+            <a:off x="1828800" y="5303520"/>
+            <a:ext cx="2286000" cy="420624"/>
+          </a:xfrm>
+          <a:prstGeom prst="rect">
+            <a:avLst/>
+          </a:prstGeom>
+          <a:solidFill>
+            <a:srgbClr val="E0F7FA"/>
+          </a:solidFill>
+          <a:ln w="7620">
+            <a:solidFill>
+              <a:srgbClr val="CCCCCC"/>
+            </a:solidFill>
+          </a:ln>
+        </p:spPr>
+        <p:style>
+          <a:lnRef idx="1">
+            <a:schemeClr val="accent1"/>
+          </a:lnRef>
+          <a:fillRef idx="3">
+            <a:schemeClr val="accent1"/>
+          </a:fillRef>
+          <a:effectRef idx="2">
+            <a:schemeClr val="accent1"/>
+          </a:effectRef>
+          <a:fontRef idx="minor">
+            <a:schemeClr val="lt1"/>
+          </a:fontRef>
+        </p:style>
+        <p:txBody>
+          <a:bodyPr rtlCol="0" anchor="ctr"/>
+          <a:lstStyle/>
+          <a:p>
+            <a:pPr algn="ctr"/>
+          </a:p>
+        </p:txBody>
+      </p:sp>
+      <p:sp>
+        <p:nvSpPr>
+          <p:cNvPr id="97" name="TextBox 96"/>
+          <p:cNvSpPr txBox="1"/>
+          <p:nvPr/>
+        </p:nvSpPr>
+        <p:spPr>
+          <a:xfrm>
+            <a:off x="1874519" y="5340096"/>
+            <a:ext cx="2194560" cy="347472"/>
+          </a:xfrm>
+          <a:prstGeom prst="rect">
+            <a:avLst/>
+          </a:prstGeom>
+          <a:noFill/>
+        </p:spPr>
+        <p:txBody>
+          <a:bodyPr wrap="square">
+            <a:spAutoFit/>
+          </a:bodyPr>
+          <a:lstStyle/>
+          <a:p>
+            <a:pPr algn="l"/>
+            <a:r>
+              <a:rPr sz="850" b="0">
+                <a:solidFill>
+                  <a:srgbClr val="1A1A1A"/>
+                </a:solidFill>
+              </a:rPr>
+              <a:t>Azure AI Search</a:t>
+            </a:r>
+          </a:p>
+        </p:txBody>
+      </p:sp>
+      <p:sp>
+        <p:nvSpPr>
+          <p:cNvPr id="98" name="Rectangle 97"/>
+          <p:cNvSpPr/>
+          <p:nvPr/>
+        </p:nvSpPr>
+        <p:spPr>
+          <a:xfrm>
+            <a:off x="4160520" y="5303520"/>
+            <a:ext cx="3200400" cy="420624"/>
+          </a:xfrm>
+          <a:prstGeom prst="rect">
+            <a:avLst/>
+          </a:prstGeom>
+          <a:solidFill>
+            <a:srgbClr val="E0F7FA"/>
+          </a:solidFill>
+          <a:ln w="7620">
+            <a:solidFill>
+              <a:srgbClr val="CCCCCC"/>
+            </a:solidFill>
+          </a:ln>
+        </p:spPr>
+        <p:style>
+          <a:lnRef idx="1">
+            <a:schemeClr val="accent1"/>
+          </a:lnRef>
+          <a:fillRef idx="3">
+            <a:schemeClr val="accent1"/>
+          </a:fillRef>
+          <a:effectRef idx="2">
+            <a:schemeClr val="accent1"/>
+          </a:effectRef>
+          <a:fontRef idx="minor">
+            <a:schemeClr val="lt1"/>
+          </a:fontRef>
+        </p:style>
+        <p:txBody>
+          <a:bodyPr rtlCol="0" anchor="ctr"/>
+          <a:lstStyle/>
+          <a:p>
+            <a:pPr algn="ctr"/>
+          </a:p>
+        </p:txBody>
+      </p:sp>
+      <p:sp>
+        <p:nvSpPr>
+          <p:cNvPr id="99" name="TextBox 98"/>
+          <p:cNvSpPr txBox="1"/>
+          <p:nvPr/>
+        </p:nvSpPr>
+        <p:spPr>
+          <a:xfrm>
+            <a:off x="4206240" y="5340096"/>
+            <a:ext cx="3108960" cy="347472"/>
+          </a:xfrm>
+          <a:prstGeom prst="rect">
+            <a:avLst/>
+          </a:prstGeom>
+          <a:noFill/>
+        </p:spPr>
+        <p:txBody>
+          <a:bodyPr wrap="square">
+            <a:spAutoFit/>
+          </a:bodyPr>
+          <a:lstStyle/>
+          <a:p>
+            <a:pPr algn="l"/>
+            <a:r>
+              <a:rPr sz="850" b="0">
+                <a:solidFill>
+                  <a:srgbClr val="1A1A1A"/>
+                </a:solidFill>
+              </a:rPr>
+              <a:t>privatelink.search.windows.net</a:t>
+            </a:r>
+          </a:p>
+        </p:txBody>
+      </p:sp>
+      <p:sp>
+        <p:nvSpPr>
+          <p:cNvPr id="100" name="Rectangle 99"/>
+          <p:cNvSpPr/>
+          <p:nvPr/>
+        </p:nvSpPr>
+        <p:spPr>
+          <a:xfrm>
+            <a:off x="7406640" y="5303520"/>
+            <a:ext cx="3566160" cy="420624"/>
+          </a:xfrm>
+          <a:prstGeom prst="rect">
+            <a:avLst/>
+          </a:prstGeom>
+          <a:solidFill>
+            <a:srgbClr val="E0F7FA"/>
+          </a:solidFill>
+          <a:ln w="7620">
+            <a:solidFill>
+              <a:srgbClr val="CCCCCC"/>
+            </a:solidFill>
+          </a:ln>
+        </p:spPr>
+        <p:style>
+          <a:lnRef idx="1">
+            <a:schemeClr val="accent1"/>
+          </a:lnRef>
+          <a:fillRef idx="3">
+            <a:schemeClr val="accent1"/>
+          </a:fillRef>
+          <a:effectRef idx="2">
+            <a:schemeClr val="accent1"/>
+          </a:effectRef>
+          <a:fontRef idx="minor">
+            <a:schemeClr val="lt1"/>
+          </a:fontRef>
+        </p:style>
+        <p:txBody>
+          <a:bodyPr rtlCol="0" anchor="ctr"/>
+          <a:lstStyle/>
+          <a:p>
+            <a:pPr algn="ctr"/>
+          </a:p>
+        </p:txBody>
+      </p:sp>
+      <p:sp>
+        <p:nvSpPr>
+          <p:cNvPr id="101" name="TextBox 100"/>
+          <p:cNvSpPr txBox="1"/>
+          <p:nvPr/>
+        </p:nvSpPr>
+        <p:spPr>
+          <a:xfrm>
+            <a:off x="7452360" y="5340096"/>
+            <a:ext cx="3474720" cy="347472"/>
+          </a:xfrm>
+          <a:prstGeom prst="rect">
+            <a:avLst/>
+          </a:prstGeom>
+          <a:noFill/>
+        </p:spPr>
+        <p:txBody>
+          <a:bodyPr wrap="square">
+            <a:spAutoFit/>
+          </a:bodyPr>
+          <a:lstStyle/>
+          <a:p>
+            <a:pPr algn="l"/>
+            <a:r>
+              <a:rPr sz="850" b="0">
+                <a:solidFill>
+                  <a:srgbClr val="1A1A1A"/>
+                </a:solidFill>
+              </a:rPr>
+              <a:t>searchService サブリソース</a:t>
+            </a:r>
+          </a:p>
+        </p:txBody>
+      </p:sp>
+      <p:sp>
+        <p:nvSpPr>
+          <p:cNvPr id="102" name="Rectangle 101"/>
+          <p:cNvSpPr/>
+          <p:nvPr/>
+        </p:nvSpPr>
+        <p:spPr>
+          <a:xfrm>
+            <a:off x="228600" y="5760720"/>
+            <a:ext cx="1554480" cy="420624"/>
+          </a:xfrm>
+          <a:prstGeom prst="rect">
+            <a:avLst/>
+          </a:prstGeom>
+          <a:solidFill>
+            <a:srgbClr val="FFFFFF"/>
+          </a:solidFill>
+          <a:ln w="7620">
+            <a:solidFill>
+              <a:srgbClr val="CCCCCC"/>
+            </a:solidFill>
+          </a:ln>
+        </p:spPr>
+        <p:style>
+          <a:lnRef idx="1">
+            <a:schemeClr val="accent1"/>
+          </a:lnRef>
+          <a:fillRef idx="3">
+            <a:schemeClr val="accent1"/>
+          </a:fillRef>
+          <a:effectRef idx="2">
+            <a:schemeClr val="accent1"/>
+          </a:effectRef>
+          <a:fontRef idx="minor">
+            <a:schemeClr val="lt1"/>
+          </a:fontRef>
+        </p:style>
+        <p:txBody>
+          <a:bodyPr rtlCol="0" anchor="ctr"/>
+          <a:lstStyle/>
+          <a:p>
+            <a:pPr algn="ctr"/>
+          </a:p>
+        </p:txBody>
+      </p:sp>
+      <p:sp>
+        <p:nvSpPr>
+          <p:cNvPr id="103" name="TextBox 102"/>
+          <p:cNvSpPr txBox="1"/>
+          <p:nvPr/>
+        </p:nvSpPr>
+        <p:spPr>
+          <a:xfrm>
+            <a:off x="274320" y="5797296"/>
+            <a:ext cx="1463039" cy="347472"/>
+          </a:xfrm>
+          <a:prstGeom prst="rect">
+            <a:avLst/>
+          </a:prstGeom>
+          <a:noFill/>
+        </p:spPr>
+        <p:txBody>
+          <a:bodyPr wrap="square">
+            <a:spAutoFit/>
+          </a:bodyPr>
+          <a:lstStyle/>
+          <a:p>
+            <a:pPr algn="l"/>
+            <a:r>
+              <a:rPr sz="850" b="0">
+                <a:solidFill>
+                  <a:srgbClr val="1A1A1A"/>
+                </a:solidFill>
+              </a:rPr>
+              <a:t>PE: Foundry</a:t>
+            </a:r>
+          </a:p>
+        </p:txBody>
+      </p:sp>
+      <p:sp>
+        <p:nvSpPr>
+          <p:cNvPr id="104" name="Rectangle 103"/>
+          <p:cNvSpPr/>
+          <p:nvPr/>
+        </p:nvSpPr>
+        <p:spPr>
+          <a:xfrm>
+            <a:off x="1828800" y="5760720"/>
+            <a:ext cx="2286000" cy="420624"/>
+          </a:xfrm>
+          <a:prstGeom prst="rect">
+            <a:avLst/>
+          </a:prstGeom>
+          <a:solidFill>
+            <a:srgbClr val="FFFFFF"/>
+          </a:solidFill>
+          <a:ln w="7620">
+            <a:solidFill>
+              <a:srgbClr val="CCCCCC"/>
+            </a:solidFill>
+          </a:ln>
+        </p:spPr>
+        <p:style>
+          <a:lnRef idx="1">
+            <a:schemeClr val="accent1"/>
+          </a:lnRef>
+          <a:fillRef idx="3">
+            <a:schemeClr val="accent1"/>
+          </a:fillRef>
+          <a:effectRef idx="2">
+            <a:schemeClr val="accent1"/>
+          </a:effectRef>
+          <a:fontRef idx="minor">
+            <a:schemeClr val="lt1"/>
+          </a:fontRef>
+        </p:style>
+        <p:txBody>
+          <a:bodyPr rtlCol="0" anchor="ctr"/>
+          <a:lstStyle/>
+          <a:p>
+            <a:pPr algn="ctr"/>
+          </a:p>
+        </p:txBody>
+      </p:sp>
+      <p:sp>
+        <p:nvSpPr>
+          <p:cNvPr id="105" name="TextBox 104"/>
+          <p:cNvSpPr txBox="1"/>
+          <p:nvPr/>
+        </p:nvSpPr>
+        <p:spPr>
+          <a:xfrm>
+            <a:off x="1874519" y="5797296"/>
+            <a:ext cx="2194560" cy="347472"/>
+          </a:xfrm>
+          <a:prstGeom prst="rect">
+            <a:avLst/>
+          </a:prstGeom>
+          <a:noFill/>
+        </p:spPr>
+        <p:txBody>
+          <a:bodyPr wrap="square">
+            <a:spAutoFit/>
+          </a:bodyPr>
+          <a:lstStyle/>
+          <a:p>
+            <a:pPr algn="l"/>
+            <a:r>
+              <a:rPr sz="850" b="0">
+                <a:solidFill>
+                  <a:srgbClr val="1A1A1A"/>
+                </a:solidFill>
+              </a:rPr>
+              <a:t>Azure AI Foundry</a:t>
+            </a:r>
+          </a:p>
+        </p:txBody>
+      </p:sp>
+      <p:sp>
+        <p:nvSpPr>
+          <p:cNvPr id="106" name="Rectangle 105"/>
+          <p:cNvSpPr/>
+          <p:nvPr/>
+        </p:nvSpPr>
+        <p:spPr>
+          <a:xfrm>
+            <a:off x="4160520" y="5760720"/>
+            <a:ext cx="3200400" cy="420624"/>
+          </a:xfrm>
+          <a:prstGeom prst="rect">
+            <a:avLst/>
+          </a:prstGeom>
+          <a:solidFill>
+            <a:srgbClr val="FFFFFF"/>
+          </a:solidFill>
+          <a:ln w="7620">
+            <a:solidFill>
+              <a:srgbClr val="CCCCCC"/>
+            </a:solidFill>
+          </a:ln>
+        </p:spPr>
+        <p:style>
+          <a:lnRef idx="1">
+            <a:schemeClr val="accent1"/>
+          </a:lnRef>
+          <a:fillRef idx="3">
+            <a:schemeClr val="accent1"/>
+          </a:fillRef>
+          <a:effectRef idx="2">
+            <a:schemeClr val="accent1"/>
+          </a:effectRef>
+          <a:fontRef idx="minor">
+            <a:schemeClr val="lt1"/>
+          </a:fontRef>
+        </p:style>
+        <p:txBody>
+          <a:bodyPr rtlCol="0" anchor="ctr"/>
+          <a:lstStyle/>
+          <a:p>
+            <a:pPr algn="ctr"/>
+          </a:p>
+        </p:txBody>
+      </p:sp>
+      <p:sp>
+        <p:nvSpPr>
+          <p:cNvPr id="107" name="TextBox 106"/>
+          <p:cNvSpPr txBox="1"/>
+          <p:nvPr/>
+        </p:nvSpPr>
+        <p:spPr>
+          <a:xfrm>
+            <a:off x="4206240" y="5797296"/>
+            <a:ext cx="3108960" cy="347472"/>
+          </a:xfrm>
+          <a:prstGeom prst="rect">
+            <a:avLst/>
+          </a:prstGeom>
+          <a:noFill/>
+        </p:spPr>
+        <p:txBody>
+          <a:bodyPr wrap="square">
+            <a:spAutoFit/>
+          </a:bodyPr>
+          <a:lstStyle/>
+          <a:p>
+            <a:pPr algn="l"/>
+            <a:r>
+              <a:rPr sz="850" b="0">
+                <a:solidFill>
+                  <a:srgbClr val="1A1A1A"/>
+                </a:solidFill>
+              </a:rPr>
+              <a:t>privatelink.services.ai.azure.com</a:t>
+            </a:r>
+          </a:p>
+        </p:txBody>
+      </p:sp>
+      <p:sp>
+        <p:nvSpPr>
+          <p:cNvPr id="108" name="Rectangle 107"/>
+          <p:cNvSpPr/>
+          <p:nvPr/>
+        </p:nvSpPr>
+        <p:spPr>
+          <a:xfrm>
+            <a:off x="7406640" y="5760720"/>
+            <a:ext cx="3566160" cy="420624"/>
+          </a:xfrm>
+          <a:prstGeom prst="rect">
+            <a:avLst/>
+          </a:prstGeom>
+          <a:solidFill>
+            <a:srgbClr val="FFFFFF"/>
+          </a:solidFill>
+          <a:ln w="7620">
+            <a:solidFill>
+              <a:srgbClr val="CCCCCC"/>
+            </a:solidFill>
+          </a:ln>
+        </p:spPr>
+        <p:style>
+          <a:lnRef idx="1">
+            <a:schemeClr val="accent1"/>
+          </a:lnRef>
+          <a:fillRef idx="3">
+            <a:schemeClr val="accent1"/>
+          </a:fillRef>
+          <a:effectRef idx="2">
+            <a:schemeClr val="accent1"/>
+          </a:effectRef>
+          <a:fontRef idx="minor">
+            <a:schemeClr val="lt1"/>
+          </a:fontRef>
+        </p:style>
+        <p:txBody>
+          <a:bodyPr rtlCol="0" anchor="ctr"/>
+          <a:lstStyle/>
+          <a:p>
+            <a:pPr algn="ctr"/>
+          </a:p>
+        </p:txBody>
+      </p:sp>
+      <p:sp>
+        <p:nvSpPr>
+          <p:cNvPr id="109" name="TextBox 108"/>
+          <p:cNvSpPr txBox="1"/>
+          <p:nvPr/>
+        </p:nvSpPr>
+        <p:spPr>
+          <a:xfrm>
+            <a:off x="7452360" y="5797296"/>
+            <a:ext cx="3474720" cy="347472"/>
+          </a:xfrm>
+          <a:prstGeom prst="rect">
+            <a:avLst/>
+          </a:prstGeom>
+          <a:noFill/>
+        </p:spPr>
+        <p:txBody>
+          <a:bodyPr wrap="square">
+            <a:spAutoFit/>
+          </a:bodyPr>
+          <a:lstStyle/>
+          <a:p>
+            <a:pPr algn="l"/>
+            <a:r>
+              <a:rPr sz="850" b="0">
+                <a:solidFill>
+                  <a:srgbClr val="1A1A1A"/>
+                </a:solidFill>
+              </a:rPr>
+              <a:t>Hub・Project 各 1 個（TODO）</a:t>
             </a:r>
           </a:p>
         </p:txBody>
@@ -8680,28 +11002,28 @@
         </p:nvSpPr>
         <p:spPr>
           <a:xfrm>
-            <a:off x="182880" y="91440"/>
-            <a:ext cx="11795760" cy="365760"/>
-          </a:xfrm>
-          <a:prstGeom prst="rect">
-            <a:avLst/>
-          </a:prstGeom>
-          <a:noFill/>
-        </p:spPr>
-        <p:txBody>
-          <a:bodyPr wrap="square">
-            <a:spAutoFit/>
-          </a:bodyPr>
-          <a:lstStyle/>
-          <a:p>
-            <a:pPr algn="ctr"/>
-            <a:r>
-              <a:rPr sz="1600" b="1">
+            <a:off x="182880" y="45720"/>
+            <a:ext cx="11795760" cy="347472"/>
+          </a:xfrm>
+          <a:prstGeom prst="rect">
+            <a:avLst/>
+          </a:prstGeom>
+          <a:noFill/>
+        </p:spPr>
+        <p:txBody>
+          <a:bodyPr wrap="square">
+            <a:spAutoFit/>
+          </a:bodyPr>
+          <a:lstStyle/>
+          <a:p>
+            <a:pPr algn="ctr"/>
+            <a:r>
+              <a:rPr sz="1500" b="1">
                 <a:solidFill>
                   <a:srgbClr val="0078D4"/>
                 </a:solidFill>
               </a:rPr>
-              <a:t>通信フロー</a:t>
+              <a:t>通信フロー — チャット回答が返るまで</a:t>
             </a:r>
           </a:p>
         </p:txBody>
@@ -8714,18 +11036,18 @@
         </p:nvSpPr>
         <p:spPr>
           <a:xfrm>
-            <a:off x="274320" y="640080"/>
-            <a:ext cx="11430000" cy="1234440"/>
+            <a:off x="228600" y="475488"/>
+            <a:ext cx="11704320" cy="731520"/>
           </a:xfrm>
           <a:prstGeom prst="rect">
             <a:avLst/>
           </a:prstGeom>
           <a:solidFill>
-            <a:srgbClr val="F5F8FF"/>
+            <a:srgbClr val="F5F5F5"/>
           </a:solidFill>
           <a:ln w="12700">
             <a:solidFill>
-              <a:srgbClr val="0078D4"/>
+              <a:srgbClr val="909090"/>
             </a:solidFill>
           </a:ln>
         </p:spPr>
@@ -8759,8 +11081,42 @@
         </p:nvSpPr>
         <p:spPr>
           <a:xfrm>
-            <a:off x="365760" y="685800"/>
-            <a:ext cx="11247120" cy="274320"/>
+            <a:off x="256032" y="512064"/>
+            <a:ext cx="457200" cy="320040"/>
+          </a:xfrm>
+          <a:prstGeom prst="rect">
+            <a:avLst/>
+          </a:prstGeom>
+          <a:noFill/>
+        </p:spPr>
+        <p:txBody>
+          <a:bodyPr wrap="square">
+            <a:spAutoFit/>
+          </a:bodyPr>
+          <a:lstStyle/>
+          <a:p>
+            <a:pPr algn="ctr"/>
+            <a:r>
+              <a:rPr sz="1300" b="1">
+                <a:solidFill>
+                  <a:srgbClr val="909090"/>
+                </a:solidFill>
+              </a:rPr>
+              <a:t>①</a:t>
+            </a:r>
+          </a:p>
+        </p:txBody>
+      </p:sp>
+      <p:sp>
+        <p:nvSpPr>
+          <p:cNvPr id="5" name="TextBox 4"/>
+          <p:cNvSpPr txBox="1"/>
+          <p:nvPr/>
+        </p:nvSpPr>
+        <p:spPr>
+          <a:xfrm>
+            <a:off x="777240" y="512064"/>
+            <a:ext cx="10789920" cy="256032"/>
           </a:xfrm>
           <a:prstGeom prst="rect">
             <a:avLst/>
@@ -8775,26 +11131,26 @@
           <a:p>
             <a:pPr algn="l"/>
             <a:r>
-              <a:rPr sz="1100" b="1">
-                <a:solidFill>
-                  <a:srgbClr val="0078D4"/>
-                </a:solidFill>
-              </a:rPr>
-              <a:t>1. ユーザー → Frontend</a:t>
-            </a:r>
-          </a:p>
-        </p:txBody>
-      </p:sp>
-      <p:sp>
-        <p:nvSpPr>
-          <p:cNvPr id="5" name="TextBox 4"/>
-          <p:cNvSpPr txBox="1"/>
-          <p:nvPr/>
-        </p:nvSpPr>
-        <p:spPr>
-          <a:xfrm>
-            <a:off x="365760" y="960119"/>
-            <a:ext cx="11247120" cy="411480"/>
+              <a:rPr sz="1000" b="1">
+                <a:solidFill>
+                  <a:srgbClr val="1A1A1A"/>
+                </a:solidFill>
+              </a:rPr>
+              <a:t>オンプレ PC → VPN デバイス</a:t>
+            </a:r>
+          </a:p>
+        </p:txBody>
+      </p:sp>
+      <p:sp>
+        <p:nvSpPr>
+          <p:cNvPr id="6" name="TextBox 5"/>
+          <p:cNvSpPr txBox="1"/>
+          <p:nvPr/>
+        </p:nvSpPr>
+        <p:spPr>
+          <a:xfrm>
+            <a:off x="777240" y="804672"/>
+            <a:ext cx="10789920" cy="329184"/>
           </a:xfrm>
           <a:prstGeom prst="rect">
             <a:avLst/>
@@ -8809,46 +11165,12 @@
           <a:p>
             <a:pPr algn="l"/>
             <a:r>
-              <a:rPr sz="1000" b="0">
-                <a:solidFill>
-                  <a:srgbClr val="1A1A1A"/>
-                </a:solidFill>
-              </a:rPr>
-              <a:t>オンプレ PC  →  VPN（IPsec）  →  VPN Gateway  →  VNet  →  Private Endpoint  →  App Service Frontend</a:t>
-            </a:r>
-          </a:p>
-        </p:txBody>
-      </p:sp>
-      <p:sp>
-        <p:nvSpPr>
-          <p:cNvPr id="6" name="TextBox 5"/>
-          <p:cNvSpPr txBox="1"/>
-          <p:nvPr/>
-        </p:nvSpPr>
-        <p:spPr>
-          <a:xfrm>
-            <a:off x="365760" y="1371600"/>
-            <a:ext cx="11247120" cy="365760"/>
-          </a:xfrm>
-          <a:prstGeom prst="rect">
-            <a:avLst/>
-          </a:prstGeom>
-          <a:noFill/>
-        </p:spPr>
-        <p:txBody>
-          <a:bodyPr wrap="square">
-            <a:spAutoFit/>
-          </a:bodyPr>
-          <a:lstStyle/>
-          <a:p>
-            <a:pPr algn="l"/>
-            <a:r>
-              <a:rPr sz="800" b="0">
+              <a:rPr sz="850" b="0">
                 <a:solidFill>
                   <a:srgbClr val="606060"/>
                 </a:solidFill>
               </a:rPr>
-              <a:t>補足: 社外からは DNS 解決不可。VPN 接続済みオンプレからのみ到達可能。</a:t>
+              <a:t>オンプレ内通信</a:t>
             </a:r>
           </a:p>
         </p:txBody>
@@ -8861,18 +11183,18 @@
         </p:nvSpPr>
         <p:spPr>
           <a:xfrm>
-            <a:off x="274320" y="2011680"/>
-            <a:ext cx="11430000" cy="1234440"/>
+            <a:off x="228600" y="1261872"/>
+            <a:ext cx="11704320" cy="731520"/>
           </a:xfrm>
           <a:prstGeom prst="rect">
             <a:avLst/>
           </a:prstGeom>
           <a:solidFill>
-            <a:srgbClr val="F5F8FF"/>
+            <a:srgbClr val="E8EAED"/>
           </a:solidFill>
           <a:ln w="12700">
             <a:solidFill>
-              <a:srgbClr val="0078D4"/>
+              <a:srgbClr val="909090"/>
             </a:solidFill>
           </a:ln>
         </p:spPr>
@@ -8906,8 +11228,42 @@
         </p:nvSpPr>
         <p:spPr>
           <a:xfrm>
-            <a:off x="365760" y="2057400"/>
-            <a:ext cx="11247120" cy="274320"/>
+            <a:off x="256032" y="1298448"/>
+            <a:ext cx="457200" cy="320040"/>
+          </a:xfrm>
+          <a:prstGeom prst="rect">
+            <a:avLst/>
+          </a:prstGeom>
+          <a:noFill/>
+        </p:spPr>
+        <p:txBody>
+          <a:bodyPr wrap="square">
+            <a:spAutoFit/>
+          </a:bodyPr>
+          <a:lstStyle/>
+          <a:p>
+            <a:pPr algn="ctr"/>
+            <a:r>
+              <a:rPr sz="1300" b="1">
+                <a:solidFill>
+                  <a:srgbClr val="909090"/>
+                </a:solidFill>
+              </a:rPr>
+              <a:t>②</a:t>
+            </a:r>
+          </a:p>
+        </p:txBody>
+      </p:sp>
+      <p:sp>
+        <p:nvSpPr>
+          <p:cNvPr id="9" name="TextBox 8"/>
+          <p:cNvSpPr txBox="1"/>
+          <p:nvPr/>
+        </p:nvSpPr>
+        <p:spPr>
+          <a:xfrm>
+            <a:off x="777240" y="1298448"/>
+            <a:ext cx="10789920" cy="256032"/>
           </a:xfrm>
           <a:prstGeom prst="rect">
             <a:avLst/>
@@ -8922,26 +11278,26 @@
           <a:p>
             <a:pPr algn="l"/>
             <a:r>
-              <a:rPr sz="1100" b="1">
-                <a:solidFill>
-                  <a:srgbClr val="0078D4"/>
-                </a:solidFill>
-              </a:rPr>
-              <a:t>2. Frontend → Backend</a:t>
-            </a:r>
-          </a:p>
-        </p:txBody>
-      </p:sp>
-      <p:sp>
-        <p:nvSpPr>
-          <p:cNvPr id="9" name="TextBox 8"/>
-          <p:cNvSpPr txBox="1"/>
-          <p:nvPr/>
-        </p:nvSpPr>
-        <p:spPr>
-          <a:xfrm>
-            <a:off x="365760" y="2331720"/>
-            <a:ext cx="11247120" cy="411480"/>
+              <a:rPr sz="1000" b="1">
+                <a:solidFill>
+                  <a:srgbClr val="1A1A1A"/>
+                </a:solidFill>
+              </a:rPr>
+              <a:t>VPN デバイス → VPN Gateway（GatewaySubnet）</a:t>
+            </a:r>
+          </a:p>
+        </p:txBody>
+      </p:sp>
+      <p:sp>
+        <p:nvSpPr>
+          <p:cNvPr id="10" name="TextBox 9"/>
+          <p:cNvSpPr txBox="1"/>
+          <p:nvPr/>
+        </p:nvSpPr>
+        <p:spPr>
+          <a:xfrm>
+            <a:off x="777240" y="1591055"/>
+            <a:ext cx="10789920" cy="329184"/>
           </a:xfrm>
           <a:prstGeom prst="rect">
             <a:avLst/>
@@ -8956,46 +11312,12 @@
           <a:p>
             <a:pPr algn="l"/>
             <a:r>
-              <a:rPr sz="1000" b="0">
-                <a:solidFill>
-                  <a:srgbClr val="1A1A1A"/>
-                </a:solidFill>
-              </a:rPr>
-              <a:t>App Service Frontend  →  VNet 内通信（VNet Integration）  →  App Service Backend</a:t>
-            </a:r>
-          </a:p>
-        </p:txBody>
-      </p:sp>
-      <p:sp>
-        <p:nvSpPr>
-          <p:cNvPr id="10" name="TextBox 9"/>
-          <p:cNvSpPr txBox="1"/>
-          <p:nvPr/>
-        </p:nvSpPr>
-        <p:spPr>
-          <a:xfrm>
-            <a:off x="365760" y="2743200"/>
-            <a:ext cx="11247120" cy="365760"/>
-          </a:xfrm>
-          <a:prstGeom prst="rect">
-            <a:avLst/>
-          </a:prstGeom>
-          <a:noFill/>
-        </p:spPr>
-        <p:txBody>
-          <a:bodyPr wrap="square">
-            <a:spAutoFit/>
-          </a:bodyPr>
-          <a:lstStyle/>
-          <a:p>
-            <a:pPr algn="l"/>
-            <a:r>
-              <a:rPr sz="800" b="0">
+              <a:rPr sz="850" b="0">
                 <a:solidFill>
                   <a:srgbClr val="606060"/>
                 </a:solidFill>
               </a:rPr>
-              <a:t>補足: 同一 VNet 内の通信。インターネットを経由しない。</a:t>
+              <a:t>IPsec 暗号化トンネル経由で Azure VNet に入る</a:t>
             </a:r>
           </a:p>
         </p:txBody>
@@ -9008,18 +11330,18 @@
         </p:nvSpPr>
         <p:spPr>
           <a:xfrm>
-            <a:off x="274320" y="3383280"/>
-            <a:ext cx="11430000" cy="1234440"/>
+            <a:off x="228600" y="2048256"/>
+            <a:ext cx="11704320" cy="731520"/>
           </a:xfrm>
           <a:prstGeom prst="rect">
             <a:avLst/>
           </a:prstGeom>
           <a:solidFill>
-            <a:srgbClr val="F5F8FF"/>
+            <a:srgbClr val="B2DFDB"/>
           </a:solidFill>
           <a:ln w="12700">
             <a:solidFill>
-              <a:srgbClr val="0078D4"/>
+              <a:srgbClr val="00695C"/>
             </a:solidFill>
           </a:ln>
         </p:spPr>
@@ -9053,8 +11375,42 @@
         </p:nvSpPr>
         <p:spPr>
           <a:xfrm>
-            <a:off x="365760" y="3429000"/>
-            <a:ext cx="11247120" cy="274320"/>
+            <a:off x="256032" y="2084832"/>
+            <a:ext cx="457200" cy="320040"/>
+          </a:xfrm>
+          <a:prstGeom prst="rect">
+            <a:avLst/>
+          </a:prstGeom>
+          <a:noFill/>
+        </p:spPr>
+        <p:txBody>
+          <a:bodyPr wrap="square">
+            <a:spAutoFit/>
+          </a:bodyPr>
+          <a:lstStyle/>
+          <a:p>
+            <a:pPr algn="ctr"/>
+            <a:r>
+              <a:rPr sz="1300" b="1">
+                <a:solidFill>
+                  <a:srgbClr val="00695C"/>
+                </a:solidFill>
+              </a:rPr>
+              <a:t>③④</a:t>
+            </a:r>
+          </a:p>
+        </p:txBody>
+      </p:sp>
+      <p:sp>
+        <p:nvSpPr>
+          <p:cNvPr id="13" name="TextBox 12"/>
+          <p:cNvSpPr txBox="1"/>
+          <p:nvPr/>
+        </p:nvSpPr>
+        <p:spPr>
+          <a:xfrm>
+            <a:off x="777240" y="2084832"/>
+            <a:ext cx="10789920" cy="256032"/>
           </a:xfrm>
           <a:prstGeom prst="rect">
             <a:avLst/>
@@ -9069,26 +11425,26 @@
           <a:p>
             <a:pPr algn="l"/>
             <a:r>
-              <a:rPr sz="1100" b="1">
-                <a:solidFill>
-                  <a:srgbClr val="0078D4"/>
-                </a:solidFill>
-              </a:rPr>
-              <a:t>3. Backend → AI（マネージドID 認証）</a:t>
-            </a:r>
-          </a:p>
-        </p:txBody>
-      </p:sp>
-      <p:sp>
-        <p:nvSpPr>
-          <p:cNvPr id="13" name="TextBox 12"/>
-          <p:cNvSpPr txBox="1"/>
-          <p:nvPr/>
-        </p:nvSpPr>
-        <p:spPr>
-          <a:xfrm>
-            <a:off x="365760" y="3703320"/>
-            <a:ext cx="11247120" cy="411480"/>
+              <a:rPr sz="1000" b="1">
+                <a:solidFill>
+                  <a:srgbClr val="1A1A1A"/>
+                </a:solidFill>
+              </a:rPr>
+              <a:t>VPN GW → PE:Frontend（subnet-pe）→ App Service Frontend</a:t>
+            </a:r>
+          </a:p>
+        </p:txBody>
+      </p:sp>
+      <p:sp>
+        <p:nvSpPr>
+          <p:cNvPr id="14" name="TextBox 13"/>
+          <p:cNvSpPr txBox="1"/>
+          <p:nvPr/>
+        </p:nvSpPr>
+        <p:spPr>
+          <a:xfrm>
+            <a:off x="777240" y="2377440"/>
+            <a:ext cx="10789920" cy="329184"/>
           </a:xfrm>
           <a:prstGeom prst="rect">
             <a:avLst/>
@@ -9103,46 +11459,12 @@
           <a:p>
             <a:pPr algn="l"/>
             <a:r>
-              <a:rPr sz="1000" b="0">
-                <a:solidFill>
-                  <a:srgbClr val="1A1A1A"/>
-                </a:solidFill>
-              </a:rPr>
-              <a:t>App Service Backend  →  マネージドID で EntraID 認証  →  Foundry / Azure OpenAI</a:t>
-            </a:r>
-          </a:p>
-        </p:txBody>
-      </p:sp>
-      <p:sp>
-        <p:nvSpPr>
-          <p:cNvPr id="14" name="TextBox 13"/>
-          <p:cNvSpPr txBox="1"/>
-          <p:nvPr/>
-        </p:nvSpPr>
-        <p:spPr>
-          <a:xfrm>
-            <a:off x="365760" y="4114800"/>
-            <a:ext cx="11247120" cy="365760"/>
-          </a:xfrm>
-          <a:prstGeom prst="rect">
-            <a:avLst/>
-          </a:prstGeom>
-          <a:noFill/>
-        </p:spPr>
-        <p:txBody>
-          <a:bodyPr wrap="square">
-            <a:spAutoFit/>
-          </a:bodyPr>
-          <a:lstStyle/>
-          <a:p>
-            <a:pPr algn="l"/>
-            <a:r>
-              <a:rPr sz="800" b="0">
+              <a:rPr sz="850" b="0">
                 <a:solidFill>
                   <a:srgbClr val="606060"/>
                 </a:solidFill>
               </a:rPr>
-              <a:t>補足: キー・シークレット不要。Backend の Principal ID に Cognitive Services User ロールを付与。</a:t>
+              <a:t>Private Endpoint がインバウンドを受け、Azure 内部プライベート回線でFrontend に転送。Public 無効のため社外からは DNS 解決すら不可</a:t>
             </a:r>
           </a:p>
         </p:txBody>
@@ -9155,18 +11477,18 @@
         </p:nvSpPr>
         <p:spPr>
           <a:xfrm>
-            <a:off x="274320" y="4754880"/>
-            <a:ext cx="11430000" cy="1234440"/>
+            <a:off x="228600" y="2834640"/>
+            <a:ext cx="11704320" cy="731520"/>
           </a:xfrm>
           <a:prstGeom prst="rect">
             <a:avLst/>
           </a:prstGeom>
           <a:solidFill>
-            <a:srgbClr val="FFF0F0"/>
+            <a:srgbClr val="B3D9F7"/>
           </a:solidFill>
           <a:ln w="12700">
             <a:solidFill>
-              <a:srgbClr val="C00000"/>
+              <a:srgbClr val="01579B"/>
             </a:solidFill>
           </a:ln>
         </p:spPr>
@@ -9200,8 +11522,42 @@
         </p:nvSpPr>
         <p:spPr>
           <a:xfrm>
-            <a:off x="365760" y="4800600"/>
-            <a:ext cx="11247120" cy="274320"/>
+            <a:off x="256032" y="2871216"/>
+            <a:ext cx="457200" cy="320040"/>
+          </a:xfrm>
+          <a:prstGeom prst="rect">
+            <a:avLst/>
+          </a:prstGeom>
+          <a:noFill/>
+        </p:spPr>
+        <p:txBody>
+          <a:bodyPr wrap="square">
+            <a:spAutoFit/>
+          </a:bodyPr>
+          <a:lstStyle/>
+          <a:p>
+            <a:pPr algn="ctr"/>
+            <a:r>
+              <a:rPr sz="1300" b="1">
+                <a:solidFill>
+                  <a:srgbClr val="01579B"/>
+                </a:solidFill>
+              </a:rPr>
+              <a:t>⑤⑥</a:t>
+            </a:r>
+          </a:p>
+        </p:txBody>
+      </p:sp>
+      <p:sp>
+        <p:nvSpPr>
+          <p:cNvPr id="17" name="TextBox 16"/>
+          <p:cNvSpPr txBox="1"/>
+          <p:nvPr/>
+        </p:nvSpPr>
+        <p:spPr>
+          <a:xfrm>
+            <a:off x="777240" y="2871216"/>
+            <a:ext cx="10789920" cy="256032"/>
           </a:xfrm>
           <a:prstGeom prst="rect">
             <a:avLst/>
@@ -9216,26 +11572,26 @@
           <a:p>
             <a:pPr algn="l"/>
             <a:r>
-              <a:rPr sz="1100" b="1">
-                <a:solidFill>
-                  <a:srgbClr val="C00000"/>
-                </a:solidFill>
-              </a:rPr>
-              <a:t>4. 社外からのアクセス（遮断）</a:t>
-            </a:r>
-          </a:p>
-        </p:txBody>
-      </p:sp>
-      <p:sp>
-        <p:nvSpPr>
-          <p:cNvPr id="17" name="TextBox 16"/>
-          <p:cNvSpPr txBox="1"/>
-          <p:nvPr/>
-        </p:nvSpPr>
-        <p:spPr>
-          <a:xfrm>
-            <a:off x="365760" y="5074920"/>
-            <a:ext cx="11247120" cy="411480"/>
+              <a:rPr sz="1000" b="1">
+                <a:solidFill>
+                  <a:srgbClr val="1A1A1A"/>
+                </a:solidFill>
+              </a:rPr>
+              <a:t>Frontend → subnet-integration（出口）→ PE:Backend → App Service Backend</a:t>
+            </a:r>
+          </a:p>
+        </p:txBody>
+      </p:sp>
+      <p:sp>
+        <p:nvSpPr>
+          <p:cNvPr id="18" name="TextBox 17"/>
+          <p:cNvSpPr txBox="1"/>
+          <p:nvPr/>
+        </p:nvSpPr>
+        <p:spPr>
+          <a:xfrm>
+            <a:off x="777240" y="3163824"/>
+            <a:ext cx="10789920" cy="329184"/>
           </a:xfrm>
           <a:prstGeom prst="rect">
             <a:avLst/>
@@ -9250,26 +11606,139 @@
           <a:p>
             <a:pPr algn="l"/>
             <a:r>
-              <a:rPr sz="1000" b="0">
+              <a:rPr sz="850" b="0">
+                <a:solidFill>
+                  <a:srgbClr val="606060"/>
+                </a:solidFill>
+              </a:rPr>
+              <a:t>VNet Integration で subnet-integration を出口として使い、Private DNS が Backend の PE プライベート IP に解決</a:t>
+            </a:r>
+          </a:p>
+        </p:txBody>
+      </p:sp>
+      <p:sp>
+        <p:nvSpPr>
+          <p:cNvPr id="19" name="Rectangle 18"/>
+          <p:cNvSpPr/>
+          <p:nvPr/>
+        </p:nvSpPr>
+        <p:spPr>
+          <a:xfrm>
+            <a:off x="228600" y="3621024"/>
+            <a:ext cx="11704320" cy="731520"/>
+          </a:xfrm>
+          <a:prstGeom prst="rect">
+            <a:avLst/>
+          </a:prstGeom>
+          <a:solidFill>
+            <a:srgbClr val="F3E5F5"/>
+          </a:solidFill>
+          <a:ln w="12700">
+            <a:solidFill>
+              <a:srgbClr val="6A1A9A"/>
+            </a:solidFill>
+          </a:ln>
+        </p:spPr>
+        <p:style>
+          <a:lnRef idx="1">
+            <a:schemeClr val="accent1"/>
+          </a:lnRef>
+          <a:fillRef idx="3">
+            <a:schemeClr val="accent1"/>
+          </a:fillRef>
+          <a:effectRef idx="2">
+            <a:schemeClr val="accent1"/>
+          </a:effectRef>
+          <a:fontRef idx="minor">
+            <a:schemeClr val="lt1"/>
+          </a:fontRef>
+        </p:style>
+        <p:txBody>
+          <a:bodyPr rtlCol="0" anchor="ctr"/>
+          <a:lstStyle/>
+          <a:p>
+            <a:pPr algn="ctr"/>
+          </a:p>
+        </p:txBody>
+      </p:sp>
+      <p:sp>
+        <p:nvSpPr>
+          <p:cNvPr id="20" name="TextBox 19"/>
+          <p:cNvSpPr txBox="1"/>
+          <p:nvPr/>
+        </p:nvSpPr>
+        <p:spPr>
+          <a:xfrm>
+            <a:off x="256032" y="3657600"/>
+            <a:ext cx="457200" cy="320040"/>
+          </a:xfrm>
+          <a:prstGeom prst="rect">
+            <a:avLst/>
+          </a:prstGeom>
+          <a:noFill/>
+        </p:spPr>
+        <p:txBody>
+          <a:bodyPr wrap="square">
+            <a:spAutoFit/>
+          </a:bodyPr>
+          <a:lstStyle/>
+          <a:p>
+            <a:pPr algn="ctr"/>
+            <a:r>
+              <a:rPr sz="1300" b="1">
+                <a:solidFill>
+                  <a:srgbClr val="6A1A9A"/>
+                </a:solidFill>
+              </a:rPr>
+              <a:t>⑦⑧</a:t>
+            </a:r>
+          </a:p>
+        </p:txBody>
+      </p:sp>
+      <p:sp>
+        <p:nvSpPr>
+          <p:cNvPr id="21" name="TextBox 20"/>
+          <p:cNvSpPr txBox="1"/>
+          <p:nvPr/>
+        </p:nvSpPr>
+        <p:spPr>
+          <a:xfrm>
+            <a:off x="777240" y="3657600"/>
+            <a:ext cx="10789920" cy="256032"/>
+          </a:xfrm>
+          <a:prstGeom prst="rect">
+            <a:avLst/>
+          </a:prstGeom>
+          <a:noFill/>
+        </p:spPr>
+        <p:txBody>
+          <a:bodyPr wrap="square">
+            <a:spAutoFit/>
+          </a:bodyPr>
+          <a:lstStyle/>
+          <a:p>
+            <a:pPr algn="l"/>
+            <a:r>
+              <a:rPr sz="1000" b="1">
                 <a:solidFill>
                   <a:srgbClr val="1A1A1A"/>
                 </a:solidFill>
               </a:rPr>
-              <a:t>インターネット  →  DNS 解決不可（Public Endpoint 無効）  →  接続不可</a:t>
-            </a:r>
-          </a:p>
-        </p:txBody>
-      </p:sp>
-      <p:sp>
-        <p:nvSpPr>
-          <p:cNvPr id="18" name="TextBox 17"/>
-          <p:cNvSpPr txBox="1"/>
-          <p:nvPr/>
-        </p:nvSpPr>
-        <p:spPr>
-          <a:xfrm>
-            <a:off x="365760" y="5486400"/>
-            <a:ext cx="11247120" cy="365760"/>
+              <a:t>Backend → subnet-integration（出口）→ PE:Foundry → Azure AI Foundry</a:t>
+            </a:r>
+          </a:p>
+        </p:txBody>
+      </p:sp>
+      <p:sp>
+        <p:nvSpPr>
+          <p:cNvPr id="22" name="TextBox 21"/>
+          <p:cNvSpPr txBox="1"/>
+          <p:nvPr/>
+        </p:nvSpPr>
+        <p:spPr>
+          <a:xfrm>
+            <a:off x="777240" y="3950208"/>
+            <a:ext cx="10789920" cy="329184"/>
           </a:xfrm>
           <a:prstGeom prst="rect">
             <a:avLst/>
@@ -9284,12 +11753,340 @@
           <a:p>
             <a:pPr algn="l"/>
             <a:r>
+              <a:rPr sz="850" b="0">
+                <a:solidFill>
+                  <a:srgbClr val="606060"/>
+                </a:solidFill>
+              </a:rPr>
+              <a:t>Managed ID 認証。Backend が Foundry 親エージェントを呼ぶ</a:t>
+            </a:r>
+          </a:p>
+        </p:txBody>
+      </p:sp>
+      <p:sp>
+        <p:nvSpPr>
+          <p:cNvPr id="23" name="Rectangle 22"/>
+          <p:cNvSpPr/>
+          <p:nvPr/>
+        </p:nvSpPr>
+        <p:spPr>
+          <a:xfrm>
+            <a:off x="228600" y="4407408"/>
+            <a:ext cx="11704320" cy="731520"/>
+          </a:xfrm>
+          <a:prstGeom prst="rect">
+            <a:avLst/>
+          </a:prstGeom>
+          <a:solidFill>
+            <a:srgbClr val="C8E6C9"/>
+          </a:solidFill>
+          <a:ln w="12700">
+            <a:solidFill>
+              <a:srgbClr val="1B5E20"/>
+            </a:solidFill>
+          </a:ln>
+        </p:spPr>
+        <p:style>
+          <a:lnRef idx="1">
+            <a:schemeClr val="accent1"/>
+          </a:lnRef>
+          <a:fillRef idx="3">
+            <a:schemeClr val="accent1"/>
+          </a:fillRef>
+          <a:effectRef idx="2">
+            <a:schemeClr val="accent1"/>
+          </a:effectRef>
+          <a:fontRef idx="minor">
+            <a:schemeClr val="lt1"/>
+          </a:fontRef>
+        </p:style>
+        <p:txBody>
+          <a:bodyPr rtlCol="0" anchor="ctr"/>
+          <a:lstStyle/>
+          <a:p>
+            <a:pPr algn="ctr"/>
+          </a:p>
+        </p:txBody>
+      </p:sp>
+      <p:sp>
+        <p:nvSpPr>
+          <p:cNvPr id="24" name="TextBox 23"/>
+          <p:cNvSpPr txBox="1"/>
+          <p:nvPr/>
+        </p:nvSpPr>
+        <p:spPr>
+          <a:xfrm>
+            <a:off x="256032" y="4443984"/>
+            <a:ext cx="457200" cy="320040"/>
+          </a:xfrm>
+          <a:prstGeom prst="rect">
+            <a:avLst/>
+          </a:prstGeom>
+          <a:noFill/>
+        </p:spPr>
+        <p:txBody>
+          <a:bodyPr wrap="square">
+            <a:spAutoFit/>
+          </a:bodyPr>
+          <a:lstStyle/>
+          <a:p>
+            <a:pPr algn="ctr"/>
+            <a:r>
+              <a:rPr sz="1300" b="1">
+                <a:solidFill>
+                  <a:srgbClr val="1B5E20"/>
+                </a:solidFill>
+              </a:rPr>
+              <a:t>⑨⑩</a:t>
+            </a:r>
+          </a:p>
+        </p:txBody>
+      </p:sp>
+      <p:sp>
+        <p:nvSpPr>
+          <p:cNvPr id="25" name="TextBox 24"/>
+          <p:cNvSpPr txBox="1"/>
+          <p:nvPr/>
+        </p:nvSpPr>
+        <p:spPr>
+          <a:xfrm>
+            <a:off x="777240" y="4443984"/>
+            <a:ext cx="10789920" cy="256032"/>
+          </a:xfrm>
+          <a:prstGeom prst="rect">
+            <a:avLst/>
+          </a:prstGeom>
+          <a:noFill/>
+        </p:spPr>
+        <p:txBody>
+          <a:bodyPr wrap="square">
+            <a:spAutoFit/>
+          </a:bodyPr>
+          <a:lstStyle/>
+          <a:p>
+            <a:pPr algn="l"/>
+            <a:r>
+              <a:rPr sz="1000" b="1">
+                <a:solidFill>
+                  <a:srgbClr val="1A1A1A"/>
+                </a:solidFill>
+              </a:rPr>
+              <a:t>Foundry → PE:Functions（subnet-pe）→ Azure Functions（RAGツール）</a:t>
+            </a:r>
+          </a:p>
+        </p:txBody>
+      </p:sp>
+      <p:sp>
+        <p:nvSpPr>
+          <p:cNvPr id="26" name="TextBox 25"/>
+          <p:cNvSpPr txBox="1"/>
+          <p:nvPr/>
+        </p:nvSpPr>
+        <p:spPr>
+          <a:xfrm>
+            <a:off x="777240" y="4736592"/>
+            <a:ext cx="10789920" cy="329184"/>
+          </a:xfrm>
+          <a:prstGeom prst="rect">
+            <a:avLst/>
+          </a:prstGeom>
+          <a:noFill/>
+        </p:spPr>
+        <p:txBody>
+          <a:bodyPr wrap="square">
+            <a:spAutoFit/>
+          </a:bodyPr>
+          <a:lstStyle/>
+          <a:p>
+            <a:pPr algn="l"/>
+            <a:r>
+              <a:rPr sz="850" b="0">
+                <a:solidFill>
+                  <a:srgbClr val="606060"/>
+                </a:solidFill>
+              </a:rPr>
+              <a:t>Foundry Managed Network 経由で Functions を呼ぶ。Functions は subnet-func-integration を出口として AI Search へ</a:t>
+            </a:r>
+          </a:p>
+        </p:txBody>
+      </p:sp>
+      <p:sp>
+        <p:nvSpPr>
+          <p:cNvPr id="27" name="Rectangle 26"/>
+          <p:cNvSpPr/>
+          <p:nvPr/>
+        </p:nvSpPr>
+        <p:spPr>
+          <a:xfrm>
+            <a:off x="228600" y="5193792"/>
+            <a:ext cx="11704320" cy="731520"/>
+          </a:xfrm>
+          <a:prstGeom prst="rect">
+            <a:avLst/>
+          </a:prstGeom>
+          <a:solidFill>
+            <a:srgbClr val="E8F5E9"/>
+          </a:solidFill>
+          <a:ln w="12700">
+            <a:solidFill>
+              <a:srgbClr val="01579B"/>
+            </a:solidFill>
+          </a:ln>
+        </p:spPr>
+        <p:style>
+          <a:lnRef idx="1">
+            <a:schemeClr val="accent1"/>
+          </a:lnRef>
+          <a:fillRef idx="3">
+            <a:schemeClr val="accent1"/>
+          </a:fillRef>
+          <a:effectRef idx="2">
+            <a:schemeClr val="accent1"/>
+          </a:effectRef>
+          <a:fontRef idx="minor">
+            <a:schemeClr val="lt1"/>
+          </a:fontRef>
+        </p:style>
+        <p:txBody>
+          <a:bodyPr rtlCol="0" anchor="ctr"/>
+          <a:lstStyle/>
+          <a:p>
+            <a:pPr algn="ctr"/>
+          </a:p>
+        </p:txBody>
+      </p:sp>
+      <p:sp>
+        <p:nvSpPr>
+          <p:cNvPr id="28" name="TextBox 27"/>
+          <p:cNvSpPr txBox="1"/>
+          <p:nvPr/>
+        </p:nvSpPr>
+        <p:spPr>
+          <a:xfrm>
+            <a:off x="256032" y="5230368"/>
+            <a:ext cx="457200" cy="320040"/>
+          </a:xfrm>
+          <a:prstGeom prst="rect">
+            <a:avLst/>
+          </a:prstGeom>
+          <a:noFill/>
+        </p:spPr>
+        <p:txBody>
+          <a:bodyPr wrap="square">
+            <a:spAutoFit/>
+          </a:bodyPr>
+          <a:lstStyle/>
+          <a:p>
+            <a:pPr algn="ctr"/>
+            <a:r>
+              <a:rPr sz="1300" b="1">
+                <a:solidFill>
+                  <a:srgbClr val="01579B"/>
+                </a:solidFill>
+              </a:rPr>
+              <a:t>⑪⑫</a:t>
+            </a:r>
+          </a:p>
+        </p:txBody>
+      </p:sp>
+      <p:sp>
+        <p:nvSpPr>
+          <p:cNvPr id="29" name="TextBox 28"/>
+          <p:cNvSpPr txBox="1"/>
+          <p:nvPr/>
+        </p:nvSpPr>
+        <p:spPr>
+          <a:xfrm>
+            <a:off x="777240" y="5230368"/>
+            <a:ext cx="10789920" cy="256032"/>
+          </a:xfrm>
+          <a:prstGeom prst="rect">
+            <a:avLst/>
+          </a:prstGeom>
+          <a:noFill/>
+        </p:spPr>
+        <p:txBody>
+          <a:bodyPr wrap="square">
+            <a:spAutoFit/>
+          </a:bodyPr>
+          <a:lstStyle/>
+          <a:p>
+            <a:pPr algn="l"/>
+            <a:r>
+              <a:rPr sz="1000" b="1">
+                <a:solidFill>
+                  <a:srgbClr val="1A1A1A"/>
+                </a:solidFill>
+              </a:rPr>
+              <a:t>Functions → subnet-func-integration → PE:AI Search → Azure AI Search → 回答生成</a:t>
+            </a:r>
+          </a:p>
+        </p:txBody>
+      </p:sp>
+      <p:sp>
+        <p:nvSpPr>
+          <p:cNvPr id="30" name="TextBox 29"/>
+          <p:cNvSpPr txBox="1"/>
+          <p:nvPr/>
+        </p:nvSpPr>
+        <p:spPr>
+          <a:xfrm>
+            <a:off x="777240" y="5522976"/>
+            <a:ext cx="10789920" cy="329184"/>
+          </a:xfrm>
+          <a:prstGeom prst="rect">
+            <a:avLst/>
+          </a:prstGeom>
+          <a:noFill/>
+        </p:spPr>
+        <p:txBody>
+          <a:bodyPr wrap="square">
+            <a:spAutoFit/>
+          </a:bodyPr>
+          <a:lstStyle/>
+          <a:p>
+            <a:pPr algn="l"/>
+            <a:r>
+              <a:rPr sz="850" b="0">
+                <a:solidFill>
+                  <a:srgbClr val="606060"/>
+                </a:solidFill>
+              </a:rPr>
+              <a:t>ベクトル検索結果を Foundry に返す。回答は逆経路で Frontend → オンプレ PC に返る</a:t>
+            </a:r>
+          </a:p>
+        </p:txBody>
+      </p:sp>
+      <p:sp>
+        <p:nvSpPr>
+          <p:cNvPr id="31" name="TextBox 30"/>
+          <p:cNvSpPr txBox="1"/>
+          <p:nvPr/>
+        </p:nvSpPr>
+        <p:spPr>
+          <a:xfrm>
+            <a:off x="228600" y="6601968"/>
+            <a:ext cx="11704320" cy="219456"/>
+          </a:xfrm>
+          <a:prstGeom prst="rect">
+            <a:avLst/>
+          </a:prstGeom>
+          <a:noFill/>
+        </p:spPr>
+        <p:txBody>
+          <a:bodyPr wrap="square">
+            <a:spAutoFit/>
+          </a:bodyPr>
+          <a:lstStyle/>
+          <a:p>
+            <a:pPr algn="ctr"/>
+            <a:r>
               <a:rPr sz="800" b="0">
                 <a:solidFill>
-                  <a:srgbClr val="606060"/>
-                </a:solidFill>
-              </a:rPr>
-              <a:t>補足: 存在しないものとして扱われる。ログイン画面すら表示されない。</a:t>
+                  <a:srgbClr val="C62828"/>
+                </a:solidFill>
+              </a:rPr>
+              <a:t>社外からは全 App Service / Functions の Public Endpoint が無効 → DNS 解決不可・存在が見えない</a:t>
             </a:r>
           </a:p>
         </p:txBody>
